--- a/blackhat-2026-adversarial-ai/closing/slides/Closing.pptx
+++ b/blackhat-2026-adversarial-ai/closing/slides/Closing.pptx
@@ -4,6 +4,9 @@
   <p:sldMasterIdLst>
     <p:sldMasterId id="2147483648" r:id="rId1"/>
   </p:sldMasterIdLst>
+  <p:notesMasterIdLst>
+    <p:notesMasterId r:id="rId18"/>
+  </p:notesMasterIdLst>
   <p:sldIdLst>
     <p:sldId id="256" r:id="rId2"/>
     <p:sldId id="257" r:id="rId3"/>
@@ -22,9 +25,6 @@
     <p:sldId id="270" r:id="rId16"/>
     <p:sldId id="271" r:id="rId17"/>
   </p:sldIdLst>
-  <p:notesMasterIdLst>
-    <p:notesMasterId r:id="rId18"/>
-  </p:notesMasterIdLst>
   <p:sldSz cx="18288000" cy="10287000"/>
   <p:notesSz cx="10287000" cy="18288000"/>
   <p:defaultTextStyle>
@@ -119,6 +119,11 @@
       </a:defRPr>
     </a:lvl9pPr>
   </p:defaultTextStyle>
+  <p:extLst>
+    <p:ext uri="{EFAFB233-063F-42B5-8137-9DF3F51BA10A}">
+      <p15:sldGuideLst xmlns:p15="http://schemas.microsoft.com/office/powerpoint/2012/main"/>
+    </p:ext>
+  </p:extLst>
 </p:presentation>
 </file>
 
@@ -144,234 +149,10 @@
           <a:chExt cx="0" cy="0"/>
         </a:xfrm>
       </p:grpSpPr>
-      <p:sp>
-        <p:nvSpPr>
-          <p:cNvPr id="2" name="Header Placeholder 1"/>
-          <p:cNvSpPr>
-            <a:spLocks noGrp="1"/>
-          </p:cNvSpPr>
-          <p:nvPr>
-            <p:ph type="hdr" sz="quarter"/>
-          </p:nvPr>
-        </p:nvSpPr>
-        <p:spPr>
-          <a:xfrm>
-            <a:off x="0" y="0"/>
-            <a:ext cx="2971800" cy="458788"/>
-          </a:xfrm>
-          <a:prstGeom prst="rect">
-            <a:avLst/>
-          </a:prstGeom>
-        </p:spPr>
-        <p:txBody>
-          <a:bodyPr vert="horz" lIns="91440" tIns="45720" rIns="91440" bIns="45720" rtlCol="0"/>
-          <a:lstStyle>
-            <a:lvl1pPr algn="l">
-              <a:defRPr sz="1200"/>
-            </a:lvl1pPr>
-          </a:lstStyle>
-          <a:p>
-            <a:endParaRPr lang="en-US"/>
-          </a:p>
-        </p:txBody>
-      </p:sp>
-      <p:sp>
-        <p:nvSpPr>
-          <p:cNvPr id="3" name="Date Placeholder 2"/>
-          <p:cNvSpPr>
-            <a:spLocks noGrp="1"/>
-          </p:cNvSpPr>
-          <p:nvPr>
-            <p:ph type="dt" idx="1"/>
-          </p:nvPr>
-        </p:nvSpPr>
-        <p:spPr>
-          <a:xfrm>
-            <a:off x="3884613" y="0"/>
-            <a:ext cx="2971800" cy="458788"/>
-          </a:xfrm>
-          <a:prstGeom prst="rect">
-            <a:avLst/>
-          </a:prstGeom>
-        </p:spPr>
-        <p:txBody>
-          <a:bodyPr vert="horz" lIns="91440" tIns="45720" rIns="91440" bIns="45720" rtlCol="0"/>
-          <a:lstStyle>
-            <a:lvl1pPr algn="r">
-              <a:defRPr sz="1200"/>
-            </a:lvl1pPr>
-          </a:lstStyle>
-          <a:p>
-            <a:fld id="{5282F153-3F37-0F45-9E97-73ACFA13230C}" type="datetimeFigureOut">
-              <a:rPr lang="en-US"/>
-              <a:t>7/23/19</a:t>
-            </a:fld>
-            <a:endParaRPr lang="en-US"/>
-          </a:p>
-        </p:txBody>
-      </p:sp>
-      <p:sp>
-        <p:nvSpPr>
-          <p:cNvPr id="4" name="Slide Image Placeholder 3"/>
-          <p:cNvSpPr>
-            <a:spLocks noGrp="1" noRot="1" noChangeAspect="1"/>
-          </p:cNvSpPr>
-          <p:nvPr>
-            <p:ph type="sldImg" idx="2"/>
-          </p:nvPr>
-        </p:nvSpPr>
-        <p:spPr>
-          <a:xfrm>
-            <a:off x="685800" y="1143000"/>
-            <a:ext cx="5486400" cy="3086100"/>
-          </a:xfrm>
-          <a:prstGeom prst="rect">
-            <a:avLst/>
-          </a:prstGeom>
-          <a:noFill/>
-          <a:ln w="12700">
-            <a:solidFill>
-              <a:prstClr val="black"/>
-            </a:solidFill>
-          </a:ln>
-        </p:spPr>
-        <p:txBody>
-          <a:bodyPr vert="horz" lIns="91440" tIns="45720" rIns="91440" bIns="45720" rtlCol="0" anchor="ctr"/>
-          <a:lstStyle/>
-          <a:p>
-            <a:endParaRPr lang="en-US"/>
-          </a:p>
-        </p:txBody>
-      </p:sp>
-      <p:sp>
-        <p:nvSpPr>
-          <p:cNvPr id="5" name="Notes Placeholder 4"/>
-          <p:cNvSpPr>
-            <a:spLocks noGrp="1"/>
-          </p:cNvSpPr>
-          <p:nvPr>
-            <p:ph type="body" sz="quarter" idx="3"/>
-          </p:nvPr>
-        </p:nvSpPr>
-        <p:spPr>
-          <a:xfrm>
-            <a:off x="685800" y="4400550"/>
-            <a:ext cx="5486400" cy="3600450"/>
-          </a:xfrm>
-          <a:prstGeom prst="rect">
-            <a:avLst/>
-          </a:prstGeom>
-        </p:spPr>
-        <p:txBody>
-          <a:bodyPr vert="horz" lIns="91440" tIns="45720" rIns="91440" bIns="45720" rtlCol="0"/>
-          <a:lstStyle/>
-          <a:p>
-            <a:pPr lvl="0"/>
-            <a:r>
-              <a:rPr lang="en-US"/>
-              <a:t>Click to edit Master text styles</a:t>
-            </a:r>
-          </a:p>
-          <a:p>
-            <a:pPr lvl="1"/>
-            <a:r>
-              <a:rPr lang="en-US"/>
-              <a:t>Second level</a:t>
-            </a:r>
-          </a:p>
-          <a:p>
-            <a:pPr lvl="2"/>
-            <a:r>
-              <a:rPr lang="en-US"/>
-              <a:t>Third level</a:t>
-            </a:r>
-          </a:p>
-          <a:p>
-            <a:pPr lvl="3"/>
-            <a:r>
-              <a:rPr lang="en-US"/>
-              <a:t>Fourth level</a:t>
-            </a:r>
-          </a:p>
-          <a:p>
-            <a:pPr lvl="4"/>
-            <a:r>
-              <a:rPr lang="en-US"/>
-              <a:t>Fifth level</a:t>
-            </a:r>
-          </a:p>
-        </p:txBody>
-      </p:sp>
-      <p:sp>
-        <p:nvSpPr>
-          <p:cNvPr id="6" name="Footer Placeholder 5"/>
-          <p:cNvSpPr>
-            <a:spLocks noGrp="1"/>
-          </p:cNvSpPr>
-          <p:nvPr>
-            <p:ph type="ftr" sz="quarter" idx="4"/>
-          </p:nvPr>
-        </p:nvSpPr>
-        <p:spPr>
-          <a:xfrm>
-            <a:off x="0" y="8685213"/>
-            <a:ext cx="2971800" cy="458787"/>
-          </a:xfrm>
-          <a:prstGeom prst="rect">
-            <a:avLst/>
-          </a:prstGeom>
-        </p:spPr>
-        <p:txBody>
-          <a:bodyPr vert="horz" lIns="91440" tIns="45720" rIns="91440" bIns="45720" rtlCol="0" anchor="b"/>
-          <a:lstStyle>
-            <a:lvl1pPr algn="l">
-              <a:defRPr sz="1200"/>
-            </a:lvl1pPr>
-          </a:lstStyle>
-          <a:p>
-            <a:endParaRPr lang="en-US"/>
-          </a:p>
-        </p:txBody>
-      </p:sp>
-      <p:sp>
-        <p:nvSpPr>
-          <p:cNvPr id="7" name="Slide Number Placeholder 6"/>
-          <p:cNvSpPr>
-            <a:spLocks noGrp="1"/>
-          </p:cNvSpPr>
-          <p:nvPr>
-            <p:ph type="sldNum" sz="quarter" idx="5"/>
-          </p:nvPr>
-        </p:nvSpPr>
-        <p:spPr>
-          <a:xfrm>
-            <a:off x="3884613" y="8685213"/>
-            <a:ext cx="2971800" cy="458787"/>
-          </a:xfrm>
-          <a:prstGeom prst="rect">
-            <a:avLst/>
-          </a:prstGeom>
-        </p:spPr>
-        <p:txBody>
-          <a:bodyPr vert="horz" lIns="91440" tIns="45720" rIns="91440" bIns="45720" rtlCol="0" anchor="b"/>
-          <a:lstStyle>
-            <a:lvl1pPr algn="r">
-              <a:defRPr sz="1200"/>
-            </a:lvl1pPr>
-          </a:lstStyle>
-          <a:p>
-            <a:fld id="{CE5E9CC1-C706-0F49-92D6-E571CC5EEA8F}" type="slidenum">
-              <a:rPr lang="en-US"/>
-              <a:t>‹#›</a:t>
-            </a:fld>
-            <a:endParaRPr lang="en-US"/>
-          </a:p>
-        </p:txBody>
-      </p:sp>
     </p:spTree>
     <p:extLst>
       <p:ext uri="{BB962C8B-B14F-4D97-AF65-F5344CB8AC3E}">
-        <p14:creationId xmlns:p14="http://schemas.microsoft.com/office/powerpoint/2010/main" val="1024086991"/>
+        <p14:creationId xmlns:p14="http://schemas.microsoft.com/office/powerpoint/2010/main" val="2553880092"/>
       </p:ext>
     </p:extLst>
   </p:cSld>
@@ -515,10 +296,6 @@
           <a:bodyPr/>
           <a:lstStyle/>
           <a:p>
-            <a:r>
-              <a:rPr lang="en-US" dirty="0"/>
-              <a:t>Land the plane. Two days ago most of the room had never landed a prompt injection; they have now cracked one target across six layers and hardened each one. This deck is the take-it-home: the mental model, the defense patterns, and a concrete Monday-morning checklist. Keep it to ~15 minutes; the value is the takeaways slide and the TODO, not a re-teach.</a:t>
-            </a:r>
             <a:endParaRPr lang="en-US" dirty="0"/>
           </a:p>
         </p:txBody>
@@ -603,10 +380,6 @@
           <a:bodyPr/>
           <a:lstStyle/>
           <a:p>
-            <a:r>
-              <a:rPr lang="en-US" dirty="0"/>
-              <a:t>Let this one sit. The deliverable of a real AI red-team engagement is a documented residual-risk statement, not a green checkmark.</a:t>
-            </a:r>
             <a:endParaRPr lang="en-US" dirty="0"/>
           </a:p>
         </p:txBody>
@@ -691,10 +464,6 @@
           <a:bodyPr/>
           <a:lstStyle/>
           <a:p>
-            <a:r>
-              <a:rPr lang="en-US" dirty="0"/>
-              <a:t>Slow down here — one line each. Number 4 is the transferable engineering lesson from the whole lab design: the append-only audit log is how 22 people reliably graded a non-deterministic model, and it is how they should instrument their own AI systems for detection. Number 5 is the forward-looking one as everyone races to give models more tools.</a:t>
-            </a:r>
             <a:endParaRPr lang="en-US" dirty="0"/>
           </a:p>
         </p:txBody>
@@ -779,10 +548,6 @@
           <a:bodyPr/>
           <a:lstStyle/>
           <a:p>
-            <a:r>
-              <a:rPr lang="en-US" dirty="0"/>
-              <a:t>This is the slide they will act on. Frame it as: the same six controls you flipped today, now against your own stack. Keep it concrete; the checklist maps one-to-one to the flags. Encourage them to run their own vulnerable-to-secure diff internally.</a:t>
-            </a:r>
             <a:endParaRPr lang="en-US" dirty="0"/>
           </a:p>
         </p:txBody>
@@ -867,10 +632,6 @@
           <a:bodyPr/>
           <a:lstStyle/>
           <a:p>
-            <a:r>
-              <a:rPr lang="en-US" dirty="0"/>
-              <a:t>The second half is where most orgs are weakest because agentic AI is new. The single highest-leverage item: human-in-the-loop on irreversible actions — it is the backstop when every model-side control fails. And push the audit-log point hard: it is the difference between we think we are fine and we can see when we are not.</a:t>
-            </a:r>
             <a:endParaRPr lang="en-US" dirty="0"/>
           </a:p>
         </p:txBody>
@@ -955,10 +716,6 @@
           <a:bodyPr/>
           <a:lstStyle/>
           <a:p>
-            <a:r>
-              <a:rPr lang="en-US" dirty="0"/>
-              <a:t>Point them at the offline study guide (they have it) and encourage running the lab locally after the con. Name the frameworks so their write-ups have a taxonomy.</a:t>
-            </a:r>
             <a:endParaRPr lang="en-US" dirty="0"/>
           </a:p>
         </p:txBody>
@@ -1043,10 +800,6 @@
           <a:bodyPr/>
           <a:lstStyle/>
           <a:p>
-            <a:r>
-              <a:rPr lang="en-US" dirty="0"/>
-              <a:t>Warm close. Invite them to stay in touch and to send you the cleverer attacks they build — the ones that out-attacked the grader. Thank them for two days of breaking things. Then the END slide.</a:t>
-            </a:r>
             <a:endParaRPr lang="en-US" dirty="0"/>
           </a:p>
         </p:txBody>
@@ -1131,10 +884,6 @@
           <a:bodyPr/>
           <a:lstStyle/>
           <a:p>
-            <a:r>
-              <a:rPr lang="en-US" dirty="0"/>
-              <a:t>Hold on the end slide while people come up with questions.</a:t>
-            </a:r>
             <a:endParaRPr lang="en-US" dirty="0"/>
           </a:p>
         </p:txBody>
@@ -1219,10 +968,6 @@
           <a:bodyPr/>
           <a:lstStyle/>
           <a:p>
-            <a:r>
-              <a:rPr lang="en-US" dirty="0"/>
-              <a:t>Re-state the pedagogy one last time so it sticks: one coherent target, a growing attack surface, and the vulnerable-to-secure diff as the entire lesson. The thing they should carry out of the room is not 22 payloads but a way of seeing AI systems as a stack of trust boundaries.</a:t>
-            </a:r>
             <a:endParaRPr lang="en-US" dirty="0"/>
           </a:p>
         </p:txBody>
@@ -1307,10 +1052,6 @@
           <a:bodyPr/>
           <a:lstStyle/>
           <a:p>
-            <a:r>
-              <a:rPr lang="en-US" dirty="0"/>
-              <a:t>This is the intellectual spine — file 01, A.3. If a participant remembers exactly one sentence in six months, make it this one. Every defense in the course is a variation on: we draw a trust boundary the model does not have, and enforce it in code before the tokens ever reach the model.</a:t>
-            </a:r>
             <a:endParaRPr lang="en-US" dirty="0"/>
           </a:p>
         </p:txBody>
@@ -1395,10 +1136,6 @@
           <a:bodyPr/>
           <a:lstStyle/>
           <a:p>
-            <a:r>
-              <a:rPr lang="en-US" dirty="0"/>
-              <a:t>Day 1 ran keyless on the shared model — the plumbing lessons do not need a frontier model. Note M3 is the pivot: the victim never typed anything malicious; the attacker text arrived via retrieved context. And M4 is the reminder that loading a model can be RCE before a single token is generated.</a:t>
-            </a:r>
             <a:endParaRPr lang="en-US" dirty="0"/>
           </a:p>
         </p:txBody>
@@ -1483,10 +1220,6 @@
           <a:bodyPr/>
           <a:lstStyle/>
           <a:p>
-            <a:r>
-              <a:rPr lang="en-US" dirty="0"/>
-              <a:t>Day 2 was BYOK — you need a frontier model to reliably chain tool calls. Callback to the live gotcha: the same class of attack behaves differently by model. Frontier models refuse the naive direct attacks (M5/M7) but faithfully follow the indirect poison (M6). That split is itself a defensive insight: alignment is a layer, not the layer.</a:t>
-            </a:r>
             <a:endParaRPr lang="en-US" dirty="0"/>
           </a:p>
         </p:txBody>
@@ -1571,10 +1304,6 @@
           <a:bodyPr/>
           <a:lstStyle/>
           <a:p>
-            <a:r>
-              <a:rPr lang="en-US" dirty="0"/>
-              <a:t>This is the slide to photograph — it maps your two days onto the framework their org already uses for reporting. Study-guide file 21 has the long form. Point out that the interesting modern risk is not a new category, it is the agentic combination: LLM06 excessive agency multiplies the blast radius of LLM01 injection.</a:t>
-            </a:r>
             <a:endParaRPr lang="en-US" dirty="0"/>
           </a:p>
         </p:txBody>
@@ -1659,10 +1388,6 @@
           <a:bodyPr/>
           <a:lstStyle/>
           <a:p>
-            <a:r>
-              <a:rPr lang="en-US" dirty="0"/>
-              <a:t>Naming it confused deputy collapses three modules into one durable idea and connects AI security to classic security they already know. The agent has authority, the attacker does not, the attacker persuades the deputy. The AI twist is only how the persuasion arrives — direct, via metadata, or via a trusted peer.</a:t>
-            </a:r>
             <a:endParaRPr lang="en-US" dirty="0"/>
           </a:p>
         </p:txBody>
@@ -1747,10 +1472,6 @@
           <a:bodyPr/>
           <a:lstStyle/>
           <a:p>
-            <a:r>
-              <a:rPr lang="en-US" dirty="0"/>
-              <a:t>This is the real deliverable — six reusable controls, not eight one-off tricks. Every one is: draw a trust boundary and enforce it in code. If they internalize this table they can defend a stack the course never showed them.</a:t>
-            </a:r>
             <a:endParaRPr lang="en-US" dirty="0"/>
           </a:p>
         </p:txBody>
@@ -1835,10 +1556,6 @@
           <a:bodyPr/>
           <a:lstStyle/>
           <a:p>
-            <a:r>
-              <a:rPr lang="en-US" dirty="0"/>
-              <a:t>The note the course ends on (file 01, C-block). Guardrails give false comfort if you did not test them against obfuscation. The honest posture a real engagement produces is not secured — it is: these controls hold against these attacks, here is the residual gap. Make that the professional standard they take home.</a:t>
-            </a:r>
             <a:endParaRPr lang="en-US" dirty="0"/>
           </a:p>
         </p:txBody>
@@ -1912,6 +1629,11 @@
 <file path=ppt/slideMasters/slideMaster1.xml><?xml version="1.0" encoding="utf-8"?>
 <p:sldMaster xmlns:a="http://schemas.openxmlformats.org/drawingml/2006/main" xmlns:r="http://schemas.openxmlformats.org/officeDocument/2006/relationships" xmlns:p="http://schemas.openxmlformats.org/presentationml/2006/main">
   <p:cSld>
+    <p:bg>
+      <p:bgRef idx="1001">
+        <a:schemeClr val="bg1"/>
+      </p:bgRef>
+    </p:bg>
     <p:spTree>
       <p:nvGrpSpPr>
         <p:cNvPr id="1" name=""/>
@@ -2194,6 +1916,7 @@
         <a:solidFill>
           <a:srgbClr val="000000"/>
         </a:solidFill>
+        <a:effectLst/>
       </p:bgPr>
     </p:bg>
     <p:spTree>
@@ -2251,17 +1974,24 @@
           </a:gradFill>
           <a:ln/>
         </p:spPr>
+        <p:txBody>
+          <a:bodyPr/>
+          <a:lstStyle/>
+          <a:p>
+            <a:endParaRPr lang="en-US"/>
+          </a:p>
+        </p:txBody>
       </p:sp>
       <p:pic>
         <p:nvPicPr>
-          <p:cNvPr id="3" name="Image 0" descr="preencoded.png">    </p:cNvPr>
+          <p:cNvPr id="3" name="Image 0" descr="preencoded.png"/>
           <p:cNvPicPr>
             <a:picLocks noChangeAspect="1"/>
           </p:cNvPicPr>
           <p:nvPr/>
         </p:nvPicPr>
         <p:blipFill>
-          <a:blip r:embed="rId1"/>
+          <a:blip r:embed="rId3"/>
           <a:stretch>
             <a:fillRect/>
           </a:stretch>
@@ -2299,11 +2029,11 @@
           </a:bodyPr>
           <a:lstStyle/>
           <a:p>
-            <a:pPr algn="l" indent="0" marL="0">
-              <a:buNone/>
-            </a:pPr>
-            <a:r>
-              <a:rPr lang="en-US" sz="1650" spc="495" kern="0" dirty="0">
+            <a:pPr marL="0" indent="0" algn="l">
+              <a:buNone/>
+            </a:pPr>
+            <a:r>
+              <a:rPr lang="en-US" sz="1650" kern="0" spc="495" dirty="0">
                 <a:solidFill>
                   <a:srgbClr val="36CDFF"/>
                 </a:solidFill>
@@ -2340,14 +2070,14 @@
           </a:bodyPr>
           <a:lstStyle/>
           <a:p>
-            <a:pPr algn="l" indent="0" marL="0">
+            <a:pPr marL="0" indent="0" algn="l">
               <a:lnSpc>
                 <a:spcPct val="72015"/>
               </a:lnSpc>
               <a:buNone/>
             </a:pPr>
             <a:r>
-              <a:rPr lang="en-US" sz="8850" b="1" spc="89" kern="0" dirty="0">
+              <a:rPr lang="en-US" sz="8850" b="1" kern="0" spc="89" dirty="0">
                 <a:solidFill>
                   <a:srgbClr val="FFFFFF"/>
                 </a:solidFill>
@@ -2357,14 +2087,8 @@
               </a:rPr>
               <a:t>YOU NOW KNOW </a:t>
             </a:r>
-            <a:pPr algn="l" indent="0" marL="0">
-              <a:lnSpc>
-                <a:spcPct val="72015"/>
-              </a:lnSpc>
-              <a:buNone/>
-            </a:pPr>
-            <a:r>
-              <a:rPr lang="en-US" sz="8850" b="1" spc="89" kern="0" dirty="0">
+            <a:r>
+              <a:rPr lang="en-US" sz="8850" b="1" kern="0" spc="89" dirty="0">
                 <a:solidFill>
                   <a:srgbClr val="FD7EF5"/>
                 </a:solidFill>
@@ -2401,7 +2125,7 @@
           </a:bodyPr>
           <a:lstStyle/>
           <a:p>
-            <a:pPr algn="l" indent="0" marL="0">
+            <a:pPr marL="0" indent="0" algn="l">
               <a:lnSpc>
                 <a:spcPct val="121739"/>
               </a:lnSpc>
@@ -2424,14 +2148,14 @@
       </p:sp>
       <p:pic>
         <p:nvPicPr>
-          <p:cNvPr id="7" name="Image 1" descr="preencoded.png">    </p:cNvPr>
+          <p:cNvPr id="7" name="Image 1" descr="preencoded.png"/>
           <p:cNvPicPr>
             <a:picLocks noChangeAspect="1"/>
           </p:cNvPicPr>
           <p:nvPr/>
         </p:nvPicPr>
         <p:blipFill>
-          <a:blip r:embed="rId2"/>
+          <a:blip r:embed="rId4"/>
           <a:stretch>
             <a:fillRect/>
           </a:stretch>
@@ -2469,14 +2193,14 @@
           </a:bodyPr>
           <a:lstStyle/>
           <a:p>
-            <a:pPr algn="r" indent="0" marL="0">
+            <a:pPr marL="0" indent="0" algn="r">
               <a:lnSpc>
                 <a:spcPct val="152105"/>
               </a:lnSpc>
               <a:buNone/>
             </a:pPr>
             <a:r>
-              <a:rPr lang="en-US" sz="1275" spc="179" kern="0" dirty="0">
+              <a:rPr lang="en-US" sz="1275" kern="0" spc="179" dirty="0">
                 <a:solidFill>
                   <a:srgbClr val="FFFFFF"/>
                 </a:solidFill>
@@ -2513,14 +2237,14 @@
           </a:bodyPr>
           <a:lstStyle/>
           <a:p>
-            <a:pPr algn="r" indent="0" marL="0">
+            <a:pPr marL="0" indent="0" algn="r">
               <a:lnSpc>
                 <a:spcPct val="152105"/>
               </a:lnSpc>
               <a:buNone/>
             </a:pPr>
             <a:r>
-              <a:rPr lang="en-US" sz="1275" spc="179" kern="0" dirty="0">
+              <a:rPr lang="en-US" sz="1275" kern="0" spc="179" dirty="0">
                 <a:solidFill>
                   <a:srgbClr val="969696"/>
                 </a:solidFill>
@@ -2550,6 +2274,7 @@
         <a:solidFill>
           <a:srgbClr val="000000"/>
         </a:solidFill>
+        <a:effectLst/>
       </p:bgPr>
     </p:bg>
     <p:spTree>
@@ -2589,11 +2314,11 @@
           </a:bodyPr>
           <a:lstStyle/>
           <a:p>
-            <a:pPr algn="l" indent="0" marL="0">
-              <a:buNone/>
-            </a:pPr>
-            <a:r>
-              <a:rPr lang="en-US" sz="1650" spc="495" kern="0" dirty="0">
+            <a:pPr marL="0" indent="0" algn="l">
+              <a:buNone/>
+            </a:pPr>
+            <a:r>
+              <a:rPr lang="en-US" sz="1650" kern="0" spc="495" dirty="0">
                 <a:solidFill>
                   <a:srgbClr val="FD7EF5"/>
                 </a:solidFill>
@@ -2630,7 +2355,7 @@
           </a:bodyPr>
           <a:lstStyle/>
           <a:p>
-            <a:pPr algn="l" indent="0" marL="0">
+            <a:pPr marL="0" indent="0" algn="l">
               <a:lnSpc>
                 <a:spcPct val="78416"/>
               </a:lnSpc>
@@ -2674,7 +2399,7 @@
           </a:bodyPr>
           <a:lstStyle/>
           <a:p>
-            <a:pPr algn="l" indent="0" marL="0">
+            <a:pPr marL="0" indent="0" algn="l">
               <a:lnSpc>
                 <a:spcPct val="126087"/>
               </a:lnSpc>
@@ -2691,12 +2416,6 @@
               </a:rPr>
               <a:t>The gap between those two sentences is the </a:t>
             </a:r>
-            <a:pPr algn="l" indent="0" marL="0">
-              <a:lnSpc>
-                <a:spcPct val="126087"/>
-              </a:lnSpc>
-              <a:buNone/>
-            </a:pPr>
             <a:r>
               <a:rPr lang="en-US" sz="2250" b="1" dirty="0">
                 <a:solidFill>
@@ -2708,12 +2427,6 @@
               </a:rPr>
               <a:t>residual risk </a:t>
             </a:r>
-            <a:pPr algn="l" indent="0" marL="0">
-              <a:lnSpc>
-                <a:spcPct val="126087"/>
-              </a:lnSpc>
-              <a:buNone/>
-            </a:pPr>
             <a:r>
               <a:rPr lang="en-US" sz="2250" dirty="0">
                 <a:solidFill>
@@ -2731,14 +2444,14 @@
       </p:sp>
       <p:pic>
         <p:nvPicPr>
-          <p:cNvPr id="5" name="Image 0" descr="preencoded.png">    </p:cNvPr>
+          <p:cNvPr id="5" name="Image 0" descr="preencoded.png"/>
           <p:cNvPicPr>
             <a:picLocks noChangeAspect="1"/>
           </p:cNvPicPr>
           <p:nvPr/>
         </p:nvPicPr>
         <p:blipFill>
-          <a:blip r:embed="rId1"/>
+          <a:blip r:embed="rId3"/>
           <a:stretch>
             <a:fillRect/>
           </a:stretch>
@@ -2776,11 +2489,11 @@
           </a:bodyPr>
           <a:lstStyle/>
           <a:p>
-            <a:pPr algn="l" indent="0" marL="0">
-              <a:buNone/>
-            </a:pPr>
-            <a:r>
-              <a:rPr lang="en-US" sz="1200" spc="264" kern="0" dirty="0">
+            <a:pPr marL="0" indent="0" algn="l">
+              <a:buNone/>
+            </a:pPr>
+            <a:r>
+              <a:rPr lang="en-US" sz="1200" kern="0" spc="264" dirty="0">
                 <a:solidFill>
                   <a:srgbClr val="969696"/>
                 </a:solidFill>
@@ -2810,6 +2523,7 @@
         <a:solidFill>
           <a:srgbClr val="000000"/>
         </a:solidFill>
+        <a:effectLst/>
       </p:bgPr>
     </p:bg>
     <p:spTree>
@@ -2849,11 +2563,11 @@
           </a:bodyPr>
           <a:lstStyle/>
           <a:p>
-            <a:pPr algn="l" indent="0" marL="0">
-              <a:buNone/>
-            </a:pPr>
-            <a:r>
-              <a:rPr lang="en-US" sz="1500" spc="450" kern="0" dirty="0">
+            <a:pPr marL="0" indent="0" algn="l">
+              <a:buNone/>
+            </a:pPr>
+            <a:r>
+              <a:rPr lang="en-US" sz="1500" kern="0" spc="450" dirty="0">
                 <a:solidFill>
                   <a:srgbClr val="36CDFF"/>
                 </a:solidFill>
@@ -2890,7 +2604,7 @@
           </a:bodyPr>
           <a:lstStyle/>
           <a:p>
-            <a:pPr algn="l" indent="0" marL="0">
+            <a:pPr marL="0" indent="0" algn="l">
               <a:lnSpc>
                 <a:spcPct val="78353"/>
               </a:lnSpc>
@@ -2932,6 +2646,13 @@
           </a:solidFill>
           <a:ln/>
         </p:spPr>
+        <p:txBody>
+          <a:bodyPr/>
+          <a:lstStyle/>
+          <a:p>
+            <a:endParaRPr lang="en-US"/>
+          </a:p>
+        </p:txBody>
       </p:sp>
       <p:sp>
         <p:nvSpPr>
@@ -2956,7 +2677,7 @@
           </a:bodyPr>
           <a:lstStyle/>
           <a:p>
-            <a:pPr algn="l" indent="0" marL="0">
+            <a:pPr marL="0" indent="0" algn="l">
               <a:buNone/>
             </a:pPr>
             <a:r>
@@ -2997,7 +2718,7 @@
           </a:bodyPr>
           <a:lstStyle/>
           <a:p>
-            <a:pPr algn="l" indent="0" marL="0">
+            <a:pPr marL="0" indent="0" algn="l">
               <a:lnSpc>
                 <a:spcPct val="108696"/>
               </a:lnSpc>
@@ -3041,7 +2762,7 @@
           </a:bodyPr>
           <a:lstStyle/>
           <a:p>
-            <a:pPr algn="l" indent="0" marL="0">
+            <a:pPr marL="0" indent="0" algn="l">
               <a:lnSpc>
                 <a:spcPct val="123519"/>
               </a:lnSpc>
@@ -3083,6 +2804,13 @@
           </a:solidFill>
           <a:ln/>
         </p:spPr>
+        <p:txBody>
+          <a:bodyPr/>
+          <a:lstStyle/>
+          <a:p>
+            <a:endParaRPr lang="en-US"/>
+          </a:p>
+        </p:txBody>
       </p:sp>
       <p:sp>
         <p:nvSpPr>
@@ -3107,7 +2835,7 @@
           </a:bodyPr>
           <a:lstStyle/>
           <a:p>
-            <a:pPr algn="l" indent="0" marL="0">
+            <a:pPr marL="0" indent="0" algn="l">
               <a:buNone/>
             </a:pPr>
             <a:r>
@@ -3148,7 +2876,7 @@
           </a:bodyPr>
           <a:lstStyle/>
           <a:p>
-            <a:pPr algn="l" indent="0" marL="0">
+            <a:pPr marL="0" indent="0" algn="l">
               <a:lnSpc>
                 <a:spcPct val="108696"/>
               </a:lnSpc>
@@ -3192,7 +2920,7 @@
           </a:bodyPr>
           <a:lstStyle/>
           <a:p>
-            <a:pPr algn="l" indent="0" marL="0">
+            <a:pPr marL="0" indent="0" algn="l">
               <a:lnSpc>
                 <a:spcPct val="123519"/>
               </a:lnSpc>
@@ -3234,6 +2962,13 @@
           </a:solidFill>
           <a:ln/>
         </p:spPr>
+        <p:txBody>
+          <a:bodyPr/>
+          <a:lstStyle/>
+          <a:p>
+            <a:endParaRPr lang="en-US"/>
+          </a:p>
+        </p:txBody>
       </p:sp>
       <p:sp>
         <p:nvSpPr>
@@ -3258,7 +2993,7 @@
           </a:bodyPr>
           <a:lstStyle/>
           <a:p>
-            <a:pPr algn="l" indent="0" marL="0">
+            <a:pPr marL="0" indent="0" algn="l">
               <a:buNone/>
             </a:pPr>
             <a:r>
@@ -3299,7 +3034,7 @@
           </a:bodyPr>
           <a:lstStyle/>
           <a:p>
-            <a:pPr algn="l" indent="0" marL="0">
+            <a:pPr marL="0" indent="0" algn="l">
               <a:lnSpc>
                 <a:spcPct val="108696"/>
               </a:lnSpc>
@@ -3343,7 +3078,7 @@
           </a:bodyPr>
           <a:lstStyle/>
           <a:p>
-            <a:pPr algn="l" indent="0" marL="0">
+            <a:pPr marL="0" indent="0" algn="l">
               <a:lnSpc>
                 <a:spcPct val="123519"/>
               </a:lnSpc>
@@ -3385,6 +3120,13 @@
           </a:solidFill>
           <a:ln/>
         </p:spPr>
+        <p:txBody>
+          <a:bodyPr/>
+          <a:lstStyle/>
+          <a:p>
+            <a:endParaRPr lang="en-US"/>
+          </a:p>
+        </p:txBody>
       </p:sp>
       <p:sp>
         <p:nvSpPr>
@@ -3409,7 +3151,7 @@
           </a:bodyPr>
           <a:lstStyle/>
           <a:p>
-            <a:pPr algn="l" indent="0" marL="0">
+            <a:pPr marL="0" indent="0" algn="l">
               <a:buNone/>
             </a:pPr>
             <a:r>
@@ -3450,7 +3192,7 @@
           </a:bodyPr>
           <a:lstStyle/>
           <a:p>
-            <a:pPr algn="l" indent="0" marL="0">
+            <a:pPr marL="0" indent="0" algn="l">
               <a:lnSpc>
                 <a:spcPct val="108696"/>
               </a:lnSpc>
@@ -3494,7 +3236,7 @@
           </a:bodyPr>
           <a:lstStyle/>
           <a:p>
-            <a:pPr algn="l" indent="0" marL="0">
+            <a:pPr marL="0" indent="0" algn="l">
               <a:lnSpc>
                 <a:spcPct val="123519"/>
               </a:lnSpc>
@@ -3536,6 +3278,13 @@
           </a:solidFill>
           <a:ln/>
         </p:spPr>
+        <p:txBody>
+          <a:bodyPr/>
+          <a:lstStyle/>
+          <a:p>
+            <a:endParaRPr lang="en-US"/>
+          </a:p>
+        </p:txBody>
       </p:sp>
       <p:sp>
         <p:nvSpPr>
@@ -3560,7 +3309,7 @@
           </a:bodyPr>
           <a:lstStyle/>
           <a:p>
-            <a:pPr algn="l" indent="0" marL="0">
+            <a:pPr marL="0" indent="0" algn="l">
               <a:buNone/>
             </a:pPr>
             <a:r>
@@ -3601,7 +3350,7 @@
           </a:bodyPr>
           <a:lstStyle/>
           <a:p>
-            <a:pPr algn="l" indent="0" marL="0">
+            <a:pPr marL="0" indent="0" algn="l">
               <a:lnSpc>
                 <a:spcPct val="108696"/>
               </a:lnSpc>
@@ -3645,7 +3394,7 @@
           </a:bodyPr>
           <a:lstStyle/>
           <a:p>
-            <a:pPr algn="l" indent="0" marL="0">
+            <a:pPr marL="0" indent="0" algn="l">
               <a:lnSpc>
                 <a:spcPct val="123519"/>
               </a:lnSpc>
@@ -3668,14 +3417,14 @@
       </p:sp>
       <p:pic>
         <p:nvPicPr>
-          <p:cNvPr id="24" name="Image 0" descr="preencoded.png">    </p:cNvPr>
+          <p:cNvPr id="24" name="Image 0" descr="preencoded.png"/>
           <p:cNvPicPr>
             <a:picLocks noChangeAspect="1"/>
           </p:cNvPicPr>
           <p:nvPr/>
         </p:nvPicPr>
         <p:blipFill>
-          <a:blip r:embed="rId1"/>
+          <a:blip r:embed="rId3"/>
           <a:stretch>
             <a:fillRect/>
           </a:stretch>
@@ -3713,11 +3462,11 @@
           </a:bodyPr>
           <a:lstStyle/>
           <a:p>
-            <a:pPr algn="l" indent="0" marL="0">
-              <a:buNone/>
-            </a:pPr>
-            <a:r>
-              <a:rPr lang="en-US" sz="1200" spc="264" kern="0" dirty="0">
+            <a:pPr marL="0" indent="0" algn="l">
+              <a:buNone/>
+            </a:pPr>
+            <a:r>
+              <a:rPr lang="en-US" sz="1200" kern="0" spc="264" dirty="0">
                 <a:solidFill>
                   <a:srgbClr val="969696"/>
                 </a:solidFill>
@@ -3747,6 +3496,7 @@
         <a:solidFill>
           <a:srgbClr val="000000"/>
         </a:solidFill>
+        <a:effectLst/>
       </p:bgPr>
     </p:bg>
     <p:spTree>
@@ -3786,11 +3536,11 @@
           </a:bodyPr>
           <a:lstStyle/>
           <a:p>
-            <a:pPr algn="l" indent="0" marL="0">
-              <a:buNone/>
-            </a:pPr>
-            <a:r>
-              <a:rPr lang="en-US" sz="1500" spc="450" kern="0" dirty="0">
+            <a:pPr marL="0" indent="0" algn="l">
+              <a:buNone/>
+            </a:pPr>
+            <a:r>
+              <a:rPr lang="en-US" sz="1500" kern="0" spc="450" dirty="0">
                 <a:solidFill>
                   <a:srgbClr val="36CDFF"/>
                 </a:solidFill>
@@ -3827,7 +3577,7 @@
           </a:bodyPr>
           <a:lstStyle/>
           <a:p>
-            <a:pPr algn="l" indent="0" marL="0">
+            <a:pPr marL="0" indent="0" algn="l">
               <a:lnSpc>
                 <a:spcPct val="77778"/>
               </a:lnSpc>
@@ -3873,6 +3623,13 @@
             <a:prstDash val="solid"/>
           </a:ln>
         </p:spPr>
+        <p:txBody>
+          <a:bodyPr/>
+          <a:lstStyle/>
+          <a:p>
+            <a:endParaRPr lang="en-US"/>
+          </a:p>
+        </p:txBody>
       </p:sp>
       <p:sp>
         <p:nvSpPr>
@@ -3897,11 +3654,11 @@
           </a:bodyPr>
           <a:lstStyle/>
           <a:p>
-            <a:pPr algn="l" indent="0" marL="0">
-              <a:buNone/>
-            </a:pPr>
-            <a:r>
-              <a:rPr lang="en-US" sz="1500" spc="150" kern="0" dirty="0">
+            <a:pPr marL="0" indent="0" algn="l">
+              <a:buNone/>
+            </a:pPr>
+            <a:r>
+              <a:rPr lang="en-US" sz="1500" kern="0" spc="150" dirty="0">
                 <a:solidFill>
                   <a:srgbClr val="36CDFF"/>
                 </a:solidFill>
@@ -3938,7 +3695,7 @@
           </a:bodyPr>
           <a:lstStyle/>
           <a:p>
-            <a:pPr algn="l" indent="0" marL="0">
+            <a:pPr marL="0" indent="0" algn="l">
               <a:lnSpc>
                 <a:spcPct val="113455"/>
               </a:lnSpc>
@@ -3982,7 +3739,7 @@
           </a:bodyPr>
           <a:lstStyle/>
           <a:p>
-            <a:pPr algn="l" indent="0" marL="0">
+            <a:pPr marL="0" indent="0" algn="l">
               <a:lnSpc>
                 <a:spcPct val="122500"/>
               </a:lnSpc>
@@ -4028,6 +3785,13 @@
             <a:prstDash val="solid"/>
           </a:ln>
         </p:spPr>
+        <p:txBody>
+          <a:bodyPr/>
+          <a:lstStyle/>
+          <a:p>
+            <a:endParaRPr lang="en-US"/>
+          </a:p>
+        </p:txBody>
       </p:sp>
       <p:sp>
         <p:nvSpPr>
@@ -4052,11 +3816,11 @@
           </a:bodyPr>
           <a:lstStyle/>
           <a:p>
-            <a:pPr algn="l" indent="0" marL="0">
-              <a:buNone/>
-            </a:pPr>
-            <a:r>
-              <a:rPr lang="en-US" sz="1500" spc="150" kern="0" dirty="0">
+            <a:pPr marL="0" indent="0" algn="l">
+              <a:buNone/>
+            </a:pPr>
+            <a:r>
+              <a:rPr lang="en-US" sz="1500" kern="0" spc="150" dirty="0">
                 <a:solidFill>
                   <a:srgbClr val="36CDFF"/>
                 </a:solidFill>
@@ -4093,7 +3857,7 @@
           </a:bodyPr>
           <a:lstStyle/>
           <a:p>
-            <a:pPr algn="l" indent="0" marL="0">
+            <a:pPr marL="0" indent="0" algn="l">
               <a:lnSpc>
                 <a:spcPct val="113455"/>
               </a:lnSpc>
@@ -4137,7 +3901,7 @@
           </a:bodyPr>
           <a:lstStyle/>
           <a:p>
-            <a:pPr algn="l" indent="0" marL="0">
+            <a:pPr marL="0" indent="0" algn="l">
               <a:lnSpc>
                 <a:spcPct val="122500"/>
               </a:lnSpc>
@@ -4186,6 +3950,13 @@
             <a:prstDash val="solid"/>
           </a:ln>
         </p:spPr>
+        <p:txBody>
+          <a:bodyPr/>
+          <a:lstStyle/>
+          <a:p>
+            <a:endParaRPr lang="en-US"/>
+          </a:p>
+        </p:txBody>
       </p:sp>
       <p:sp>
         <p:nvSpPr>
@@ -4210,11 +3981,11 @@
           </a:bodyPr>
           <a:lstStyle/>
           <a:p>
-            <a:pPr algn="l" indent="0" marL="0">
-              <a:buNone/>
-            </a:pPr>
-            <a:r>
-              <a:rPr lang="en-US" sz="1500" spc="150" kern="0" dirty="0">
+            <a:pPr marL="0" indent="0" algn="l">
+              <a:buNone/>
+            </a:pPr>
+            <a:r>
+              <a:rPr lang="en-US" sz="1500" kern="0" spc="150" dirty="0">
                 <a:solidFill>
                   <a:srgbClr val="FD7EF5"/>
                 </a:solidFill>
@@ -4251,7 +4022,7 @@
           </a:bodyPr>
           <a:lstStyle/>
           <a:p>
-            <a:pPr algn="l" indent="0" marL="0">
+            <a:pPr marL="0" indent="0" algn="l">
               <a:lnSpc>
                 <a:spcPct val="113455"/>
               </a:lnSpc>
@@ -4295,7 +4066,7 @@
           </a:bodyPr>
           <a:lstStyle/>
           <a:p>
-            <a:pPr algn="l" indent="0" marL="0">
+            <a:pPr marL="0" indent="0" algn="l">
               <a:lnSpc>
                 <a:spcPct val="122500"/>
               </a:lnSpc>
@@ -4341,6 +4112,13 @@
             <a:prstDash val="solid"/>
           </a:ln>
         </p:spPr>
+        <p:txBody>
+          <a:bodyPr/>
+          <a:lstStyle/>
+          <a:p>
+            <a:endParaRPr lang="en-US"/>
+          </a:p>
+        </p:txBody>
       </p:sp>
       <p:sp>
         <p:nvSpPr>
@@ -4365,11 +4143,11 @@
           </a:bodyPr>
           <a:lstStyle/>
           <a:p>
-            <a:pPr algn="l" indent="0" marL="0">
-              <a:buNone/>
-            </a:pPr>
-            <a:r>
-              <a:rPr lang="en-US" sz="1500" spc="150" kern="0" dirty="0">
+            <a:pPr marL="0" indent="0" algn="l">
+              <a:buNone/>
+            </a:pPr>
+            <a:r>
+              <a:rPr lang="en-US" sz="1500" kern="0" spc="150" dirty="0">
                 <a:solidFill>
                   <a:srgbClr val="36CDFF"/>
                 </a:solidFill>
@@ -4406,7 +4184,7 @@
           </a:bodyPr>
           <a:lstStyle/>
           <a:p>
-            <a:pPr algn="l" indent="0" marL="0">
+            <a:pPr marL="0" indent="0" algn="l">
               <a:lnSpc>
                 <a:spcPct val="113455"/>
               </a:lnSpc>
@@ -4450,7 +4228,7 @@
           </a:bodyPr>
           <a:lstStyle/>
           <a:p>
-            <a:pPr algn="l" indent="0" marL="0">
+            <a:pPr marL="0" indent="0" algn="l">
               <a:lnSpc>
                 <a:spcPct val="122500"/>
               </a:lnSpc>
@@ -4496,6 +4274,13 @@
             <a:prstDash val="solid"/>
           </a:ln>
         </p:spPr>
+        <p:txBody>
+          <a:bodyPr/>
+          <a:lstStyle/>
+          <a:p>
+            <a:endParaRPr lang="en-US"/>
+          </a:p>
+        </p:txBody>
       </p:sp>
       <p:sp>
         <p:nvSpPr>
@@ -4520,11 +4305,11 @@
           </a:bodyPr>
           <a:lstStyle/>
           <a:p>
-            <a:pPr algn="l" indent="0" marL="0">
-              <a:buNone/>
-            </a:pPr>
-            <a:r>
-              <a:rPr lang="en-US" sz="1500" spc="150" kern="0" dirty="0">
+            <a:pPr marL="0" indent="0" algn="l">
+              <a:buNone/>
+            </a:pPr>
+            <a:r>
+              <a:rPr lang="en-US" sz="1500" kern="0" spc="150" dirty="0">
                 <a:solidFill>
                   <a:srgbClr val="36CDFF"/>
                 </a:solidFill>
@@ -4561,7 +4346,7 @@
           </a:bodyPr>
           <a:lstStyle/>
           <a:p>
-            <a:pPr algn="l" indent="0" marL="0">
+            <a:pPr marL="0" indent="0" algn="l">
               <a:lnSpc>
                 <a:spcPct val="113455"/>
               </a:lnSpc>
@@ -4605,7 +4390,7 @@
           </a:bodyPr>
           <a:lstStyle/>
           <a:p>
-            <a:pPr algn="l" indent="0" marL="0">
+            <a:pPr marL="0" indent="0" algn="l">
               <a:lnSpc>
                 <a:spcPct val="122500"/>
               </a:lnSpc>
@@ -4651,6 +4436,13 @@
             <a:prstDash val="solid"/>
           </a:ln>
         </p:spPr>
+        <p:txBody>
+          <a:bodyPr/>
+          <a:lstStyle/>
+          <a:p>
+            <a:endParaRPr lang="en-US"/>
+          </a:p>
+        </p:txBody>
       </p:sp>
       <p:sp>
         <p:nvSpPr>
@@ -4675,11 +4467,11 @@
           </a:bodyPr>
           <a:lstStyle/>
           <a:p>
-            <a:pPr algn="l" indent="0" marL="0">
-              <a:buNone/>
-            </a:pPr>
-            <a:r>
-              <a:rPr lang="en-US" sz="1500" spc="150" kern="0" dirty="0">
+            <a:pPr marL="0" indent="0" algn="l">
+              <a:buNone/>
+            </a:pPr>
+            <a:r>
+              <a:rPr lang="en-US" sz="1500" kern="0" spc="150" dirty="0">
                 <a:solidFill>
                   <a:srgbClr val="36CDFF"/>
                 </a:solidFill>
@@ -4716,7 +4508,7 @@
           </a:bodyPr>
           <a:lstStyle/>
           <a:p>
-            <a:pPr algn="l" indent="0" marL="0">
+            <a:pPr marL="0" indent="0" algn="l">
               <a:lnSpc>
                 <a:spcPct val="113455"/>
               </a:lnSpc>
@@ -4760,7 +4552,7 @@
           </a:bodyPr>
           <a:lstStyle/>
           <a:p>
-            <a:pPr algn="l" indent="0" marL="0">
+            <a:pPr marL="0" indent="0" algn="l">
               <a:lnSpc>
                 <a:spcPct val="122500"/>
               </a:lnSpc>
@@ -4804,7 +4596,7 @@
           </a:bodyPr>
           <a:lstStyle/>
           <a:p>
-            <a:pPr algn="l" indent="0" marL="0">
+            <a:pPr marL="0" indent="0" algn="l">
               <a:buNone/>
             </a:pPr>
             <a:r>
@@ -4824,14 +4616,14 @@
       </p:sp>
       <p:pic>
         <p:nvPicPr>
-          <p:cNvPr id="29" name="Image 0" descr="preencoded.png">    </p:cNvPr>
+          <p:cNvPr id="29" name="Image 0" descr="preencoded.png"/>
           <p:cNvPicPr>
             <a:picLocks noChangeAspect="1"/>
           </p:cNvPicPr>
           <p:nvPr/>
         </p:nvPicPr>
         <p:blipFill>
-          <a:blip r:embed="rId1"/>
+          <a:blip r:embed="rId3"/>
           <a:stretch>
             <a:fillRect/>
           </a:stretch>
@@ -4869,11 +4661,11 @@
           </a:bodyPr>
           <a:lstStyle/>
           <a:p>
-            <a:pPr algn="l" indent="0" marL="0">
-              <a:buNone/>
-            </a:pPr>
-            <a:r>
-              <a:rPr lang="en-US" sz="1200" spc="264" kern="0" dirty="0">
+            <a:pPr marL="0" indent="0" algn="l">
+              <a:buNone/>
+            </a:pPr>
+            <a:r>
+              <a:rPr lang="en-US" sz="1200" kern="0" spc="264" dirty="0">
                 <a:solidFill>
                   <a:srgbClr val="969696"/>
                 </a:solidFill>
@@ -4903,6 +4695,7 @@
         <a:solidFill>
           <a:srgbClr val="000000"/>
         </a:solidFill>
+        <a:effectLst/>
       </p:bgPr>
     </p:bg>
     <p:spTree>
@@ -4942,11 +4735,11 @@
           </a:bodyPr>
           <a:lstStyle/>
           <a:p>
-            <a:pPr algn="l" indent="0" marL="0">
-              <a:buNone/>
-            </a:pPr>
-            <a:r>
-              <a:rPr lang="en-US" sz="1500" spc="450" kern="0" dirty="0">
+            <a:pPr marL="0" indent="0" algn="l">
+              <a:buNone/>
+            </a:pPr>
+            <a:r>
+              <a:rPr lang="en-US" sz="1500" kern="0" spc="450" dirty="0">
                 <a:solidFill>
                   <a:srgbClr val="36CDFF"/>
                 </a:solidFill>
@@ -4983,7 +4776,7 @@
           </a:bodyPr>
           <a:lstStyle/>
           <a:p>
-            <a:pPr algn="l" indent="0" marL="0">
+            <a:pPr marL="0" indent="0" algn="l">
               <a:lnSpc>
                 <a:spcPct val="77778"/>
               </a:lnSpc>
@@ -5032,6 +4825,13 @@
             <a:prstDash val="solid"/>
           </a:ln>
         </p:spPr>
+        <p:txBody>
+          <a:bodyPr/>
+          <a:lstStyle/>
+          <a:p>
+            <a:endParaRPr lang="en-US"/>
+          </a:p>
+        </p:txBody>
       </p:sp>
       <p:sp>
         <p:nvSpPr>
@@ -5056,11 +4856,11 @@
           </a:bodyPr>
           <a:lstStyle/>
           <a:p>
-            <a:pPr algn="l" indent="0" marL="0">
-              <a:buNone/>
-            </a:pPr>
-            <a:r>
-              <a:rPr lang="en-US" sz="1500" spc="150" kern="0" dirty="0">
+            <a:pPr marL="0" indent="0" algn="l">
+              <a:buNone/>
+            </a:pPr>
+            <a:r>
+              <a:rPr lang="en-US" sz="1500" kern="0" spc="150" dirty="0">
                 <a:solidFill>
                   <a:srgbClr val="FD7EF5"/>
                 </a:solidFill>
@@ -5097,7 +4897,7 @@
           </a:bodyPr>
           <a:lstStyle/>
           <a:p>
-            <a:pPr algn="l" indent="0" marL="0">
+            <a:pPr marL="0" indent="0" algn="l">
               <a:lnSpc>
                 <a:spcPct val="113455"/>
               </a:lnSpc>
@@ -5141,7 +4941,7 @@
           </a:bodyPr>
           <a:lstStyle/>
           <a:p>
-            <a:pPr algn="l" indent="0" marL="0">
+            <a:pPr marL="0" indent="0" algn="l">
               <a:lnSpc>
                 <a:spcPct val="122500"/>
               </a:lnSpc>
@@ -5187,6 +4987,13 @@
             <a:prstDash val="solid"/>
           </a:ln>
         </p:spPr>
+        <p:txBody>
+          <a:bodyPr/>
+          <a:lstStyle/>
+          <a:p>
+            <a:endParaRPr lang="en-US"/>
+          </a:p>
+        </p:txBody>
       </p:sp>
       <p:sp>
         <p:nvSpPr>
@@ -5211,11 +5018,11 @@
           </a:bodyPr>
           <a:lstStyle/>
           <a:p>
-            <a:pPr algn="l" indent="0" marL="0">
-              <a:buNone/>
-            </a:pPr>
-            <a:r>
-              <a:rPr lang="en-US" sz="1500" spc="150" kern="0" dirty="0">
+            <a:pPr marL="0" indent="0" algn="l">
+              <a:buNone/>
+            </a:pPr>
+            <a:r>
+              <a:rPr lang="en-US" sz="1500" kern="0" spc="150" dirty="0">
                 <a:solidFill>
                   <a:srgbClr val="36CDFF"/>
                 </a:solidFill>
@@ -5252,7 +5059,7 @@
           </a:bodyPr>
           <a:lstStyle/>
           <a:p>
-            <a:pPr algn="l" indent="0" marL="0">
+            <a:pPr marL="0" indent="0" algn="l">
               <a:lnSpc>
                 <a:spcPct val="113455"/>
               </a:lnSpc>
@@ -5296,7 +5103,7 @@
           </a:bodyPr>
           <a:lstStyle/>
           <a:p>
-            <a:pPr algn="l" indent="0" marL="0">
+            <a:pPr marL="0" indent="0" algn="l">
               <a:lnSpc>
                 <a:spcPct val="122500"/>
               </a:lnSpc>
@@ -5342,6 +5149,13 @@
             <a:prstDash val="solid"/>
           </a:ln>
         </p:spPr>
+        <p:txBody>
+          <a:bodyPr/>
+          <a:lstStyle/>
+          <a:p>
+            <a:endParaRPr lang="en-US"/>
+          </a:p>
+        </p:txBody>
       </p:sp>
       <p:sp>
         <p:nvSpPr>
@@ -5366,11 +5180,11 @@
           </a:bodyPr>
           <a:lstStyle/>
           <a:p>
-            <a:pPr algn="l" indent="0" marL="0">
-              <a:buNone/>
-            </a:pPr>
-            <a:r>
-              <a:rPr lang="en-US" sz="1500" spc="150" kern="0" dirty="0">
+            <a:pPr marL="0" indent="0" algn="l">
+              <a:buNone/>
+            </a:pPr>
+            <a:r>
+              <a:rPr lang="en-US" sz="1500" kern="0" spc="150" dirty="0">
                 <a:solidFill>
                   <a:srgbClr val="36CDFF"/>
                 </a:solidFill>
@@ -5407,7 +5221,7 @@
           </a:bodyPr>
           <a:lstStyle/>
           <a:p>
-            <a:pPr algn="l" indent="0" marL="0">
+            <a:pPr marL="0" indent="0" algn="l">
               <a:lnSpc>
                 <a:spcPct val="113455"/>
               </a:lnSpc>
@@ -5451,7 +5265,7 @@
           </a:bodyPr>
           <a:lstStyle/>
           <a:p>
-            <a:pPr algn="l" indent="0" marL="0">
+            <a:pPr marL="0" indent="0" algn="l">
               <a:lnSpc>
                 <a:spcPct val="122500"/>
               </a:lnSpc>
@@ -5497,6 +5311,13 @@
             <a:prstDash val="solid"/>
           </a:ln>
         </p:spPr>
+        <p:txBody>
+          <a:bodyPr/>
+          <a:lstStyle/>
+          <a:p>
+            <a:endParaRPr lang="en-US"/>
+          </a:p>
+        </p:txBody>
       </p:sp>
       <p:sp>
         <p:nvSpPr>
@@ -5521,11 +5342,11 @@
           </a:bodyPr>
           <a:lstStyle/>
           <a:p>
-            <a:pPr algn="l" indent="0" marL="0">
-              <a:buNone/>
-            </a:pPr>
-            <a:r>
-              <a:rPr lang="en-US" sz="1500" spc="150" kern="0" dirty="0">
+            <a:pPr marL="0" indent="0" algn="l">
+              <a:buNone/>
+            </a:pPr>
+            <a:r>
+              <a:rPr lang="en-US" sz="1500" kern="0" spc="150" dirty="0">
                 <a:solidFill>
                   <a:srgbClr val="36CDFF"/>
                 </a:solidFill>
@@ -5562,7 +5383,7 @@
           </a:bodyPr>
           <a:lstStyle/>
           <a:p>
-            <a:pPr algn="l" indent="0" marL="0">
+            <a:pPr marL="0" indent="0" algn="l">
               <a:lnSpc>
                 <a:spcPct val="113455"/>
               </a:lnSpc>
@@ -5606,7 +5427,7 @@
           </a:bodyPr>
           <a:lstStyle/>
           <a:p>
-            <a:pPr algn="l" indent="0" marL="0">
+            <a:pPr marL="0" indent="0" algn="l">
               <a:lnSpc>
                 <a:spcPct val="122500"/>
               </a:lnSpc>
@@ -5655,6 +5476,13 @@
             <a:prstDash val="solid"/>
           </a:ln>
         </p:spPr>
+        <p:txBody>
+          <a:bodyPr/>
+          <a:lstStyle/>
+          <a:p>
+            <a:endParaRPr lang="en-US"/>
+          </a:p>
+        </p:txBody>
       </p:sp>
       <p:sp>
         <p:nvSpPr>
@@ -5679,11 +5507,11 @@
           </a:bodyPr>
           <a:lstStyle/>
           <a:p>
-            <a:pPr algn="l" indent="0" marL="0">
-              <a:buNone/>
-            </a:pPr>
-            <a:r>
-              <a:rPr lang="en-US" sz="1500" spc="150" kern="0" dirty="0">
+            <a:pPr marL="0" indent="0" algn="l">
+              <a:buNone/>
+            </a:pPr>
+            <a:r>
+              <a:rPr lang="en-US" sz="1500" kern="0" spc="150" dirty="0">
                 <a:solidFill>
                   <a:srgbClr val="FD7EF5"/>
                 </a:solidFill>
@@ -5720,7 +5548,7 @@
           </a:bodyPr>
           <a:lstStyle/>
           <a:p>
-            <a:pPr algn="l" indent="0" marL="0">
+            <a:pPr marL="0" indent="0" algn="l">
               <a:lnSpc>
                 <a:spcPct val="113455"/>
               </a:lnSpc>
@@ -5764,7 +5592,7 @@
           </a:bodyPr>
           <a:lstStyle/>
           <a:p>
-            <a:pPr algn="l" indent="0" marL="0">
+            <a:pPr marL="0" indent="0" algn="l">
               <a:lnSpc>
                 <a:spcPct val="122500"/>
               </a:lnSpc>
@@ -5810,6 +5638,13 @@
             <a:prstDash val="solid"/>
           </a:ln>
         </p:spPr>
+        <p:txBody>
+          <a:bodyPr/>
+          <a:lstStyle/>
+          <a:p>
+            <a:endParaRPr lang="en-US"/>
+          </a:p>
+        </p:txBody>
       </p:sp>
       <p:sp>
         <p:nvSpPr>
@@ -5834,11 +5669,11 @@
           </a:bodyPr>
           <a:lstStyle/>
           <a:p>
-            <a:pPr algn="l" indent="0" marL="0">
-              <a:buNone/>
-            </a:pPr>
-            <a:r>
-              <a:rPr lang="en-US" sz="1500" spc="150" kern="0" dirty="0">
+            <a:pPr marL="0" indent="0" algn="l">
+              <a:buNone/>
+            </a:pPr>
+            <a:r>
+              <a:rPr lang="en-US" sz="1500" kern="0" spc="150" dirty="0">
                 <a:solidFill>
                   <a:srgbClr val="36CDFF"/>
                 </a:solidFill>
@@ -5875,7 +5710,7 @@
           </a:bodyPr>
           <a:lstStyle/>
           <a:p>
-            <a:pPr algn="l" indent="0" marL="0">
+            <a:pPr marL="0" indent="0" algn="l">
               <a:lnSpc>
                 <a:spcPct val="113455"/>
               </a:lnSpc>
@@ -5919,7 +5754,7 @@
           </a:bodyPr>
           <a:lstStyle/>
           <a:p>
-            <a:pPr algn="l" indent="0" marL="0">
+            <a:pPr marL="0" indent="0" algn="l">
               <a:lnSpc>
                 <a:spcPct val="122500"/>
               </a:lnSpc>
@@ -5942,14 +5777,14 @@
       </p:sp>
       <p:pic>
         <p:nvPicPr>
-          <p:cNvPr id="28" name="Image 0" descr="preencoded.png">    </p:cNvPr>
+          <p:cNvPr id="28" name="Image 0" descr="preencoded.png"/>
           <p:cNvPicPr>
             <a:picLocks noChangeAspect="1"/>
           </p:cNvPicPr>
           <p:nvPr/>
         </p:nvPicPr>
         <p:blipFill>
-          <a:blip r:embed="rId1"/>
+          <a:blip r:embed="rId3"/>
           <a:stretch>
             <a:fillRect/>
           </a:stretch>
@@ -5987,11 +5822,11 @@
           </a:bodyPr>
           <a:lstStyle/>
           <a:p>
-            <a:pPr algn="l" indent="0" marL="0">
-              <a:buNone/>
-            </a:pPr>
-            <a:r>
-              <a:rPr lang="en-US" sz="1200" spc="264" kern="0" dirty="0">
+            <a:pPr marL="0" indent="0" algn="l">
+              <a:buNone/>
+            </a:pPr>
+            <a:r>
+              <a:rPr lang="en-US" sz="1200" kern="0" spc="264" dirty="0">
                 <a:solidFill>
                   <a:srgbClr val="969696"/>
                 </a:solidFill>
@@ -6021,6 +5856,7 @@
         <a:solidFill>
           <a:srgbClr val="000000"/>
         </a:solidFill>
+        <a:effectLst/>
       </p:bgPr>
     </p:bg>
     <p:spTree>
@@ -6060,11 +5896,11 @@
           </a:bodyPr>
           <a:lstStyle/>
           <a:p>
-            <a:pPr algn="l" indent="0" marL="0">
-              <a:buNone/>
-            </a:pPr>
-            <a:r>
-              <a:rPr lang="en-US" sz="1500" spc="450" kern="0" dirty="0">
+            <a:pPr marL="0" indent="0" algn="l">
+              <a:buNone/>
+            </a:pPr>
+            <a:r>
+              <a:rPr lang="en-US" sz="1500" kern="0" spc="450" dirty="0">
                 <a:solidFill>
                   <a:srgbClr val="36CDFF"/>
                 </a:solidFill>
@@ -6101,7 +5937,7 @@
           </a:bodyPr>
           <a:lstStyle/>
           <a:p>
-            <a:pPr algn="l" indent="0" marL="0">
+            <a:pPr marL="0" indent="0" algn="l">
               <a:lnSpc>
                 <a:spcPct val="78190"/>
               </a:lnSpc>
@@ -6143,6 +5979,13 @@
           </a:solidFill>
           <a:ln/>
         </p:spPr>
+        <p:txBody>
+          <a:bodyPr/>
+          <a:lstStyle/>
+          <a:p>
+            <a:endParaRPr lang="en-US"/>
+          </a:p>
+        </p:txBody>
       </p:sp>
       <p:sp>
         <p:nvSpPr>
@@ -6163,6 +6006,13 @@
           </a:solidFill>
           <a:ln/>
         </p:spPr>
+        <p:txBody>
+          <a:bodyPr/>
+          <a:lstStyle/>
+          <a:p>
+            <a:endParaRPr lang="en-US"/>
+          </a:p>
+        </p:txBody>
       </p:sp>
       <p:sp>
         <p:nvSpPr>
@@ -6185,6 +6035,13 @@
           </a:solidFill>
           <a:ln/>
         </p:spPr>
+        <p:txBody>
+          <a:bodyPr/>
+          <a:lstStyle/>
+          <a:p>
+            <a:endParaRPr lang="en-US"/>
+          </a:p>
+        </p:txBody>
       </p:sp>
       <p:sp>
         <p:nvSpPr>
@@ -6207,6 +6064,13 @@
           </a:solidFill>
           <a:ln/>
         </p:spPr>
+        <p:txBody>
+          <a:bodyPr/>
+          <a:lstStyle/>
+          <a:p>
+            <a:endParaRPr lang="en-US"/>
+          </a:p>
+        </p:txBody>
       </p:sp>
       <p:sp>
         <p:nvSpPr>
@@ -6231,11 +6095,11 @@
           </a:bodyPr>
           <a:lstStyle/>
           <a:p>
-            <a:pPr algn="l" indent="0" marL="0">
-              <a:buNone/>
-            </a:pPr>
-            <a:r>
-              <a:rPr lang="en-US" sz="1200" spc="168" kern="0" dirty="0">
+            <a:pPr marL="0" indent="0" algn="l">
+              <a:buNone/>
+            </a:pPr>
+            <a:r>
+              <a:rPr lang="en-US" sz="1200" kern="0" spc="168" dirty="0">
                 <a:solidFill>
                   <a:srgbClr val="36CDFF"/>
                 </a:solidFill>
@@ -6272,7 +6136,7 @@
           </a:bodyPr>
           <a:lstStyle/>
           <a:p>
-            <a:pPr algn="l" indent="0" marL="0">
+            <a:pPr marL="0" indent="0" algn="l">
               <a:lnSpc>
                 <a:spcPct val="79670"/>
               </a:lnSpc>
@@ -6316,7 +6180,7 @@
           </a:bodyPr>
           <a:lstStyle/>
           <a:p>
-            <a:pPr algn="l" indent="0" marL="0">
+            <a:pPr marL="0" indent="0" algn="l">
               <a:lnSpc>
                 <a:spcPct val="125000"/>
               </a:lnSpc>
@@ -6358,6 +6222,13 @@
           </a:solidFill>
           <a:ln/>
         </p:spPr>
+        <p:txBody>
+          <a:bodyPr/>
+          <a:lstStyle/>
+          <a:p>
+            <a:endParaRPr lang="en-US"/>
+          </a:p>
+        </p:txBody>
       </p:sp>
       <p:sp>
         <p:nvSpPr>
@@ -6378,6 +6249,13 @@
           </a:solidFill>
           <a:ln/>
         </p:spPr>
+        <p:txBody>
+          <a:bodyPr/>
+          <a:lstStyle/>
+          <a:p>
+            <a:endParaRPr lang="en-US"/>
+          </a:p>
+        </p:txBody>
       </p:sp>
       <p:sp>
         <p:nvSpPr>
@@ -6400,6 +6278,13 @@
           </a:solidFill>
           <a:ln/>
         </p:spPr>
+        <p:txBody>
+          <a:bodyPr/>
+          <a:lstStyle/>
+          <a:p>
+            <a:endParaRPr lang="en-US"/>
+          </a:p>
+        </p:txBody>
       </p:sp>
       <p:sp>
         <p:nvSpPr>
@@ -6422,6 +6307,13 @@
           </a:solidFill>
           <a:ln/>
         </p:spPr>
+        <p:txBody>
+          <a:bodyPr/>
+          <a:lstStyle/>
+          <a:p>
+            <a:endParaRPr lang="en-US"/>
+          </a:p>
+        </p:txBody>
       </p:sp>
       <p:sp>
         <p:nvSpPr>
@@ -6446,11 +6338,11 @@
           </a:bodyPr>
           <a:lstStyle/>
           <a:p>
-            <a:pPr algn="l" indent="0" marL="0">
-              <a:buNone/>
-            </a:pPr>
-            <a:r>
-              <a:rPr lang="en-US" sz="1200" spc="168" kern="0" dirty="0">
+            <a:pPr marL="0" indent="0" algn="l">
+              <a:buNone/>
+            </a:pPr>
+            <a:r>
+              <a:rPr lang="en-US" sz="1200" kern="0" spc="168" dirty="0">
                 <a:solidFill>
                   <a:srgbClr val="FD7EF5"/>
                 </a:solidFill>
@@ -6487,7 +6379,7 @@
           </a:bodyPr>
           <a:lstStyle/>
           <a:p>
-            <a:pPr algn="l" indent="0" marL="0">
+            <a:pPr marL="0" indent="0" algn="l">
               <a:lnSpc>
                 <a:spcPct val="79670"/>
               </a:lnSpc>
@@ -6531,7 +6423,7 @@
           </a:bodyPr>
           <a:lstStyle/>
           <a:p>
-            <a:pPr algn="l" indent="0" marL="0">
+            <a:pPr marL="0" indent="0" algn="l">
               <a:lnSpc>
                 <a:spcPct val="125000"/>
               </a:lnSpc>
@@ -6573,6 +6465,13 @@
           </a:solidFill>
           <a:ln/>
         </p:spPr>
+        <p:txBody>
+          <a:bodyPr/>
+          <a:lstStyle/>
+          <a:p>
+            <a:endParaRPr lang="en-US"/>
+          </a:p>
+        </p:txBody>
       </p:sp>
       <p:sp>
         <p:nvSpPr>
@@ -6593,6 +6492,13 @@
           </a:solidFill>
           <a:ln/>
         </p:spPr>
+        <p:txBody>
+          <a:bodyPr/>
+          <a:lstStyle/>
+          <a:p>
+            <a:endParaRPr lang="en-US"/>
+          </a:p>
+        </p:txBody>
       </p:sp>
       <p:sp>
         <p:nvSpPr>
@@ -6615,6 +6521,13 @@
           </a:solidFill>
           <a:ln/>
         </p:spPr>
+        <p:txBody>
+          <a:bodyPr/>
+          <a:lstStyle/>
+          <a:p>
+            <a:endParaRPr lang="en-US"/>
+          </a:p>
+        </p:txBody>
       </p:sp>
       <p:sp>
         <p:nvSpPr>
@@ -6637,6 +6550,13 @@
           </a:solidFill>
           <a:ln/>
         </p:spPr>
+        <p:txBody>
+          <a:bodyPr/>
+          <a:lstStyle/>
+          <a:p>
+            <a:endParaRPr lang="en-US"/>
+          </a:p>
+        </p:txBody>
       </p:sp>
       <p:sp>
         <p:nvSpPr>
@@ -6661,11 +6581,11 @@
           </a:bodyPr>
           <a:lstStyle/>
           <a:p>
-            <a:pPr algn="l" indent="0" marL="0">
-              <a:buNone/>
-            </a:pPr>
-            <a:r>
-              <a:rPr lang="en-US" sz="1200" spc="168" kern="0" dirty="0">
+            <a:pPr marL="0" indent="0" algn="l">
+              <a:buNone/>
+            </a:pPr>
+            <a:r>
+              <a:rPr lang="en-US" sz="1200" kern="0" spc="168" dirty="0">
                 <a:solidFill>
                   <a:srgbClr val="969696"/>
                 </a:solidFill>
@@ -6702,7 +6622,7 @@
           </a:bodyPr>
           <a:lstStyle/>
           <a:p>
-            <a:pPr algn="l" indent="0" marL="0">
+            <a:pPr marL="0" indent="0" algn="l">
               <a:lnSpc>
                 <a:spcPct val="79670"/>
               </a:lnSpc>
@@ -6746,7 +6666,7 @@
           </a:bodyPr>
           <a:lstStyle/>
           <a:p>
-            <a:pPr algn="l" indent="0" marL="0">
+            <a:pPr marL="0" indent="0" algn="l">
               <a:lnSpc>
                 <a:spcPct val="125000"/>
               </a:lnSpc>
@@ -6769,14 +6689,14 @@
       </p:sp>
       <p:pic>
         <p:nvPicPr>
-          <p:cNvPr id="25" name="Image 0" descr="preencoded.png">    </p:cNvPr>
+          <p:cNvPr id="25" name="Image 0" descr="preencoded.png"/>
           <p:cNvPicPr>
             <a:picLocks noChangeAspect="1"/>
           </p:cNvPicPr>
           <p:nvPr/>
         </p:nvPicPr>
         <p:blipFill>
-          <a:blip r:embed="rId1"/>
+          <a:blip r:embed="rId3"/>
           <a:stretch>
             <a:fillRect/>
           </a:stretch>
@@ -6814,11 +6734,11 @@
           </a:bodyPr>
           <a:lstStyle/>
           <a:p>
-            <a:pPr algn="l" indent="0" marL="0">
-              <a:buNone/>
-            </a:pPr>
-            <a:r>
-              <a:rPr lang="en-US" sz="1200" spc="264" kern="0" dirty="0">
+            <a:pPr marL="0" indent="0" algn="l">
+              <a:buNone/>
+            </a:pPr>
+            <a:r>
+              <a:rPr lang="en-US" sz="1200" kern="0" spc="264" dirty="0">
                 <a:solidFill>
                   <a:srgbClr val="969696"/>
                 </a:solidFill>
@@ -6848,6 +6768,7 @@
         <a:solidFill>
           <a:srgbClr val="000000"/>
         </a:solidFill>
+        <a:effectLst/>
       </p:bgPr>
     </p:bg>
     <p:spTree>
@@ -6887,11 +6808,11 @@
           </a:bodyPr>
           <a:lstStyle/>
           <a:p>
-            <a:pPr algn="l" indent="0" marL="0">
-              <a:buNone/>
-            </a:pPr>
-            <a:r>
-              <a:rPr lang="en-US" sz="1500" spc="450" kern="0" dirty="0">
+            <a:pPr marL="0" indent="0" algn="l">
+              <a:buNone/>
+            </a:pPr>
+            <a:r>
+              <a:rPr lang="en-US" sz="1500" kern="0" spc="450" dirty="0">
                 <a:solidFill>
                   <a:srgbClr val="36CDFF"/>
                 </a:solidFill>
@@ -6928,7 +6849,7 @@
           </a:bodyPr>
           <a:lstStyle/>
           <a:p>
-            <a:pPr algn="l" indent="0" marL="0">
+            <a:pPr marL="0" indent="0" algn="l">
               <a:lnSpc>
                 <a:spcPct val="78190"/>
               </a:lnSpc>
@@ -6972,7 +6893,7 @@
           </a:bodyPr>
           <a:lstStyle/>
           <a:p>
-            <a:pPr algn="l" indent="0" marL="0">
+            <a:pPr marL="0" indent="0" algn="l">
               <a:lnSpc>
                 <a:spcPct val="126087"/>
               </a:lnSpc>
@@ -6989,12 +6910,6 @@
               </a:rPr>
               <a:t>You attacked one target across six layers and hardened every one. Now do it to systems that matter — </a:t>
             </a:r>
-            <a:pPr algn="l" indent="0" marL="0">
-              <a:lnSpc>
-                <a:spcPct val="126087"/>
-              </a:lnSpc>
-              <a:buNone/>
-            </a:pPr>
             <a:r>
               <a:rPr lang="en-US" sz="2250" b="1" dirty="0">
                 <a:solidFill>
@@ -7006,12 +6921,6 @@
               </a:rPr>
               <a:t>with authorization </a:t>
             </a:r>
-            <a:pPr algn="l" indent="0" marL="0">
-              <a:lnSpc>
-                <a:spcPct val="126087"/>
-              </a:lnSpc>
-              <a:buNone/>
-            </a:pPr>
             <a:r>
               <a:rPr lang="en-US" sz="2250" dirty="0">
                 <a:solidFill>
@@ -7050,7 +6959,7 @@
           </a:bodyPr>
           <a:lstStyle/>
           <a:p>
-            <a:pPr algn="l" indent="0" marL="0">
+            <a:pPr marL="0" indent="0" algn="l">
               <a:lnSpc>
                 <a:spcPct val="132000"/>
               </a:lnSpc>
@@ -7094,7 +7003,7 @@
           </a:bodyPr>
           <a:lstStyle/>
           <a:p>
-            <a:pPr algn="l" indent="0" marL="0">
+            <a:pPr marL="0" indent="0" algn="l">
               <a:lnSpc>
                 <a:spcPct val="121194"/>
               </a:lnSpc>
@@ -7111,13 +7020,117 @@
               </a:rPr>
               <a:t>KK Mookhey </a:t>
             </a:r>
-            <a:pPr algn="l" indent="0" marL="0">
+            <a:r>
+              <a:rPr lang="en-US" sz="2175" dirty="0">
+                <a:solidFill>
+                  <a:srgbClr val="FFFFFF"/>
+                </a:solidFill>
+                <a:latin typeface="Arial" pitchFamily="34" charset="0"/>
+                <a:ea typeface="Arial" pitchFamily="34" charset="-122"/>
+                <a:cs typeface="Arial" pitchFamily="34" charset="-120"/>
+              </a:rPr>
+              <a:t>· Transilience AI · </a:t>
+            </a:r>
+            <a:r>
+              <a:rPr lang="en-US" sz="1950" dirty="0">
+                <a:solidFill>
+                  <a:srgbClr val="C8C8C8"/>
+                </a:solidFill>
+                <a:latin typeface="Courier New" pitchFamily="34" charset="0"/>
+                <a:ea typeface="Courier New" pitchFamily="34" charset="-122"/>
+                <a:cs typeface="Courier New" pitchFamily="34" charset="-120"/>
+              </a:rPr>
+              <a:t>linkedin.com/in/kkmookhey</a:t>
+            </a:r>
+            <a:endParaRPr lang="en-US" sz="2175" dirty="0"/>
+          </a:p>
+        </p:txBody>
+      </p:sp>
+      <p:sp>
+        <p:nvSpPr>
+          <p:cNvPr id="7" name="Text 5"/>
+          <p:cNvSpPr/>
+          <p:nvPr/>
+        </p:nvSpPr>
+        <p:spPr>
+          <a:xfrm>
+            <a:off x="990600" y="6757020"/>
+            <a:ext cx="202406" cy="352425"/>
+          </a:xfrm>
+          <a:prstGeom prst="rect">
+            <a:avLst/>
+          </a:prstGeom>
+          <a:noFill/>
+          <a:ln/>
+        </p:spPr>
+        <p:txBody>
+          <a:bodyPr wrap="square" lIns="25400" tIns="25400" rIns="25400" bIns="25400" rtlCol="0" anchor="t">
+            <a:normAutofit/>
+          </a:bodyPr>
+          <a:lstStyle/>
+          <a:p>
+            <a:pPr marL="0" indent="0" algn="l">
+              <a:lnSpc>
+                <a:spcPct val="132000"/>
+              </a:lnSpc>
+              <a:buNone/>
+            </a:pPr>
+            <a:r>
+              <a:rPr lang="en-US" sz="1650" dirty="0">
+                <a:solidFill>
+                  <a:srgbClr val="FD7EF5"/>
+                </a:solidFill>
+                <a:latin typeface="Courier New" pitchFamily="34" charset="0"/>
+                <a:ea typeface="Courier New" pitchFamily="34" charset="-122"/>
+                <a:cs typeface="Courier New" pitchFamily="34" charset="-120"/>
+              </a:rPr>
+              <a:t>▸</a:t>
+            </a:r>
+            <a:endParaRPr lang="en-US" sz="1650" dirty="0"/>
+          </a:p>
+        </p:txBody>
+      </p:sp>
+      <p:sp>
+        <p:nvSpPr>
+          <p:cNvPr id="8" name="Text 6"/>
+          <p:cNvSpPr/>
+          <p:nvPr/>
+        </p:nvSpPr>
+        <p:spPr>
+          <a:xfrm>
+            <a:off x="1307306" y="6757020"/>
+            <a:ext cx="12871118" cy="429518"/>
+          </a:xfrm>
+          <a:prstGeom prst="rect">
+            <a:avLst/>
+          </a:prstGeom>
+          <a:noFill/>
+          <a:ln/>
+        </p:spPr>
+        <p:txBody>
+          <a:bodyPr wrap="square" lIns="25400" tIns="25400" rIns="25400" bIns="25400" rtlCol="0" anchor="t">
+            <a:normAutofit/>
+          </a:bodyPr>
+          <a:lstStyle/>
+          <a:p>
+            <a:pPr marL="0" indent="0" algn="l">
               <a:lnSpc>
                 <a:spcPct val="121194"/>
               </a:lnSpc>
               <a:buNone/>
             </a:pPr>
             <a:r>
+              <a:rPr lang="en-US" sz="2175" b="1" dirty="0">
+                <a:solidFill>
+                  <a:srgbClr val="FFFFFF"/>
+                </a:solidFill>
+                <a:latin typeface="Arial" pitchFamily="34" charset="0"/>
+                <a:ea typeface="Arial" pitchFamily="34" charset="-122"/>
+                <a:cs typeface="Arial" pitchFamily="34" charset="-120"/>
+              </a:rPr>
+              <a:t>Venkat Pothamsetty </a:t>
+            </a:r>
+            <a:r>
               <a:rPr lang="en-US" sz="2175" dirty="0">
                 <a:solidFill>
                   <a:srgbClr val="FFFFFF"/>
@@ -7126,14 +7139,8 @@
                 <a:ea typeface="Arial" pitchFamily="34" charset="-122"/>
                 <a:cs typeface="Arial" pitchFamily="34" charset="-120"/>
               </a:rPr>
-              <a:t>· Transilience AI · </a:t>
-            </a:r>
-            <a:pPr algn="l" indent="0" marL="0">
-              <a:lnSpc>
-                <a:spcPct val="121194"/>
-              </a:lnSpc>
-              <a:buNone/>
-            </a:pPr>
+              <a:t>· Founder &amp; CISO, Transilience AI · </a:t>
+            </a:r>
             <a:r>
               <a:rPr lang="en-US" sz="1950" dirty="0">
                 <a:solidFill>
@@ -7143,128 +7150,6 @@
                 <a:ea typeface="Courier New" pitchFamily="34" charset="-122"/>
                 <a:cs typeface="Courier New" pitchFamily="34" charset="-120"/>
               </a:rPr>
-              <a:t>linkedin.com/in/kkmookhey</a:t>
-            </a:r>
-            <a:endParaRPr lang="en-US" sz="2175" dirty="0"/>
-          </a:p>
-        </p:txBody>
-      </p:sp>
-      <p:sp>
-        <p:nvSpPr>
-          <p:cNvPr id="7" name="Text 5"/>
-          <p:cNvSpPr/>
-          <p:nvPr/>
-        </p:nvSpPr>
-        <p:spPr>
-          <a:xfrm>
-            <a:off x="990600" y="6757020"/>
-            <a:ext cx="202406" cy="352425"/>
-          </a:xfrm>
-          <a:prstGeom prst="rect">
-            <a:avLst/>
-          </a:prstGeom>
-          <a:noFill/>
-          <a:ln/>
-        </p:spPr>
-        <p:txBody>
-          <a:bodyPr wrap="square" lIns="25400" tIns="25400" rIns="25400" bIns="25400" rtlCol="0" anchor="t">
-            <a:normAutofit/>
-          </a:bodyPr>
-          <a:lstStyle/>
-          <a:p>
-            <a:pPr algn="l" indent="0" marL="0">
-              <a:lnSpc>
-                <a:spcPct val="132000"/>
-              </a:lnSpc>
-              <a:buNone/>
-            </a:pPr>
-            <a:r>
-              <a:rPr lang="en-US" sz="1650" dirty="0">
-                <a:solidFill>
-                  <a:srgbClr val="FD7EF5"/>
-                </a:solidFill>
-                <a:latin typeface="Courier New" pitchFamily="34" charset="0"/>
-                <a:ea typeface="Courier New" pitchFamily="34" charset="-122"/>
-                <a:cs typeface="Courier New" pitchFamily="34" charset="-120"/>
-              </a:rPr>
-              <a:t>▸</a:t>
-            </a:r>
-            <a:endParaRPr lang="en-US" sz="1650" dirty="0"/>
-          </a:p>
-        </p:txBody>
-      </p:sp>
-      <p:sp>
-        <p:nvSpPr>
-          <p:cNvPr id="8" name="Text 6"/>
-          <p:cNvSpPr/>
-          <p:nvPr/>
-        </p:nvSpPr>
-        <p:spPr>
-          <a:xfrm>
-            <a:off x="1307306" y="6757020"/>
-            <a:ext cx="12871118" cy="429518"/>
-          </a:xfrm>
-          <a:prstGeom prst="rect">
-            <a:avLst/>
-          </a:prstGeom>
-          <a:noFill/>
-          <a:ln/>
-        </p:spPr>
-        <p:txBody>
-          <a:bodyPr wrap="square" lIns="25400" tIns="25400" rIns="25400" bIns="25400" rtlCol="0" anchor="t">
-            <a:normAutofit/>
-          </a:bodyPr>
-          <a:lstStyle/>
-          <a:p>
-            <a:pPr algn="l" indent="0" marL="0">
-              <a:lnSpc>
-                <a:spcPct val="121194"/>
-              </a:lnSpc>
-              <a:buNone/>
-            </a:pPr>
-            <a:r>
-              <a:rPr lang="en-US" sz="2175" b="1" dirty="0">
-                <a:solidFill>
-                  <a:srgbClr val="FFFFFF"/>
-                </a:solidFill>
-                <a:latin typeface="Arial" pitchFamily="34" charset="0"/>
-                <a:ea typeface="Arial" pitchFamily="34" charset="-122"/>
-                <a:cs typeface="Arial" pitchFamily="34" charset="-120"/>
-              </a:rPr>
-              <a:t>Venkat Pothamsetty </a:t>
-            </a:r>
-            <a:pPr algn="l" indent="0" marL="0">
-              <a:lnSpc>
-                <a:spcPct val="121194"/>
-              </a:lnSpc>
-              <a:buNone/>
-            </a:pPr>
-            <a:r>
-              <a:rPr lang="en-US" sz="2175" dirty="0">
-                <a:solidFill>
-                  <a:srgbClr val="FFFFFF"/>
-                </a:solidFill>
-                <a:latin typeface="Arial" pitchFamily="34" charset="0"/>
-                <a:ea typeface="Arial" pitchFamily="34" charset="-122"/>
-                <a:cs typeface="Arial" pitchFamily="34" charset="-120"/>
-              </a:rPr>
-              <a:t>· Founder &amp; CISO, Transilience AI · </a:t>
-            </a:r>
-            <a:pPr algn="l" indent="0" marL="0">
-              <a:lnSpc>
-                <a:spcPct val="121194"/>
-              </a:lnSpc>
-              <a:buNone/>
-            </a:pPr>
-            <a:r>
-              <a:rPr lang="en-US" sz="1950" dirty="0">
-                <a:solidFill>
-                  <a:srgbClr val="C8C8C8"/>
-                </a:solidFill>
-                <a:latin typeface="Courier New" pitchFamily="34" charset="0"/>
-                <a:ea typeface="Courier New" pitchFamily="34" charset="-122"/>
-                <a:cs typeface="Courier New" pitchFamily="34" charset="-120"/>
-              </a:rPr>
               <a:t>linkedin.com/in/venkatpothamsetty</a:t>
             </a:r>
             <a:endParaRPr lang="en-US" sz="2175" dirty="0"/>
@@ -7273,14 +7158,14 @@
       </p:sp>
       <p:pic>
         <p:nvPicPr>
-          <p:cNvPr id="9" name="Image 0" descr="preencoded.png">    </p:cNvPr>
+          <p:cNvPr id="9" name="Image 0" descr="preencoded.png"/>
           <p:cNvPicPr>
             <a:picLocks noChangeAspect="1"/>
           </p:cNvPicPr>
           <p:nvPr/>
         </p:nvPicPr>
         <p:blipFill>
-          <a:blip r:embed="rId1"/>
+          <a:blip r:embed="rId3"/>
           <a:stretch>
             <a:fillRect/>
           </a:stretch>
@@ -7318,11 +7203,11 @@
           </a:bodyPr>
           <a:lstStyle/>
           <a:p>
-            <a:pPr algn="l" indent="0" marL="0">
-              <a:buNone/>
-            </a:pPr>
-            <a:r>
-              <a:rPr lang="en-US" sz="1200" spc="264" kern="0" dirty="0">
+            <a:pPr marL="0" indent="0" algn="l">
+              <a:buNone/>
+            </a:pPr>
+            <a:r>
+              <a:rPr lang="en-US" sz="1200" kern="0" spc="264" dirty="0">
                 <a:solidFill>
                   <a:srgbClr val="969696"/>
                 </a:solidFill>
@@ -7352,6 +7237,7 @@
         <a:solidFill>
           <a:srgbClr val="000000"/>
         </a:solidFill>
+        <a:effectLst/>
       </p:bgPr>
     </p:bg>
     <p:spTree>
@@ -7391,11 +7277,11 @@
           </a:bodyPr>
           <a:lstStyle/>
           <a:p>
-            <a:pPr algn="l" indent="0" marL="0">
-              <a:buNone/>
-            </a:pPr>
-            <a:r>
-              <a:rPr lang="en-US" sz="1650" spc="495" kern="0" dirty="0">
+            <a:pPr marL="0" indent="0" algn="l">
+              <a:buNone/>
+            </a:pPr>
+            <a:r>
+              <a:rPr lang="en-US" sz="1650" kern="0" spc="495" dirty="0">
                 <a:solidFill>
                   <a:srgbClr val="36CDFF"/>
                 </a:solidFill>
@@ -7432,7 +7318,7 @@
           </a:bodyPr>
           <a:lstStyle/>
           <a:p>
-            <a:pPr algn="l" indent="0" marL="0">
+            <a:pPr marL="0" indent="0" algn="l">
               <a:lnSpc>
                 <a:spcPct val="69565"/>
               </a:lnSpc>
@@ -7449,12 +7335,6 @@
               </a:rPr>
               <a:t>END</a:t>
             </a:r>
-            <a:pPr algn="l" indent="0" marL="0">
-              <a:lnSpc>
-                <a:spcPct val="69565"/>
-              </a:lnSpc>
-              <a:buNone/>
-            </a:pPr>
             <a:r>
               <a:rPr lang="en-US" sz="22500" b="1" dirty="0">
                 <a:solidFill>
@@ -7493,7 +7373,7 @@
           </a:bodyPr>
           <a:lstStyle/>
           <a:p>
-            <a:pPr algn="l" indent="0" marL="0">
+            <a:pPr marL="0" indent="0" algn="l">
               <a:lnSpc>
                 <a:spcPct val="126410"/>
               </a:lnSpc>
@@ -7516,14 +7396,14 @@
       </p:sp>
       <p:pic>
         <p:nvPicPr>
-          <p:cNvPr id="5" name="Image 0" descr="preencoded.png">    </p:cNvPr>
+          <p:cNvPr id="5" name="Image 0" descr="preencoded.png"/>
           <p:cNvPicPr>
             <a:picLocks noChangeAspect="1"/>
           </p:cNvPicPr>
           <p:nvPr/>
         </p:nvPicPr>
         <p:blipFill>
-          <a:blip r:embed="rId1"/>
+          <a:blip r:embed="rId3"/>
           <a:stretch>
             <a:fillRect/>
           </a:stretch>
@@ -7561,11 +7441,11 @@
           </a:bodyPr>
           <a:lstStyle/>
           <a:p>
-            <a:pPr algn="l" indent="0" marL="0">
-              <a:buNone/>
-            </a:pPr>
-            <a:r>
-              <a:rPr lang="en-US" sz="1200" spc="264" kern="0" dirty="0">
+            <a:pPr marL="0" indent="0" algn="l">
+              <a:buNone/>
+            </a:pPr>
+            <a:r>
+              <a:rPr lang="en-US" sz="1200" kern="0" spc="264" dirty="0">
                 <a:solidFill>
                   <a:srgbClr val="969696"/>
                 </a:solidFill>
@@ -7595,6 +7475,7 @@
         <a:solidFill>
           <a:srgbClr val="000000"/>
         </a:solidFill>
+        <a:effectLst/>
       </p:bgPr>
     </p:bg>
     <p:spTree>
@@ -7634,11 +7515,11 @@
           </a:bodyPr>
           <a:lstStyle/>
           <a:p>
-            <a:pPr algn="l" indent="0" marL="0">
-              <a:buNone/>
-            </a:pPr>
-            <a:r>
-              <a:rPr lang="en-US" sz="1500" spc="450" kern="0" dirty="0">
+            <a:pPr marL="0" indent="0" algn="l">
+              <a:buNone/>
+            </a:pPr>
+            <a:r>
+              <a:rPr lang="en-US" sz="1500" kern="0" spc="450" dirty="0">
                 <a:solidFill>
                   <a:srgbClr val="36CDFF"/>
                 </a:solidFill>
@@ -7675,7 +7556,7 @@
           </a:bodyPr>
           <a:lstStyle/>
           <a:p>
-            <a:pPr algn="l" indent="0" marL="0">
+            <a:pPr marL="0" indent="0" algn="l">
               <a:lnSpc>
                 <a:spcPct val="78416"/>
               </a:lnSpc>
@@ -7719,7 +7600,7 @@
           </a:bodyPr>
           <a:lstStyle/>
           <a:p>
-            <a:pPr algn="l" indent="0" marL="0">
+            <a:pPr marL="0" indent="0" algn="l">
               <a:lnSpc>
                 <a:spcPct val="125522"/>
               </a:lnSpc>
@@ -7736,12 +7617,6 @@
               </a:rPr>
               <a:t>One fictional AI-first neobank — </a:t>
             </a:r>
-            <a:pPr algn="l" indent="0" marL="0">
-              <a:lnSpc>
-                <a:spcPct val="125522"/>
-              </a:lnSpc>
-              <a:buNone/>
-            </a:pPr>
             <a:r>
               <a:rPr lang="en-US" sz="2175" b="1" dirty="0">
                 <a:solidFill>
@@ -7753,12 +7628,6 @@
               </a:rPr>
               <a:t>Eiger </a:t>
             </a:r>
-            <a:pPr algn="l" indent="0" marL="0">
-              <a:lnSpc>
-                <a:spcPct val="125522"/>
-              </a:lnSpc>
-              <a:buNone/>
-            </a:pPr>
             <a:r>
               <a:rPr lang="en-US" sz="2175" dirty="0">
                 <a:solidFill>
@@ -7770,12 +7639,6 @@
               </a:rPr>
               <a:t>— and its assistant </a:t>
             </a:r>
-            <a:pPr algn="l" indent="0" marL="0">
-              <a:lnSpc>
-                <a:spcPct val="125522"/>
-              </a:lnSpc>
-              <a:buNone/>
-            </a:pPr>
             <a:r>
               <a:rPr lang="en-US" sz="2175" b="1" dirty="0">
                 <a:solidFill>
@@ -7787,12 +7650,6 @@
               </a:rPr>
               <a:t>Iggy</a:t>
             </a:r>
-            <a:pPr algn="l" indent="0" marL="0">
-              <a:lnSpc>
-                <a:spcPct val="125522"/>
-              </a:lnSpc>
-              <a:buNone/>
-            </a:pPr>
             <a:r>
               <a:rPr lang="en-US" sz="2175" dirty="0">
                 <a:solidFill>
@@ -7804,12 +7661,6 @@
               </a:rPr>
               <a:t>. You attacked it across </a:t>
             </a:r>
-            <a:pPr algn="l" indent="0" marL="0">
-              <a:lnSpc>
-                <a:spcPct val="125522"/>
-              </a:lnSpc>
-              <a:buNone/>
-            </a:pPr>
             <a:r>
               <a:rPr lang="en-US" sz="2175" b="1" dirty="0">
                 <a:solidFill>
@@ -7821,12 +7672,6 @@
               </a:rPr>
               <a:t>six layers that stacked on top of each other</a:t>
             </a:r>
-            <a:pPr algn="l" indent="0" marL="0">
-              <a:lnSpc>
-                <a:spcPct val="125522"/>
-              </a:lnSpc>
-              <a:buNone/>
-            </a:pPr>
             <a:r>
               <a:rPr lang="en-US" sz="2175" dirty="0">
                 <a:solidFill>
@@ -7870,6 +7715,13 @@
             <a:prstDash val="solid"/>
           </a:ln>
         </p:spPr>
+        <p:txBody>
+          <a:bodyPr/>
+          <a:lstStyle/>
+          <a:p>
+            <a:endParaRPr lang="en-US"/>
+          </a:p>
+        </p:txBody>
       </p:sp>
       <p:sp>
         <p:nvSpPr>
@@ -7892,6 +7744,13 @@
           </a:solidFill>
           <a:ln/>
         </p:spPr>
+        <p:txBody>
+          <a:bodyPr/>
+          <a:lstStyle/>
+          <a:p>
+            <a:endParaRPr lang="en-US"/>
+          </a:p>
+        </p:txBody>
       </p:sp>
       <p:sp>
         <p:nvSpPr>
@@ -7912,6 +7771,13 @@
           </a:solidFill>
           <a:ln/>
         </p:spPr>
+        <p:txBody>
+          <a:bodyPr/>
+          <a:lstStyle/>
+          <a:p>
+            <a:endParaRPr lang="en-US"/>
+          </a:p>
+        </p:txBody>
       </p:sp>
       <p:sp>
         <p:nvSpPr>
@@ -7932,6 +7798,13 @@
           </a:solidFill>
           <a:ln/>
         </p:spPr>
+        <p:txBody>
+          <a:bodyPr/>
+          <a:lstStyle/>
+          <a:p>
+            <a:endParaRPr lang="en-US"/>
+          </a:p>
+        </p:txBody>
       </p:sp>
       <p:sp>
         <p:nvSpPr>
@@ -7952,6 +7825,13 @@
           </a:solidFill>
           <a:ln/>
         </p:spPr>
+        <p:txBody>
+          <a:bodyPr/>
+          <a:lstStyle/>
+          <a:p>
+            <a:endParaRPr lang="en-US"/>
+          </a:p>
+        </p:txBody>
       </p:sp>
       <p:sp>
         <p:nvSpPr>
@@ -7976,7 +7856,7 @@
           </a:bodyPr>
           <a:lstStyle/>
           <a:p>
-            <a:pPr algn="l" indent="0" marL="0">
+            <a:pPr marL="0" indent="0" algn="l">
               <a:buNone/>
             </a:pPr>
             <a:r>
@@ -8017,7 +7897,7 @@
           </a:bodyPr>
           <a:lstStyle/>
           <a:p>
-            <a:pPr algn="l" indent="0" marL="0">
+            <a:pPr marL="0" indent="0" algn="l">
               <a:lnSpc>
                 <a:spcPct val="145424"/>
               </a:lnSpc>
@@ -8034,12 +7914,6 @@
               </a:rPr>
               <a:t>L0 chatbot</a:t>
             </a:r>
-            <a:pPr algn="l" indent="0" marL="0">
-              <a:lnSpc>
-                <a:spcPct val="145424"/>
-              </a:lnSpc>
-              <a:buNone/>
-            </a:pPr>
             <a:r>
               <a:rPr lang="en-US" sz="1950" dirty="0">
                 <a:solidFill>
@@ -8051,12 +7925,6 @@
               </a:rPr>
               <a:t>  →  </a:t>
             </a:r>
-            <a:pPr algn="l" indent="0" marL="0">
-              <a:lnSpc>
-                <a:spcPct val="145424"/>
-              </a:lnSpc>
-              <a:buNone/>
-            </a:pPr>
             <a:r>
               <a:rPr lang="en-US" sz="1950" dirty="0">
                 <a:solidFill>
@@ -8068,12 +7936,6 @@
               </a:rPr>
               <a:t>L1 RAG</a:t>
             </a:r>
-            <a:pPr algn="l" indent="0" marL="0">
-              <a:lnSpc>
-                <a:spcPct val="145424"/>
-              </a:lnSpc>
-              <a:buNone/>
-            </a:pPr>
             <a:r>
               <a:rPr lang="en-US" sz="1950" dirty="0">
                 <a:solidFill>
@@ -8085,12 +7947,6 @@
               </a:rPr>
               <a:t>  →  </a:t>
             </a:r>
-            <a:pPr algn="l" indent="0" marL="0">
-              <a:lnSpc>
-                <a:spcPct val="145424"/>
-              </a:lnSpc>
-              <a:buNone/>
-            </a:pPr>
             <a:r>
               <a:rPr lang="en-US" sz="1950" dirty="0">
                 <a:solidFill>
@@ -8102,12 +7958,6 @@
               </a:rPr>
               <a:t>L2 agent</a:t>
             </a:r>
-            <a:pPr algn="l" indent="0" marL="0">
-              <a:lnSpc>
-                <a:spcPct val="145424"/>
-              </a:lnSpc>
-              <a:buNone/>
-            </a:pPr>
             <a:r>
               <a:rPr lang="en-US" sz="1950" dirty="0">
                 <a:solidFill>
@@ -8119,12 +7969,6 @@
               </a:rPr>
               <a:t>  →  </a:t>
             </a:r>
-            <a:pPr algn="l" indent="0" marL="0">
-              <a:lnSpc>
-                <a:spcPct val="145424"/>
-              </a:lnSpc>
-              <a:buNone/>
-            </a:pPr>
             <a:r>
               <a:rPr lang="en-US" sz="1950" dirty="0">
                 <a:solidFill>
@@ -8136,12 +7980,6 @@
               </a:rPr>
               <a:t>L3 MCP</a:t>
             </a:r>
-            <a:pPr algn="l" indent="0" marL="0">
-              <a:lnSpc>
-                <a:spcPct val="145424"/>
-              </a:lnSpc>
-              <a:buNone/>
-            </a:pPr>
             <a:r>
               <a:rPr lang="en-US" sz="1950" dirty="0">
                 <a:solidFill>
@@ -8153,12 +7991,6 @@
               </a:rPr>
               <a:t>  →  </a:t>
             </a:r>
-            <a:pPr algn="l" indent="0" marL="0">
-              <a:lnSpc>
-                <a:spcPct val="145424"/>
-              </a:lnSpc>
-              <a:buNone/>
-            </a:pPr>
             <a:r>
               <a:rPr lang="en-US" sz="1950" dirty="0">
                 <a:solidFill>
@@ -8170,12 +8002,6 @@
               </a:rPr>
               <a:t>L4 multi-agent</a:t>
             </a:r>
-            <a:pPr algn="l" indent="0" marL="0">
-              <a:lnSpc>
-                <a:spcPct val="145424"/>
-              </a:lnSpc>
-              <a:buNone/>
-            </a:pPr>
             <a:r>
               <a:rPr lang="en-US" sz="1950" dirty="0">
                 <a:solidFill>
@@ -8187,12 +8013,6 @@
               </a:rPr>
               <a:t>  →  </a:t>
             </a:r>
-            <a:pPr algn="l" indent="0" marL="0">
-              <a:lnSpc>
-                <a:spcPct val="145424"/>
-              </a:lnSpc>
-              <a:buNone/>
-            </a:pPr>
             <a:r>
               <a:rPr lang="en-US" sz="1950" dirty="0">
                 <a:solidFill>
@@ -8231,7 +8051,7 @@
           </a:bodyPr>
           <a:lstStyle/>
           <a:p>
-            <a:pPr algn="l" indent="0" marL="0">
+            <a:pPr marL="0" indent="0" algn="l">
               <a:lnSpc>
                 <a:spcPct val="125522"/>
               </a:lnSpc>
@@ -8248,12 +8068,6 @@
               </a:rPr>
               <a:t>For every layer: </a:t>
             </a:r>
-            <a:pPr algn="l" indent="0" marL="0">
-              <a:lnSpc>
-                <a:spcPct val="125522"/>
-              </a:lnSpc>
-              <a:buNone/>
-            </a:pPr>
             <a:r>
               <a:rPr lang="en-US" sz="2175" b="1" dirty="0">
                 <a:solidFill>
@@ -8265,12 +8079,6 @@
               </a:rPr>
               <a:t>Build </a:t>
             </a:r>
-            <a:pPr algn="l" indent="0" marL="0">
-              <a:lnSpc>
-                <a:spcPct val="125522"/>
-              </a:lnSpc>
-              <a:buNone/>
-            </a:pPr>
             <a:r>
               <a:rPr lang="en-US" sz="2175" dirty="0">
                 <a:solidFill>
@@ -8282,12 +8090,6 @@
               </a:rPr>
               <a:t>it · </a:t>
             </a:r>
-            <a:pPr algn="l" indent="0" marL="0">
-              <a:lnSpc>
-                <a:spcPct val="125522"/>
-              </a:lnSpc>
-              <a:buNone/>
-            </a:pPr>
             <a:r>
               <a:rPr lang="en-US" sz="2175" b="1" dirty="0">
                 <a:solidFill>
@@ -8299,12 +8101,6 @@
               </a:rPr>
               <a:t>Break </a:t>
             </a:r>
-            <a:pPr algn="l" indent="0" marL="0">
-              <a:lnSpc>
-                <a:spcPct val="125522"/>
-              </a:lnSpc>
-              <a:buNone/>
-            </a:pPr>
             <a:r>
               <a:rPr lang="en-US" sz="2175" dirty="0">
                 <a:solidFill>
@@ -8316,12 +8112,6 @@
               </a:rPr>
               <a:t>it · </a:t>
             </a:r>
-            <a:pPr algn="l" indent="0" marL="0">
-              <a:lnSpc>
-                <a:spcPct val="125522"/>
-              </a:lnSpc>
-              <a:buNone/>
-            </a:pPr>
             <a:r>
               <a:rPr lang="en-US" sz="2175" b="1" dirty="0">
                 <a:solidFill>
@@ -8333,12 +8123,6 @@
               </a:rPr>
               <a:t>Secure </a:t>
             </a:r>
-            <a:pPr algn="l" indent="0" marL="0">
-              <a:lnSpc>
-                <a:spcPct val="125522"/>
-              </a:lnSpc>
-              <a:buNone/>
-            </a:pPr>
             <a:r>
               <a:rPr lang="en-US" sz="2175" dirty="0">
                 <a:solidFill>
@@ -8350,12 +8134,6 @@
               </a:rPr>
               <a:t>it. Flip </a:t>
             </a:r>
-            <a:pPr algn="l" indent="0" marL="0">
-              <a:lnSpc>
-                <a:spcPct val="125522"/>
-              </a:lnSpc>
-              <a:buNone/>
-            </a:pPr>
             <a:r>
               <a:rPr lang="en-US" sz="2175" b="1" dirty="0">
                 <a:solidFill>
@@ -8367,12 +8145,6 @@
               </a:rPr>
               <a:t>one flag</a:t>
             </a:r>
-            <a:pPr algn="l" indent="0" marL="0">
-              <a:lnSpc>
-                <a:spcPct val="125522"/>
-              </a:lnSpc>
-              <a:buNone/>
-            </a:pPr>
             <a:r>
               <a:rPr lang="en-US" sz="2175" dirty="0">
                 <a:solidFill>
@@ -8384,12 +8156,6 @@
               </a:rPr>
               <a:t>, run the </a:t>
             </a:r>
-            <a:pPr algn="l" indent="0" marL="0">
-              <a:lnSpc>
-                <a:spcPct val="125522"/>
-              </a:lnSpc>
-              <a:buNone/>
-            </a:pPr>
             <a:r>
               <a:rPr lang="en-US" sz="2175" b="1" dirty="0">
                 <a:solidFill>
@@ -8401,12 +8167,6 @@
               </a:rPr>
               <a:t>same </a:t>
             </a:r>
-            <a:pPr algn="l" indent="0" marL="0">
-              <a:lnSpc>
-                <a:spcPct val="125522"/>
-              </a:lnSpc>
-              <a:buNone/>
-            </a:pPr>
             <a:r>
               <a:rPr lang="en-US" sz="2175" dirty="0">
                 <a:solidFill>
@@ -8424,14 +8184,14 @@
       </p:sp>
       <p:pic>
         <p:nvPicPr>
-          <p:cNvPr id="13" name="Image 0" descr="preencoded.png">    </p:cNvPr>
+          <p:cNvPr id="13" name="Image 0" descr="preencoded.png"/>
           <p:cNvPicPr>
             <a:picLocks noChangeAspect="1"/>
           </p:cNvPicPr>
           <p:nvPr/>
         </p:nvPicPr>
         <p:blipFill>
-          <a:blip r:embed="rId1"/>
+          <a:blip r:embed="rId3"/>
           <a:stretch>
             <a:fillRect/>
           </a:stretch>
@@ -8469,11 +8229,11 @@
           </a:bodyPr>
           <a:lstStyle/>
           <a:p>
-            <a:pPr algn="l" indent="0" marL="0">
-              <a:buNone/>
-            </a:pPr>
-            <a:r>
-              <a:rPr lang="en-US" sz="1200" spc="264" kern="0" dirty="0">
+            <a:pPr marL="0" indent="0" algn="l">
+              <a:buNone/>
+            </a:pPr>
+            <a:r>
+              <a:rPr lang="en-US" sz="1200" kern="0" spc="264" dirty="0">
                 <a:solidFill>
                   <a:srgbClr val="969696"/>
                 </a:solidFill>
@@ -8503,6 +8263,7 @@
         <a:solidFill>
           <a:srgbClr val="000000"/>
         </a:solidFill>
+        <a:effectLst/>
       </p:bgPr>
     </p:bg>
     <p:spTree>
@@ -8542,11 +8303,11 @@
           </a:bodyPr>
           <a:lstStyle/>
           <a:p>
-            <a:pPr algn="l" indent="0" marL="0">
-              <a:buNone/>
-            </a:pPr>
-            <a:r>
-              <a:rPr lang="en-US" sz="1650" spc="495" kern="0" dirty="0">
+            <a:pPr marL="0" indent="0" algn="l">
+              <a:buNone/>
+            </a:pPr>
+            <a:r>
+              <a:rPr lang="en-US" sz="1650" kern="0" spc="495" dirty="0">
                 <a:solidFill>
                   <a:srgbClr val="FD7EF5"/>
                 </a:solidFill>
@@ -8583,7 +8344,7 @@
           </a:bodyPr>
           <a:lstStyle/>
           <a:p>
-            <a:pPr algn="l" indent="0" marL="0">
+            <a:pPr marL="0" indent="0" algn="l">
               <a:lnSpc>
                 <a:spcPct val="78190"/>
               </a:lnSpc>
@@ -8627,7 +8388,7 @@
           </a:bodyPr>
           <a:lstStyle/>
           <a:p>
-            <a:pPr algn="l" indent="0" marL="0">
+            <a:pPr marL="0" indent="0" algn="l">
               <a:lnSpc>
                 <a:spcPct val="126087"/>
               </a:lnSpc>
@@ -8644,12 +8405,6 @@
               </a:rPr>
               <a:t>System prompt, your message, a retrieved document, a tool’s description, another agent’s output — by the time the model reads them, they are </a:t>
             </a:r>
-            <a:pPr algn="l" indent="0" marL="0">
-              <a:lnSpc>
-                <a:spcPct val="126087"/>
-              </a:lnSpc>
-              <a:buNone/>
-            </a:pPr>
             <a:r>
               <a:rPr lang="en-US" sz="2250" b="1" dirty="0">
                 <a:solidFill>
@@ -8661,12 +8416,6 @@
               </a:rPr>
               <a:t>one undifferentiated stream of tokens</a:t>
             </a:r>
-            <a:pPr algn="l" indent="0" marL="0">
-              <a:lnSpc>
-                <a:spcPct val="126087"/>
-              </a:lnSpc>
-              <a:buNone/>
-            </a:pPr>
             <a:r>
               <a:rPr lang="en-US" sz="2250" dirty="0">
                 <a:solidFill>
@@ -8678,12 +8427,6 @@
               </a:rPr>
               <a:t>. No hardware boundary. No “this part is trusted.” </a:t>
             </a:r>
-            <a:pPr algn="l" indent="0" marL="0">
-              <a:lnSpc>
-                <a:spcPct val="126087"/>
-              </a:lnSpc>
-              <a:buNone/>
-            </a:pPr>
             <a:r>
               <a:rPr lang="en-US" sz="2250" dirty="0">
                 <a:solidFill>
@@ -8701,14 +8444,14 @@
       </p:sp>
       <p:pic>
         <p:nvPicPr>
-          <p:cNvPr id="5" name="Image 0" descr="preencoded.png">    </p:cNvPr>
+          <p:cNvPr id="5" name="Image 0" descr="preencoded.png"/>
           <p:cNvPicPr>
             <a:picLocks noChangeAspect="1"/>
           </p:cNvPicPr>
           <p:nvPr/>
         </p:nvPicPr>
         <p:blipFill>
-          <a:blip r:embed="rId1"/>
+          <a:blip r:embed="rId3"/>
           <a:stretch>
             <a:fillRect/>
           </a:stretch>
@@ -8746,11 +8489,11 @@
           </a:bodyPr>
           <a:lstStyle/>
           <a:p>
-            <a:pPr algn="l" indent="0" marL="0">
-              <a:buNone/>
-            </a:pPr>
-            <a:r>
-              <a:rPr lang="en-US" sz="1200" spc="264" kern="0" dirty="0">
+            <a:pPr marL="0" indent="0" algn="l">
+              <a:buNone/>
+            </a:pPr>
+            <a:r>
+              <a:rPr lang="en-US" sz="1200" kern="0" spc="264" dirty="0">
                 <a:solidFill>
                   <a:srgbClr val="969696"/>
                 </a:solidFill>
@@ -8780,6 +8523,7 @@
         <a:solidFill>
           <a:srgbClr val="000000"/>
         </a:solidFill>
+        <a:effectLst/>
       </p:bgPr>
     </p:bg>
     <p:spTree>
@@ -8819,11 +8563,11 @@
           </a:bodyPr>
           <a:lstStyle/>
           <a:p>
-            <a:pPr algn="l" indent="0" marL="0">
-              <a:buNone/>
-            </a:pPr>
-            <a:r>
-              <a:rPr lang="en-US" sz="1500" spc="450" kern="0" dirty="0">
+            <a:pPr marL="0" indent="0" algn="l">
+              <a:buNone/>
+            </a:pPr>
+            <a:r>
+              <a:rPr lang="en-US" sz="1500" kern="0" spc="450" dirty="0">
                 <a:solidFill>
                   <a:srgbClr val="36CDFF"/>
                 </a:solidFill>
@@ -8860,7 +8604,7 @@
           </a:bodyPr>
           <a:lstStyle/>
           <a:p>
-            <a:pPr algn="l" indent="0" marL="0">
+            <a:pPr marL="0" indent="0" algn="l">
               <a:lnSpc>
                 <a:spcPct val="78171"/>
               </a:lnSpc>
@@ -8902,6 +8646,13 @@
           </a:solidFill>
           <a:ln/>
         </p:spPr>
+        <p:txBody>
+          <a:bodyPr/>
+          <a:lstStyle/>
+          <a:p>
+            <a:endParaRPr lang="en-US"/>
+          </a:p>
+        </p:txBody>
       </p:sp>
       <p:sp>
         <p:nvSpPr>
@@ -8926,11 +8677,11 @@
           </a:bodyPr>
           <a:lstStyle/>
           <a:p>
-            <a:pPr algn="l" indent="0" marL="0">
-              <a:buNone/>
-            </a:pPr>
-            <a:r>
-              <a:rPr lang="en-US" sz="1275" spc="127" kern="0" dirty="0">
+            <a:pPr marL="0" indent="0" algn="l">
+              <a:buNone/>
+            </a:pPr>
+            <a:r>
+              <a:rPr lang="en-US" sz="1275" kern="0" spc="127" dirty="0">
                 <a:solidFill>
                   <a:srgbClr val="36CDFF"/>
                 </a:solidFill>
@@ -8967,11 +8718,11 @@
           </a:bodyPr>
           <a:lstStyle/>
           <a:p>
-            <a:pPr algn="l" indent="0" marL="0">
-              <a:buNone/>
-            </a:pPr>
-            <a:r>
-              <a:rPr lang="en-US" sz="1275" spc="127" kern="0" dirty="0">
+            <a:pPr marL="0" indent="0" algn="l">
+              <a:buNone/>
+            </a:pPr>
+            <a:r>
+              <a:rPr lang="en-US" sz="1275" kern="0" spc="127" dirty="0">
                 <a:solidFill>
                   <a:srgbClr val="FD7EF5"/>
                 </a:solidFill>
@@ -9008,11 +8759,11 @@
           </a:bodyPr>
           <a:lstStyle/>
           <a:p>
-            <a:pPr algn="l" indent="0" marL="0">
-              <a:buNone/>
-            </a:pPr>
-            <a:r>
-              <a:rPr lang="en-US" sz="1275" spc="127" kern="0" dirty="0">
+            <a:pPr marL="0" indent="0" algn="l">
+              <a:buNone/>
+            </a:pPr>
+            <a:r>
+              <a:rPr lang="en-US" sz="1275" kern="0" spc="127" dirty="0">
                 <a:solidFill>
                   <a:srgbClr val="36CDFF"/>
                 </a:solidFill>
@@ -9049,11 +8800,11 @@
           </a:bodyPr>
           <a:lstStyle/>
           <a:p>
-            <a:pPr algn="l" indent="0" marL="0">
-              <a:buNone/>
-            </a:pPr>
-            <a:r>
-              <a:rPr lang="en-US" sz="1275" spc="127" kern="0" dirty="0">
+            <a:pPr marL="0" indent="0" algn="l">
+              <a:buNone/>
+            </a:pPr>
+            <a:r>
+              <a:rPr lang="en-US" sz="1275" kern="0" spc="127" dirty="0">
                 <a:solidFill>
                   <a:srgbClr val="969696"/>
                 </a:solidFill>
@@ -9088,6 +8839,13 @@
           </a:solidFill>
           <a:ln/>
         </p:spPr>
+        <p:txBody>
+          <a:bodyPr/>
+          <a:lstStyle/>
+          <a:p>
+            <a:endParaRPr lang="en-US"/>
+          </a:p>
+        </p:txBody>
       </p:sp>
       <p:sp>
         <p:nvSpPr>
@@ -9112,7 +8870,7 @@
           </a:bodyPr>
           <a:lstStyle/>
           <a:p>
-            <a:pPr algn="l" indent="0" marL="0">
+            <a:pPr marL="0" indent="0" algn="l">
               <a:lnSpc>
                 <a:spcPct val="118800"/>
               </a:lnSpc>
@@ -9154,6 +8912,13 @@
           </a:solidFill>
           <a:ln/>
         </p:spPr>
+        <p:txBody>
+          <a:bodyPr/>
+          <a:lstStyle/>
+          <a:p>
+            <a:endParaRPr lang="en-US"/>
+          </a:p>
+        </p:txBody>
       </p:sp>
       <p:sp>
         <p:nvSpPr>
@@ -9178,7 +8943,7 @@
           </a:bodyPr>
           <a:lstStyle/>
           <a:p>
-            <a:pPr algn="l" indent="0" marL="0">
+            <a:pPr marL="0" indent="0" algn="l">
               <a:lnSpc>
                 <a:spcPct val="118800"/>
               </a:lnSpc>
@@ -9220,6 +8985,13 @@
           </a:solidFill>
           <a:ln/>
         </p:spPr>
+        <p:txBody>
+          <a:bodyPr/>
+          <a:lstStyle/>
+          <a:p>
+            <a:endParaRPr lang="en-US"/>
+          </a:p>
+        </p:txBody>
       </p:sp>
       <p:sp>
         <p:nvSpPr>
@@ -9244,7 +9016,7 @@
           </a:bodyPr>
           <a:lstStyle/>
           <a:p>
-            <a:pPr algn="l" indent="0" marL="0">
+            <a:pPr marL="0" indent="0" algn="l">
               <a:lnSpc>
                 <a:spcPct val="118800"/>
               </a:lnSpc>
@@ -9286,6 +9058,13 @@
           </a:solidFill>
           <a:ln/>
         </p:spPr>
+        <p:txBody>
+          <a:bodyPr/>
+          <a:lstStyle/>
+          <a:p>
+            <a:endParaRPr lang="en-US"/>
+          </a:p>
+        </p:txBody>
       </p:sp>
       <p:sp>
         <p:nvSpPr>
@@ -9310,7 +9089,7 @@
           </a:bodyPr>
           <a:lstStyle/>
           <a:p>
-            <a:pPr algn="l" indent="0" marL="0">
+            <a:pPr marL="0" indent="0" algn="l">
               <a:lnSpc>
                 <a:spcPct val="118800"/>
               </a:lnSpc>
@@ -9352,6 +9131,13 @@
           </a:solidFill>
           <a:ln/>
         </p:spPr>
+        <p:txBody>
+          <a:bodyPr/>
+          <a:lstStyle/>
+          <a:p>
+            <a:endParaRPr lang="en-US"/>
+          </a:p>
+        </p:txBody>
       </p:sp>
       <p:sp>
         <p:nvSpPr>
@@ -9376,7 +9162,7 @@
           </a:bodyPr>
           <a:lstStyle/>
           <a:p>
-            <a:pPr algn="l" indent="0" marL="0">
+            <a:pPr marL="0" indent="0" algn="l">
               <a:lnSpc>
                 <a:spcPct val="118800"/>
               </a:lnSpc>
@@ -9418,6 +9204,13 @@
           </a:solidFill>
           <a:ln/>
         </p:spPr>
+        <p:txBody>
+          <a:bodyPr/>
+          <a:lstStyle/>
+          <a:p>
+            <a:endParaRPr lang="en-US"/>
+          </a:p>
+        </p:txBody>
       </p:sp>
       <p:sp>
         <p:nvSpPr>
@@ -9442,7 +9235,7 @@
           </a:bodyPr>
           <a:lstStyle/>
           <a:p>
-            <a:pPr algn="l" indent="0" marL="0">
+            <a:pPr marL="0" indent="0" algn="l">
               <a:lnSpc>
                 <a:spcPct val="118800"/>
               </a:lnSpc>
@@ -9484,6 +9277,13 @@
           </a:solidFill>
           <a:ln/>
         </p:spPr>
+        <p:txBody>
+          <a:bodyPr/>
+          <a:lstStyle/>
+          <a:p>
+            <a:endParaRPr lang="en-US"/>
+          </a:p>
+        </p:txBody>
       </p:sp>
       <p:sp>
         <p:nvSpPr>
@@ -9508,7 +9308,7 @@
           </a:bodyPr>
           <a:lstStyle/>
           <a:p>
-            <a:pPr algn="l" indent="0" marL="0">
+            <a:pPr marL="0" indent="0" algn="l">
               <a:lnSpc>
                 <a:spcPct val="118800"/>
               </a:lnSpc>
@@ -9525,12 +9325,6 @@
               </a:rPr>
               <a:t>HTML-escape </a:t>
             </a:r>
-            <a:pPr algn="l" indent="0" marL="0">
-              <a:lnSpc>
-                <a:spcPct val="118800"/>
-              </a:lnSpc>
-              <a:buNone/>
-            </a:pPr>
             <a:r>
               <a:rPr lang="en-US" sz="1650" b="1" dirty="0">
                 <a:solidFill>
@@ -9542,12 +9336,6 @@
               </a:rPr>
               <a:t>+ </a:t>
             </a:r>
-            <a:pPr algn="l" indent="0" marL="0">
-              <a:lnSpc>
-                <a:spcPct val="118800"/>
-              </a:lnSpc>
-              <a:buNone/>
-            </a:pPr>
             <a:r>
               <a:rPr lang="en-US" sz="1650" dirty="0">
                 <a:solidFill>
@@ -9584,6 +9372,13 @@
           </a:solidFill>
           <a:ln/>
         </p:spPr>
+        <p:txBody>
+          <a:bodyPr/>
+          <a:lstStyle/>
+          <a:p>
+            <a:endParaRPr lang="en-US"/>
+          </a:p>
+        </p:txBody>
       </p:sp>
       <p:sp>
         <p:nvSpPr>
@@ -9608,7 +9403,7 @@
           </a:bodyPr>
           <a:lstStyle/>
           <a:p>
-            <a:pPr algn="l" indent="0" marL="0">
+            <a:pPr marL="0" indent="0" algn="l">
               <a:lnSpc>
                 <a:spcPct val="118800"/>
               </a:lnSpc>
@@ -9650,6 +9445,13 @@
           </a:solidFill>
           <a:ln/>
         </p:spPr>
+        <p:txBody>
+          <a:bodyPr/>
+          <a:lstStyle/>
+          <a:p>
+            <a:endParaRPr lang="en-US"/>
+          </a:p>
+        </p:txBody>
       </p:sp>
       <p:sp>
         <p:nvSpPr>
@@ -9674,7 +9476,7 @@
           </a:bodyPr>
           <a:lstStyle/>
           <a:p>
-            <a:pPr algn="l" indent="0" marL="0">
+            <a:pPr marL="0" indent="0" algn="l">
               <a:lnSpc>
                 <a:spcPct val="118800"/>
               </a:lnSpc>
@@ -9716,6 +9518,13 @@
           </a:solidFill>
           <a:ln/>
         </p:spPr>
+        <p:txBody>
+          <a:bodyPr/>
+          <a:lstStyle/>
+          <a:p>
+            <a:endParaRPr lang="en-US"/>
+          </a:p>
+        </p:txBody>
       </p:sp>
       <p:sp>
         <p:nvSpPr>
@@ -9740,7 +9549,7 @@
           </a:bodyPr>
           <a:lstStyle/>
           <a:p>
-            <a:pPr algn="l" indent="0" marL="0">
+            <a:pPr marL="0" indent="0" algn="l">
               <a:lnSpc>
                 <a:spcPct val="118800"/>
               </a:lnSpc>
@@ -9782,6 +9591,13 @@
           </a:solidFill>
           <a:ln/>
         </p:spPr>
+        <p:txBody>
+          <a:bodyPr/>
+          <a:lstStyle/>
+          <a:p>
+            <a:endParaRPr lang="en-US"/>
+          </a:p>
+        </p:txBody>
       </p:sp>
       <p:sp>
         <p:nvSpPr>
@@ -9806,7 +9622,7 @@
           </a:bodyPr>
           <a:lstStyle/>
           <a:p>
-            <a:pPr algn="l" indent="0" marL="0">
+            <a:pPr marL="0" indent="0" algn="l">
               <a:lnSpc>
                 <a:spcPct val="118800"/>
               </a:lnSpc>
@@ -9848,6 +9664,13 @@
           </a:solidFill>
           <a:ln/>
         </p:spPr>
+        <p:txBody>
+          <a:bodyPr/>
+          <a:lstStyle/>
+          <a:p>
+            <a:endParaRPr lang="en-US"/>
+          </a:p>
+        </p:txBody>
       </p:sp>
       <p:sp>
         <p:nvSpPr>
@@ -9872,7 +9695,7 @@
           </a:bodyPr>
           <a:lstStyle/>
           <a:p>
-            <a:pPr algn="l" indent="0" marL="0">
+            <a:pPr marL="0" indent="0" algn="l">
               <a:lnSpc>
                 <a:spcPct val="118800"/>
               </a:lnSpc>
@@ -9914,6 +9737,13 @@
           </a:solidFill>
           <a:ln/>
         </p:spPr>
+        <p:txBody>
+          <a:bodyPr/>
+          <a:lstStyle/>
+          <a:p>
+            <a:endParaRPr lang="en-US"/>
+          </a:p>
+        </p:txBody>
       </p:sp>
       <p:sp>
         <p:nvSpPr>
@@ -9938,7 +9768,7 @@
           </a:bodyPr>
           <a:lstStyle/>
           <a:p>
-            <a:pPr algn="l" indent="0" marL="0">
+            <a:pPr marL="0" indent="0" algn="l">
               <a:lnSpc>
                 <a:spcPct val="118800"/>
               </a:lnSpc>
@@ -9980,6 +9810,13 @@
           </a:solidFill>
           <a:ln/>
         </p:spPr>
+        <p:txBody>
+          <a:bodyPr/>
+          <a:lstStyle/>
+          <a:p>
+            <a:endParaRPr lang="en-US"/>
+          </a:p>
+        </p:txBody>
       </p:sp>
       <p:sp>
         <p:nvSpPr>
@@ -10004,7 +9841,7 @@
           </a:bodyPr>
           <a:lstStyle/>
           <a:p>
-            <a:pPr algn="l" indent="0" marL="0">
+            <a:pPr marL="0" indent="0" algn="l">
               <a:lnSpc>
                 <a:spcPct val="118800"/>
               </a:lnSpc>
@@ -10046,6 +9883,13 @@
           </a:solidFill>
           <a:ln/>
         </p:spPr>
+        <p:txBody>
+          <a:bodyPr/>
+          <a:lstStyle/>
+          <a:p>
+            <a:endParaRPr lang="en-US"/>
+          </a:p>
+        </p:txBody>
       </p:sp>
       <p:sp>
         <p:nvSpPr>
@@ -10070,7 +9914,7 @@
           </a:bodyPr>
           <a:lstStyle/>
           <a:p>
-            <a:pPr algn="l" indent="0" marL="0">
+            <a:pPr marL="0" indent="0" algn="l">
               <a:lnSpc>
                 <a:spcPct val="118800"/>
               </a:lnSpc>
@@ -10112,6 +9956,13 @@
           </a:solidFill>
           <a:ln/>
         </p:spPr>
+        <p:txBody>
+          <a:bodyPr/>
+          <a:lstStyle/>
+          <a:p>
+            <a:endParaRPr lang="en-US"/>
+          </a:p>
+        </p:txBody>
       </p:sp>
       <p:sp>
         <p:nvSpPr>
@@ -10136,7 +9987,7 @@
           </a:bodyPr>
           <a:lstStyle/>
           <a:p>
-            <a:pPr algn="l" indent="0" marL="0">
+            <a:pPr marL="0" indent="0" algn="l">
               <a:lnSpc>
                 <a:spcPct val="118800"/>
               </a:lnSpc>
@@ -10159,14 +10010,14 @@
       </p:sp>
       <p:pic>
         <p:nvPicPr>
-          <p:cNvPr id="41" name="Image 0" descr="preencoded.png">    </p:cNvPr>
+          <p:cNvPr id="41" name="Image 0" descr="preencoded.png"/>
           <p:cNvPicPr>
             <a:picLocks noChangeAspect="1"/>
           </p:cNvPicPr>
           <p:nvPr/>
         </p:nvPicPr>
         <p:blipFill>
-          <a:blip r:embed="rId1"/>
+          <a:blip r:embed="rId3"/>
           <a:stretch>
             <a:fillRect/>
           </a:stretch>
@@ -10204,11 +10055,11 @@
           </a:bodyPr>
           <a:lstStyle/>
           <a:p>
-            <a:pPr algn="l" indent="0" marL="0">
-              <a:buNone/>
-            </a:pPr>
-            <a:r>
-              <a:rPr lang="en-US" sz="1200" spc="264" kern="0" dirty="0">
+            <a:pPr marL="0" indent="0" algn="l">
+              <a:buNone/>
+            </a:pPr>
+            <a:r>
+              <a:rPr lang="en-US" sz="1200" kern="0" spc="264" dirty="0">
                 <a:solidFill>
                   <a:srgbClr val="969696"/>
                 </a:solidFill>
@@ -10238,6 +10089,7 @@
         <a:solidFill>
           <a:srgbClr val="000000"/>
         </a:solidFill>
+        <a:effectLst/>
       </p:bgPr>
     </p:bg>
     <p:spTree>
@@ -10277,11 +10129,11 @@
           </a:bodyPr>
           <a:lstStyle/>
           <a:p>
-            <a:pPr algn="l" indent="0" marL="0">
-              <a:buNone/>
-            </a:pPr>
-            <a:r>
-              <a:rPr lang="en-US" sz="1500" spc="450" kern="0" dirty="0">
+            <a:pPr marL="0" indent="0" algn="l">
+              <a:buNone/>
+            </a:pPr>
+            <a:r>
+              <a:rPr lang="en-US" sz="1500" kern="0" spc="450" dirty="0">
                 <a:solidFill>
                   <a:srgbClr val="36CDFF"/>
                 </a:solidFill>
@@ -10318,7 +10170,7 @@
           </a:bodyPr>
           <a:lstStyle/>
           <a:p>
-            <a:pPr algn="l" indent="0" marL="0">
+            <a:pPr marL="0" indent="0" algn="l">
               <a:lnSpc>
                 <a:spcPct val="78171"/>
               </a:lnSpc>
@@ -10360,6 +10212,13 @@
           </a:solidFill>
           <a:ln/>
         </p:spPr>
+        <p:txBody>
+          <a:bodyPr/>
+          <a:lstStyle/>
+          <a:p>
+            <a:endParaRPr lang="en-US"/>
+          </a:p>
+        </p:txBody>
       </p:sp>
       <p:sp>
         <p:nvSpPr>
@@ -10384,11 +10243,11 @@
           </a:bodyPr>
           <a:lstStyle/>
           <a:p>
-            <a:pPr algn="l" indent="0" marL="0">
-              <a:buNone/>
-            </a:pPr>
-            <a:r>
-              <a:rPr lang="en-US" sz="1275" spc="127" kern="0" dirty="0">
+            <a:pPr marL="0" indent="0" algn="l">
+              <a:buNone/>
+            </a:pPr>
+            <a:r>
+              <a:rPr lang="en-US" sz="1275" kern="0" spc="127" dirty="0">
                 <a:solidFill>
                   <a:srgbClr val="FD7EF5"/>
                 </a:solidFill>
@@ -10425,11 +10284,11 @@
           </a:bodyPr>
           <a:lstStyle/>
           <a:p>
-            <a:pPr algn="l" indent="0" marL="0">
-              <a:buNone/>
-            </a:pPr>
-            <a:r>
-              <a:rPr lang="en-US" sz="1275" spc="127" kern="0" dirty="0">
+            <a:pPr marL="0" indent="0" algn="l">
+              <a:buNone/>
+            </a:pPr>
+            <a:r>
+              <a:rPr lang="en-US" sz="1275" kern="0" spc="127" dirty="0">
                 <a:solidFill>
                   <a:srgbClr val="FD7EF5"/>
                 </a:solidFill>
@@ -10466,11 +10325,11 @@
           </a:bodyPr>
           <a:lstStyle/>
           <a:p>
-            <a:pPr algn="l" indent="0" marL="0">
-              <a:buNone/>
-            </a:pPr>
-            <a:r>
-              <a:rPr lang="en-US" sz="1275" spc="127" kern="0" dirty="0">
+            <a:pPr marL="0" indent="0" algn="l">
+              <a:buNone/>
+            </a:pPr>
+            <a:r>
+              <a:rPr lang="en-US" sz="1275" kern="0" spc="127" dirty="0">
                 <a:solidFill>
                   <a:srgbClr val="36CDFF"/>
                 </a:solidFill>
@@ -10507,11 +10366,11 @@
           </a:bodyPr>
           <a:lstStyle/>
           <a:p>
-            <a:pPr algn="l" indent="0" marL="0">
-              <a:buNone/>
-            </a:pPr>
-            <a:r>
-              <a:rPr lang="en-US" sz="1275" spc="127" kern="0" dirty="0">
+            <a:pPr marL="0" indent="0" algn="l">
+              <a:buNone/>
+            </a:pPr>
+            <a:r>
+              <a:rPr lang="en-US" sz="1275" kern="0" spc="127" dirty="0">
                 <a:solidFill>
                   <a:srgbClr val="969696"/>
                 </a:solidFill>
@@ -10546,6 +10405,13 @@
           </a:solidFill>
           <a:ln/>
         </p:spPr>
+        <p:txBody>
+          <a:bodyPr/>
+          <a:lstStyle/>
+          <a:p>
+            <a:endParaRPr lang="en-US"/>
+          </a:p>
+        </p:txBody>
       </p:sp>
       <p:sp>
         <p:nvSpPr>
@@ -10570,7 +10436,7 @@
           </a:bodyPr>
           <a:lstStyle/>
           <a:p>
-            <a:pPr algn="l" indent="0" marL="0">
+            <a:pPr marL="0" indent="0" algn="l">
               <a:lnSpc>
                 <a:spcPct val="118800"/>
               </a:lnSpc>
@@ -10612,6 +10478,13 @@
           </a:solidFill>
           <a:ln/>
         </p:spPr>
+        <p:txBody>
+          <a:bodyPr/>
+          <a:lstStyle/>
+          <a:p>
+            <a:endParaRPr lang="en-US"/>
+          </a:p>
+        </p:txBody>
       </p:sp>
       <p:sp>
         <p:nvSpPr>
@@ -10636,7 +10509,7 @@
           </a:bodyPr>
           <a:lstStyle/>
           <a:p>
-            <a:pPr algn="l" indent="0" marL="0">
+            <a:pPr marL="0" indent="0" algn="l">
               <a:lnSpc>
                 <a:spcPct val="118800"/>
               </a:lnSpc>
@@ -10678,6 +10551,13 @@
           </a:solidFill>
           <a:ln/>
         </p:spPr>
+        <p:txBody>
+          <a:bodyPr/>
+          <a:lstStyle/>
+          <a:p>
+            <a:endParaRPr lang="en-US"/>
+          </a:p>
+        </p:txBody>
       </p:sp>
       <p:sp>
         <p:nvSpPr>
@@ -10702,7 +10582,7 @@
           </a:bodyPr>
           <a:lstStyle/>
           <a:p>
-            <a:pPr algn="l" indent="0" marL="0">
+            <a:pPr marL="0" indent="0" algn="l">
               <a:lnSpc>
                 <a:spcPct val="118800"/>
               </a:lnSpc>
@@ -10744,6 +10624,13 @@
           </a:solidFill>
           <a:ln/>
         </p:spPr>
+        <p:txBody>
+          <a:bodyPr/>
+          <a:lstStyle/>
+          <a:p>
+            <a:endParaRPr lang="en-US"/>
+          </a:p>
+        </p:txBody>
       </p:sp>
       <p:sp>
         <p:nvSpPr>
@@ -10768,7 +10655,7 @@
           </a:bodyPr>
           <a:lstStyle/>
           <a:p>
-            <a:pPr algn="l" indent="0" marL="0">
+            <a:pPr marL="0" indent="0" algn="l">
               <a:lnSpc>
                 <a:spcPct val="118800"/>
               </a:lnSpc>
@@ -10810,6 +10697,13 @@
           </a:solidFill>
           <a:ln/>
         </p:spPr>
+        <p:txBody>
+          <a:bodyPr/>
+          <a:lstStyle/>
+          <a:p>
+            <a:endParaRPr lang="en-US"/>
+          </a:p>
+        </p:txBody>
       </p:sp>
       <p:sp>
         <p:nvSpPr>
@@ -10834,7 +10728,7 @@
           </a:bodyPr>
           <a:lstStyle/>
           <a:p>
-            <a:pPr algn="l" indent="0" marL="0">
+            <a:pPr marL="0" indent="0" algn="l">
               <a:lnSpc>
                 <a:spcPct val="118800"/>
               </a:lnSpc>
@@ -10876,6 +10770,13 @@
           </a:solidFill>
           <a:ln/>
         </p:spPr>
+        <p:txBody>
+          <a:bodyPr/>
+          <a:lstStyle/>
+          <a:p>
+            <a:endParaRPr lang="en-US"/>
+          </a:p>
+        </p:txBody>
       </p:sp>
       <p:sp>
         <p:nvSpPr>
@@ -10900,7 +10801,7 @@
           </a:bodyPr>
           <a:lstStyle/>
           <a:p>
-            <a:pPr algn="l" indent="0" marL="0">
+            <a:pPr marL="0" indent="0" algn="l">
               <a:lnSpc>
                 <a:spcPct val="118800"/>
               </a:lnSpc>
@@ -10942,6 +10843,13 @@
           </a:solidFill>
           <a:ln/>
         </p:spPr>
+        <p:txBody>
+          <a:bodyPr/>
+          <a:lstStyle/>
+          <a:p>
+            <a:endParaRPr lang="en-US"/>
+          </a:p>
+        </p:txBody>
       </p:sp>
       <p:sp>
         <p:nvSpPr>
@@ -10966,7 +10874,7 @@
           </a:bodyPr>
           <a:lstStyle/>
           <a:p>
-            <a:pPr algn="l" indent="0" marL="0">
+            <a:pPr marL="0" indent="0" algn="l">
               <a:lnSpc>
                 <a:spcPct val="118800"/>
               </a:lnSpc>
@@ -11008,6 +10916,13 @@
           </a:solidFill>
           <a:ln/>
         </p:spPr>
+        <p:txBody>
+          <a:bodyPr/>
+          <a:lstStyle/>
+          <a:p>
+            <a:endParaRPr lang="en-US"/>
+          </a:p>
+        </p:txBody>
       </p:sp>
       <p:sp>
         <p:nvSpPr>
@@ -11032,7 +10947,7 @@
           </a:bodyPr>
           <a:lstStyle/>
           <a:p>
-            <a:pPr algn="l" indent="0" marL="0">
+            <a:pPr marL="0" indent="0" algn="l">
               <a:lnSpc>
                 <a:spcPct val="118800"/>
               </a:lnSpc>
@@ -11074,6 +10989,13 @@
           </a:solidFill>
           <a:ln/>
         </p:spPr>
+        <p:txBody>
+          <a:bodyPr/>
+          <a:lstStyle/>
+          <a:p>
+            <a:endParaRPr lang="en-US"/>
+          </a:p>
+        </p:txBody>
       </p:sp>
       <p:sp>
         <p:nvSpPr>
@@ -11098,7 +11020,7 @@
           </a:bodyPr>
           <a:lstStyle/>
           <a:p>
-            <a:pPr algn="l" indent="0" marL="0">
+            <a:pPr marL="0" indent="0" algn="l">
               <a:lnSpc>
                 <a:spcPct val="118800"/>
               </a:lnSpc>
@@ -11140,6 +11062,13 @@
           </a:solidFill>
           <a:ln/>
         </p:spPr>
+        <p:txBody>
+          <a:bodyPr/>
+          <a:lstStyle/>
+          <a:p>
+            <a:endParaRPr lang="en-US"/>
+          </a:p>
+        </p:txBody>
       </p:sp>
       <p:sp>
         <p:nvSpPr>
@@ -11164,7 +11093,7 @@
           </a:bodyPr>
           <a:lstStyle/>
           <a:p>
-            <a:pPr algn="l" indent="0" marL="0">
+            <a:pPr marL="0" indent="0" algn="l">
               <a:lnSpc>
                 <a:spcPct val="118800"/>
               </a:lnSpc>
@@ -11181,12 +11110,6 @@
               </a:rPr>
               <a:t>Injection </a:t>
             </a:r>
-            <a:pPr algn="l" indent="0" marL="0">
-              <a:lnSpc>
-                <a:spcPct val="118800"/>
-              </a:lnSpc>
-              <a:buNone/>
-            </a:pPr>
             <a:r>
               <a:rPr lang="en-US" sz="1650" b="1" dirty="0">
                 <a:solidFill>
@@ -11198,12 +11121,6 @@
               </a:rPr>
               <a:t>propagates </a:t>
             </a:r>
-            <a:pPr algn="l" indent="0" marL="0">
-              <a:lnSpc>
-                <a:spcPct val="118800"/>
-              </a:lnSpc>
-              <a:buNone/>
-            </a:pPr>
             <a:r>
               <a:rPr lang="en-US" sz="1650" dirty="0">
                 <a:solidFill>
@@ -11240,6 +11157,13 @@
           </a:solidFill>
           <a:ln/>
         </p:spPr>
+        <p:txBody>
+          <a:bodyPr/>
+          <a:lstStyle/>
+          <a:p>
+            <a:endParaRPr lang="en-US"/>
+          </a:p>
+        </p:txBody>
       </p:sp>
       <p:sp>
         <p:nvSpPr>
@@ -11264,7 +11188,7 @@
           </a:bodyPr>
           <a:lstStyle/>
           <a:p>
-            <a:pPr algn="l" indent="0" marL="0">
+            <a:pPr marL="0" indent="0" algn="l">
               <a:lnSpc>
                 <a:spcPct val="118800"/>
               </a:lnSpc>
@@ -11306,6 +11230,13 @@
           </a:solidFill>
           <a:ln/>
         </p:spPr>
+        <p:txBody>
+          <a:bodyPr/>
+          <a:lstStyle/>
+          <a:p>
+            <a:endParaRPr lang="en-US"/>
+          </a:p>
+        </p:txBody>
       </p:sp>
       <p:sp>
         <p:nvSpPr>
@@ -11330,7 +11261,7 @@
           </a:bodyPr>
           <a:lstStyle/>
           <a:p>
-            <a:pPr algn="l" indent="0" marL="0">
+            <a:pPr marL="0" indent="0" algn="l">
               <a:lnSpc>
                 <a:spcPct val="118800"/>
               </a:lnSpc>
@@ -11372,6 +11303,13 @@
           </a:solidFill>
           <a:ln/>
         </p:spPr>
+        <p:txBody>
+          <a:bodyPr/>
+          <a:lstStyle/>
+          <a:p>
+            <a:endParaRPr lang="en-US"/>
+          </a:p>
+        </p:txBody>
       </p:sp>
       <p:sp>
         <p:nvSpPr>
@@ -11396,7 +11334,7 @@
           </a:bodyPr>
           <a:lstStyle/>
           <a:p>
-            <a:pPr algn="l" indent="0" marL="0">
+            <a:pPr marL="0" indent="0" algn="l">
               <a:lnSpc>
                 <a:spcPct val="118800"/>
               </a:lnSpc>
@@ -11438,6 +11376,13 @@
           </a:solidFill>
           <a:ln/>
         </p:spPr>
+        <p:txBody>
+          <a:bodyPr/>
+          <a:lstStyle/>
+          <a:p>
+            <a:endParaRPr lang="en-US"/>
+          </a:p>
+        </p:txBody>
       </p:sp>
       <p:sp>
         <p:nvSpPr>
@@ -11462,7 +11407,7 @@
           </a:bodyPr>
           <a:lstStyle/>
           <a:p>
-            <a:pPr algn="l" indent="0" marL="0">
+            <a:pPr marL="0" indent="0" algn="l">
               <a:lnSpc>
                 <a:spcPct val="118800"/>
               </a:lnSpc>
@@ -11504,6 +11449,13 @@
           </a:solidFill>
           <a:ln/>
         </p:spPr>
+        <p:txBody>
+          <a:bodyPr/>
+          <a:lstStyle/>
+          <a:p>
+            <a:endParaRPr lang="en-US"/>
+          </a:p>
+        </p:txBody>
       </p:sp>
       <p:sp>
         <p:nvSpPr>
@@ -11528,7 +11480,7 @@
           </a:bodyPr>
           <a:lstStyle/>
           <a:p>
-            <a:pPr algn="l" indent="0" marL="0">
+            <a:pPr marL="0" indent="0" algn="l">
               <a:lnSpc>
                 <a:spcPct val="118800"/>
               </a:lnSpc>
@@ -11545,12 +11497,6 @@
               </a:rPr>
               <a:t>Canonicalize input </a:t>
             </a:r>
-            <a:pPr algn="l" indent="0" marL="0">
-              <a:lnSpc>
-                <a:spcPct val="118800"/>
-              </a:lnSpc>
-              <a:buNone/>
-            </a:pPr>
             <a:r>
               <a:rPr lang="en-US" sz="1650" b="1" dirty="0">
                 <a:solidFill>
@@ -11562,12 +11508,6 @@
               </a:rPr>
               <a:t>before </a:t>
             </a:r>
-            <a:pPr algn="l" indent="0" marL="0">
-              <a:lnSpc>
-                <a:spcPct val="118800"/>
-              </a:lnSpc>
-              <a:buNone/>
-            </a:pPr>
             <a:r>
               <a:rPr lang="en-US" sz="1650" dirty="0">
                 <a:solidFill>
@@ -11604,6 +11544,13 @@
           </a:solidFill>
           <a:ln/>
         </p:spPr>
+        <p:txBody>
+          <a:bodyPr/>
+          <a:lstStyle/>
+          <a:p>
+            <a:endParaRPr lang="en-US"/>
+          </a:p>
+        </p:txBody>
       </p:sp>
       <p:sp>
         <p:nvSpPr>
@@ -11628,7 +11575,7 @@
           </a:bodyPr>
           <a:lstStyle/>
           <a:p>
-            <a:pPr algn="l" indent="0" marL="0">
+            <a:pPr marL="0" indent="0" algn="l">
               <a:lnSpc>
                 <a:spcPct val="118800"/>
               </a:lnSpc>
@@ -11651,14 +11598,14 @@
       </p:sp>
       <p:pic>
         <p:nvPicPr>
-          <p:cNvPr id="41" name="Image 0" descr="preencoded.png">    </p:cNvPr>
+          <p:cNvPr id="41" name="Image 0" descr="preencoded.png"/>
           <p:cNvPicPr>
             <a:picLocks noChangeAspect="1"/>
           </p:cNvPicPr>
           <p:nvPr/>
         </p:nvPicPr>
         <p:blipFill>
-          <a:blip r:embed="rId1"/>
+          <a:blip r:embed="rId3"/>
           <a:stretch>
             <a:fillRect/>
           </a:stretch>
@@ -11696,11 +11643,11 @@
           </a:bodyPr>
           <a:lstStyle/>
           <a:p>
-            <a:pPr algn="l" indent="0" marL="0">
-              <a:buNone/>
-            </a:pPr>
-            <a:r>
-              <a:rPr lang="en-US" sz="1200" spc="264" kern="0" dirty="0">
+            <a:pPr marL="0" indent="0" algn="l">
+              <a:buNone/>
+            </a:pPr>
+            <a:r>
+              <a:rPr lang="en-US" sz="1200" kern="0" spc="264" dirty="0">
                 <a:solidFill>
                   <a:srgbClr val="969696"/>
                 </a:solidFill>
@@ -11730,6 +11677,7 @@
         <a:solidFill>
           <a:srgbClr val="000000"/>
         </a:solidFill>
+        <a:effectLst/>
       </p:bgPr>
     </p:bg>
     <p:spTree>
@@ -11769,11 +11717,11 @@
           </a:bodyPr>
           <a:lstStyle/>
           <a:p>
-            <a:pPr algn="l" indent="0" marL="0">
-              <a:buNone/>
-            </a:pPr>
-            <a:r>
-              <a:rPr lang="en-US" sz="1500" spc="450" kern="0" dirty="0">
+            <a:pPr marL="0" indent="0" algn="l">
+              <a:buNone/>
+            </a:pPr>
+            <a:r>
+              <a:rPr lang="en-US" sz="1500" kern="0" spc="450" dirty="0">
                 <a:solidFill>
                   <a:srgbClr val="36CDFF"/>
                 </a:solidFill>
@@ -11810,7 +11758,7 @@
           </a:bodyPr>
           <a:lstStyle/>
           <a:p>
-            <a:pPr algn="l" indent="0" marL="0">
+            <a:pPr marL="0" indent="0" algn="l">
               <a:lnSpc>
                 <a:spcPct val="78072"/>
               </a:lnSpc>
@@ -11852,6 +11800,13 @@
           </a:solidFill>
           <a:ln/>
         </p:spPr>
+        <p:txBody>
+          <a:bodyPr/>
+          <a:lstStyle/>
+          <a:p>
+            <a:endParaRPr lang="en-US"/>
+          </a:p>
+        </p:txBody>
       </p:sp>
       <p:sp>
         <p:nvSpPr>
@@ -11876,11 +11831,11 @@
           </a:bodyPr>
           <a:lstStyle/>
           <a:p>
-            <a:pPr algn="l" indent="0" marL="0">
-              <a:buNone/>
-            </a:pPr>
-            <a:r>
-              <a:rPr lang="en-US" sz="1350" spc="135" kern="0" dirty="0">
+            <a:pPr marL="0" indent="0" algn="l">
+              <a:buNone/>
+            </a:pPr>
+            <a:r>
+              <a:rPr lang="en-US" sz="1350" kern="0" spc="135" dirty="0">
                 <a:solidFill>
                   <a:srgbClr val="36CDFF"/>
                 </a:solidFill>
@@ -11917,11 +11872,11 @@
           </a:bodyPr>
           <a:lstStyle/>
           <a:p>
-            <a:pPr algn="l" indent="0" marL="0">
-              <a:buNone/>
-            </a:pPr>
-            <a:r>
-              <a:rPr lang="en-US" sz="1350" spc="135" kern="0" dirty="0">
+            <a:pPr marL="0" indent="0" algn="l">
+              <a:buNone/>
+            </a:pPr>
+            <a:r>
+              <a:rPr lang="en-US" sz="1350" kern="0" spc="135" dirty="0">
                 <a:solidFill>
                   <a:srgbClr val="FD7EF5"/>
                 </a:solidFill>
@@ -11956,6 +11911,13 @@
           </a:solidFill>
           <a:ln/>
         </p:spPr>
+        <p:txBody>
+          <a:bodyPr/>
+          <a:lstStyle/>
+          <a:p>
+            <a:endParaRPr lang="en-US"/>
+          </a:p>
+        </p:txBody>
       </p:sp>
       <p:sp>
         <p:nvSpPr>
@@ -11980,7 +11942,7 @@
           </a:bodyPr>
           <a:lstStyle/>
           <a:p>
-            <a:pPr algn="l" indent="0" marL="0">
+            <a:pPr marL="0" indent="0" algn="l">
               <a:lnSpc>
                 <a:spcPct val="116379"/>
               </a:lnSpc>
@@ -12022,6 +11984,13 @@
           </a:solidFill>
           <a:ln/>
         </p:spPr>
+        <p:txBody>
+          <a:bodyPr/>
+          <a:lstStyle/>
+          <a:p>
+            <a:endParaRPr lang="en-US"/>
+          </a:p>
+        </p:txBody>
       </p:sp>
       <p:sp>
         <p:nvSpPr>
@@ -12046,7 +12015,7 @@
           </a:bodyPr>
           <a:lstStyle/>
           <a:p>
-            <a:pPr algn="l" indent="0" marL="0">
+            <a:pPr marL="0" indent="0" algn="l">
               <a:lnSpc>
                 <a:spcPct val="116379"/>
               </a:lnSpc>
@@ -12063,12 +12032,6 @@
               </a:rPr>
               <a:t>LLM01 </a:t>
             </a:r>
-            <a:pPr algn="l" indent="0" marL="0">
-              <a:lnSpc>
-                <a:spcPct val="116379"/>
-              </a:lnSpc>
-              <a:buNone/>
-            </a:pPr>
             <a:r>
               <a:rPr lang="en-US" sz="1875" dirty="0">
                 <a:solidFill>
@@ -12105,6 +12068,13 @@
           </a:solidFill>
           <a:ln/>
         </p:spPr>
+        <p:txBody>
+          <a:bodyPr/>
+          <a:lstStyle/>
+          <a:p>
+            <a:endParaRPr lang="en-US"/>
+          </a:p>
+        </p:txBody>
       </p:sp>
       <p:sp>
         <p:nvSpPr>
@@ -12129,7 +12099,7 @@
           </a:bodyPr>
           <a:lstStyle/>
           <a:p>
-            <a:pPr algn="l" indent="0" marL="0">
+            <a:pPr marL="0" indent="0" algn="l">
               <a:lnSpc>
                 <a:spcPct val="116379"/>
               </a:lnSpc>
@@ -12171,6 +12141,13 @@
           </a:solidFill>
           <a:ln/>
         </p:spPr>
+        <p:txBody>
+          <a:bodyPr/>
+          <a:lstStyle/>
+          <a:p>
+            <a:endParaRPr lang="en-US"/>
+          </a:p>
+        </p:txBody>
       </p:sp>
       <p:sp>
         <p:nvSpPr>
@@ -12195,7 +12172,7 @@
           </a:bodyPr>
           <a:lstStyle/>
           <a:p>
-            <a:pPr algn="l" indent="0" marL="0">
+            <a:pPr marL="0" indent="0" algn="l">
               <a:lnSpc>
                 <a:spcPct val="116379"/>
               </a:lnSpc>
@@ -12212,12 +12189,6 @@
               </a:rPr>
               <a:t>LLM05 </a:t>
             </a:r>
-            <a:pPr algn="l" indent="0" marL="0">
-              <a:lnSpc>
-                <a:spcPct val="116379"/>
-              </a:lnSpc>
-              <a:buNone/>
-            </a:pPr>
             <a:r>
               <a:rPr lang="en-US" sz="1875" dirty="0">
                 <a:solidFill>
@@ -12254,6 +12225,13 @@
           </a:solidFill>
           <a:ln/>
         </p:spPr>
+        <p:txBody>
+          <a:bodyPr/>
+          <a:lstStyle/>
+          <a:p>
+            <a:endParaRPr lang="en-US"/>
+          </a:p>
+        </p:txBody>
       </p:sp>
       <p:sp>
         <p:nvSpPr>
@@ -12278,7 +12256,7 @@
           </a:bodyPr>
           <a:lstStyle/>
           <a:p>
-            <a:pPr algn="l" indent="0" marL="0">
+            <a:pPr marL="0" indent="0" algn="l">
               <a:lnSpc>
                 <a:spcPct val="116379"/>
               </a:lnSpc>
@@ -12320,6 +12298,13 @@
           </a:solidFill>
           <a:ln/>
         </p:spPr>
+        <p:txBody>
+          <a:bodyPr/>
+          <a:lstStyle/>
+          <a:p>
+            <a:endParaRPr lang="en-US"/>
+          </a:p>
+        </p:txBody>
       </p:sp>
       <p:sp>
         <p:nvSpPr>
@@ -12344,7 +12329,7 @@
           </a:bodyPr>
           <a:lstStyle/>
           <a:p>
-            <a:pPr algn="l" indent="0" marL="0">
+            <a:pPr marL="0" indent="0" algn="l">
               <a:lnSpc>
                 <a:spcPct val="116379"/>
               </a:lnSpc>
@@ -12361,12 +12346,6 @@
               </a:rPr>
               <a:t>LLM08 </a:t>
             </a:r>
-            <a:pPr algn="l" indent="0" marL="0">
-              <a:lnSpc>
-                <a:spcPct val="116379"/>
-              </a:lnSpc>
-              <a:buNone/>
-            </a:pPr>
             <a:r>
               <a:rPr lang="en-US" sz="1875" dirty="0">
                 <a:solidFill>
@@ -12403,6 +12382,13 @@
           </a:solidFill>
           <a:ln/>
         </p:spPr>
+        <p:txBody>
+          <a:bodyPr/>
+          <a:lstStyle/>
+          <a:p>
+            <a:endParaRPr lang="en-US"/>
+          </a:p>
+        </p:txBody>
       </p:sp>
       <p:sp>
         <p:nvSpPr>
@@ -12427,7 +12413,7 @@
           </a:bodyPr>
           <a:lstStyle/>
           <a:p>
-            <a:pPr algn="l" indent="0" marL="0">
+            <a:pPr marL="0" indent="0" algn="l">
               <a:lnSpc>
                 <a:spcPct val="116379"/>
               </a:lnSpc>
@@ -12469,6 +12455,13 @@
           </a:solidFill>
           <a:ln/>
         </p:spPr>
+        <p:txBody>
+          <a:bodyPr/>
+          <a:lstStyle/>
+          <a:p>
+            <a:endParaRPr lang="en-US"/>
+          </a:p>
+        </p:txBody>
       </p:sp>
       <p:sp>
         <p:nvSpPr>
@@ -12493,7 +12486,7 @@
           </a:bodyPr>
           <a:lstStyle/>
           <a:p>
-            <a:pPr algn="l" indent="0" marL="0">
+            <a:pPr marL="0" indent="0" algn="l">
               <a:lnSpc>
                 <a:spcPct val="116379"/>
               </a:lnSpc>
@@ -12510,12 +12503,6 @@
               </a:rPr>
               <a:t>LLM04 </a:t>
             </a:r>
-            <a:pPr algn="l" indent="0" marL="0">
-              <a:lnSpc>
-                <a:spcPct val="116379"/>
-              </a:lnSpc>
-              <a:buNone/>
-            </a:pPr>
             <a:r>
               <a:rPr lang="en-US" sz="1875" dirty="0">
                 <a:solidFill>
@@ -12527,12 +12514,6 @@
               </a:rPr>
               <a:t>Data &amp; Model Poisoning + </a:t>
             </a:r>
-            <a:pPr algn="l" indent="0" marL="0">
-              <a:lnSpc>
-                <a:spcPct val="116379"/>
-              </a:lnSpc>
-              <a:buNone/>
-            </a:pPr>
             <a:r>
               <a:rPr lang="en-US" sz="1875" b="1" dirty="0">
                 <a:solidFill>
@@ -12544,12 +12525,6 @@
               </a:rPr>
               <a:t>LLM03 </a:t>
             </a:r>
-            <a:pPr algn="l" indent="0" marL="0">
-              <a:lnSpc>
-                <a:spcPct val="116379"/>
-              </a:lnSpc>
-              <a:buNone/>
-            </a:pPr>
             <a:r>
               <a:rPr lang="en-US" sz="1875" dirty="0">
                 <a:solidFill>
@@ -12586,6 +12561,13 @@
           </a:solidFill>
           <a:ln/>
         </p:spPr>
+        <p:txBody>
+          <a:bodyPr/>
+          <a:lstStyle/>
+          <a:p>
+            <a:endParaRPr lang="en-US"/>
+          </a:p>
+        </p:txBody>
       </p:sp>
       <p:sp>
         <p:nvSpPr>
@@ -12610,7 +12592,7 @@
           </a:bodyPr>
           <a:lstStyle/>
           <a:p>
-            <a:pPr algn="l" indent="0" marL="0">
+            <a:pPr marL="0" indent="0" algn="l">
               <a:lnSpc>
                 <a:spcPct val="116379"/>
               </a:lnSpc>
@@ -12652,6 +12634,13 @@
           </a:solidFill>
           <a:ln/>
         </p:spPr>
+        <p:txBody>
+          <a:bodyPr/>
+          <a:lstStyle/>
+          <a:p>
+            <a:endParaRPr lang="en-US"/>
+          </a:p>
+        </p:txBody>
       </p:sp>
       <p:sp>
         <p:nvSpPr>
@@ -12676,7 +12665,7 @@
           </a:bodyPr>
           <a:lstStyle/>
           <a:p>
-            <a:pPr algn="l" indent="0" marL="0">
+            <a:pPr marL="0" indent="0" algn="l">
               <a:lnSpc>
                 <a:spcPct val="116379"/>
               </a:lnSpc>
@@ -12693,12 +12682,6 @@
               </a:rPr>
               <a:t>LLM06 </a:t>
             </a:r>
-            <a:pPr algn="l" indent="0" marL="0">
-              <a:lnSpc>
-                <a:spcPct val="116379"/>
-              </a:lnSpc>
-              <a:buNone/>
-            </a:pPr>
             <a:r>
               <a:rPr lang="en-US" sz="1875" dirty="0">
                 <a:solidFill>
@@ -12735,6 +12718,13 @@
           </a:solidFill>
           <a:ln/>
         </p:spPr>
+        <p:txBody>
+          <a:bodyPr/>
+          <a:lstStyle/>
+          <a:p>
+            <a:endParaRPr lang="en-US"/>
+          </a:p>
+        </p:txBody>
       </p:sp>
       <p:sp>
         <p:nvSpPr>
@@ -12757,6 +12747,13 @@
           </a:solidFill>
           <a:ln/>
         </p:spPr>
+        <p:txBody>
+          <a:bodyPr/>
+          <a:lstStyle/>
+          <a:p>
+            <a:endParaRPr lang="en-US"/>
+          </a:p>
+        </p:txBody>
       </p:sp>
       <p:sp>
         <p:nvSpPr>
@@ -12781,7 +12778,7 @@
           </a:bodyPr>
           <a:lstStyle/>
           <a:p>
-            <a:pPr algn="l" indent="0" marL="0">
+            <a:pPr marL="0" indent="0" algn="l">
               <a:lnSpc>
                 <a:spcPct val="116379"/>
               </a:lnSpc>
@@ -12823,6 +12820,13 @@
           </a:solidFill>
           <a:ln/>
         </p:spPr>
+        <p:txBody>
+          <a:bodyPr/>
+          <a:lstStyle/>
+          <a:p>
+            <a:endParaRPr lang="en-US"/>
+          </a:p>
+        </p:txBody>
       </p:sp>
       <p:sp>
         <p:nvSpPr>
@@ -12845,6 +12849,13 @@
           </a:solidFill>
           <a:ln/>
         </p:spPr>
+        <p:txBody>
+          <a:bodyPr/>
+          <a:lstStyle/>
+          <a:p>
+            <a:endParaRPr lang="en-US"/>
+          </a:p>
+        </p:txBody>
       </p:sp>
       <p:sp>
         <p:nvSpPr>
@@ -12869,7 +12880,7 @@
           </a:bodyPr>
           <a:lstStyle/>
           <a:p>
-            <a:pPr algn="l" indent="0" marL="0">
+            <a:pPr marL="0" indent="0" algn="l">
               <a:lnSpc>
                 <a:spcPct val="116379"/>
               </a:lnSpc>
@@ -12886,12 +12897,6 @@
               </a:rPr>
               <a:t>LLM06 + LLM01 </a:t>
             </a:r>
-            <a:pPr algn="l" indent="0" marL="0">
-              <a:lnSpc>
-                <a:spcPct val="116379"/>
-              </a:lnSpc>
-              <a:buNone/>
-            </a:pPr>
             <a:r>
               <a:rPr lang="en-US" sz="1875" dirty="0">
                 <a:solidFill>
@@ -12931,6 +12936,13 @@
           </a:solidFill>
           <a:ln/>
         </p:spPr>
+        <p:txBody>
+          <a:bodyPr/>
+          <a:lstStyle/>
+          <a:p>
+            <a:endParaRPr lang="en-US"/>
+          </a:p>
+        </p:txBody>
       </p:sp>
       <p:sp>
         <p:nvSpPr>
@@ -12953,6 +12965,13 @@
           </a:solidFill>
           <a:ln/>
         </p:spPr>
+        <p:txBody>
+          <a:bodyPr/>
+          <a:lstStyle/>
+          <a:p>
+            <a:endParaRPr lang="en-US"/>
+          </a:p>
+        </p:txBody>
       </p:sp>
       <p:sp>
         <p:nvSpPr>
@@ -12977,7 +12996,7 @@
           </a:bodyPr>
           <a:lstStyle/>
           <a:p>
-            <a:pPr algn="l" indent="0" marL="0">
+            <a:pPr marL="0" indent="0" algn="l">
               <a:lnSpc>
                 <a:spcPct val="116379"/>
               </a:lnSpc>
@@ -13019,6 +13038,13 @@
           </a:solidFill>
           <a:ln/>
         </p:spPr>
+        <p:txBody>
+          <a:bodyPr/>
+          <a:lstStyle/>
+          <a:p>
+            <a:endParaRPr lang="en-US"/>
+          </a:p>
+        </p:txBody>
       </p:sp>
       <p:sp>
         <p:nvSpPr>
@@ -13041,6 +13067,13 @@
           </a:solidFill>
           <a:ln/>
         </p:spPr>
+        <p:txBody>
+          <a:bodyPr/>
+          <a:lstStyle/>
+          <a:p>
+            <a:endParaRPr lang="en-US"/>
+          </a:p>
+        </p:txBody>
       </p:sp>
       <p:sp>
         <p:nvSpPr>
@@ -13065,7 +13098,7 @@
           </a:bodyPr>
           <a:lstStyle/>
           <a:p>
-            <a:pPr algn="l" indent="0" marL="0">
+            <a:pPr marL="0" indent="0" algn="l">
               <a:lnSpc>
                 <a:spcPct val="116379"/>
               </a:lnSpc>
@@ -13082,12 +13115,6 @@
               </a:rPr>
               <a:t>LLM01 + LLM06 </a:t>
             </a:r>
-            <a:pPr algn="l" indent="0" marL="0">
-              <a:lnSpc>
-                <a:spcPct val="116379"/>
-              </a:lnSpc>
-              <a:buNone/>
-            </a:pPr>
             <a:r>
               <a:rPr lang="en-US" sz="1875" dirty="0">
                 <a:solidFill>
@@ -13127,6 +13154,13 @@
           </a:solidFill>
           <a:ln/>
         </p:spPr>
+        <p:txBody>
+          <a:bodyPr/>
+          <a:lstStyle/>
+          <a:p>
+            <a:endParaRPr lang="en-US"/>
+          </a:p>
+        </p:txBody>
       </p:sp>
       <p:sp>
         <p:nvSpPr>
@@ -13151,7 +13185,7 @@
           </a:bodyPr>
           <a:lstStyle/>
           <a:p>
-            <a:pPr algn="l" indent="0" marL="0">
+            <a:pPr marL="0" indent="0" algn="l">
               <a:lnSpc>
                 <a:spcPct val="116379"/>
               </a:lnSpc>
@@ -13193,6 +13227,13 @@
           </a:solidFill>
           <a:ln/>
         </p:spPr>
+        <p:txBody>
+          <a:bodyPr/>
+          <a:lstStyle/>
+          <a:p>
+            <a:endParaRPr lang="en-US"/>
+          </a:p>
+        </p:txBody>
       </p:sp>
       <p:sp>
         <p:nvSpPr>
@@ -13217,7 +13258,7 @@
           </a:bodyPr>
           <a:lstStyle/>
           <a:p>
-            <a:pPr algn="l" indent="0" marL="0">
+            <a:pPr marL="0" indent="0" algn="l">
               <a:lnSpc>
                 <a:spcPct val="116379"/>
               </a:lnSpc>
@@ -13234,12 +13275,6 @@
               </a:rPr>
               <a:t>LLM01 defenses </a:t>
             </a:r>
-            <a:pPr algn="l" indent="0" marL="0">
-              <a:lnSpc>
-                <a:spcPct val="116379"/>
-              </a:lnSpc>
-              <a:buNone/>
-            </a:pPr>
             <a:r>
               <a:rPr lang="en-US" sz="1875" dirty="0">
                 <a:solidFill>
@@ -13257,14 +13292,14 @@
       </p:sp>
       <p:pic>
         <p:nvPicPr>
-          <p:cNvPr id="43" name="Image 0" descr="preencoded.png">    </p:cNvPr>
+          <p:cNvPr id="43" name="Image 0" descr="preencoded.png"/>
           <p:cNvPicPr>
             <a:picLocks noChangeAspect="1"/>
           </p:cNvPicPr>
           <p:nvPr/>
         </p:nvPicPr>
         <p:blipFill>
-          <a:blip r:embed="rId1"/>
+          <a:blip r:embed="rId3"/>
           <a:stretch>
             <a:fillRect/>
           </a:stretch>
@@ -13302,11 +13337,11 @@
           </a:bodyPr>
           <a:lstStyle/>
           <a:p>
-            <a:pPr algn="l" indent="0" marL="0">
-              <a:buNone/>
-            </a:pPr>
-            <a:r>
-              <a:rPr lang="en-US" sz="1200" spc="264" kern="0" dirty="0">
+            <a:pPr marL="0" indent="0" algn="l">
+              <a:buNone/>
+            </a:pPr>
+            <a:r>
+              <a:rPr lang="en-US" sz="1200" kern="0" spc="264" dirty="0">
                 <a:solidFill>
                   <a:srgbClr val="969696"/>
                 </a:solidFill>
@@ -13336,6 +13371,7 @@
         <a:solidFill>
           <a:srgbClr val="000000"/>
         </a:solidFill>
+        <a:effectLst/>
       </p:bgPr>
     </p:bg>
     <p:spTree>
@@ -13375,11 +13411,11 @@
           </a:bodyPr>
           <a:lstStyle/>
           <a:p>
-            <a:pPr algn="l" indent="0" marL="0">
-              <a:buNone/>
-            </a:pPr>
-            <a:r>
-              <a:rPr lang="en-US" sz="1500" spc="450" kern="0" dirty="0">
+            <a:pPr marL="0" indent="0" algn="l">
+              <a:buNone/>
+            </a:pPr>
+            <a:r>
+              <a:rPr lang="en-US" sz="1500" kern="0" spc="450" dirty="0">
                 <a:solidFill>
                   <a:srgbClr val="36CDFF"/>
                 </a:solidFill>
@@ -13416,7 +13452,7 @@
           </a:bodyPr>
           <a:lstStyle/>
           <a:p>
-            <a:pPr algn="l" indent="0" marL="0">
+            <a:pPr marL="0" indent="0" algn="l">
               <a:lnSpc>
                 <a:spcPct val="78171"/>
               </a:lnSpc>
@@ -13460,7 +13496,7 @@
           </a:bodyPr>
           <a:lstStyle/>
           <a:p>
-            <a:pPr algn="l" indent="0" marL="0">
+            <a:pPr marL="0" indent="0" algn="l">
               <a:lnSpc>
                 <a:spcPct val="126087"/>
               </a:lnSpc>
@@ -13477,12 +13513,6 @@
               </a:rPr>
               <a:t>Confused deputy </a:t>
             </a:r>
-            <a:pPr algn="l" indent="0" marL="0">
-              <a:lnSpc>
-                <a:spcPct val="126087"/>
-              </a:lnSpc>
-              <a:buNone/>
-            </a:pPr>
             <a:r>
               <a:rPr lang="en-US" sz="2250" dirty="0">
                 <a:solidFill>
@@ -13519,6 +13549,13 @@
           </a:solidFill>
           <a:ln/>
         </p:spPr>
+        <p:txBody>
+          <a:bodyPr/>
+          <a:lstStyle/>
+          <a:p>
+            <a:endParaRPr lang="en-US"/>
+          </a:p>
+        </p:txBody>
       </p:sp>
       <p:sp>
         <p:nvSpPr>
@@ -13539,6 +13576,13 @@
           </a:solidFill>
           <a:ln/>
         </p:spPr>
+        <p:txBody>
+          <a:bodyPr/>
+          <a:lstStyle/>
+          <a:p>
+            <a:endParaRPr lang="en-US"/>
+          </a:p>
+        </p:txBody>
       </p:sp>
       <p:sp>
         <p:nvSpPr>
@@ -13561,6 +13605,13 @@
           </a:solidFill>
           <a:ln/>
         </p:spPr>
+        <p:txBody>
+          <a:bodyPr/>
+          <a:lstStyle/>
+          <a:p>
+            <a:endParaRPr lang="en-US"/>
+          </a:p>
+        </p:txBody>
       </p:sp>
       <p:sp>
         <p:nvSpPr>
@@ -13583,6 +13634,13 @@
           </a:solidFill>
           <a:ln/>
         </p:spPr>
+        <p:txBody>
+          <a:bodyPr/>
+          <a:lstStyle/>
+          <a:p>
+            <a:endParaRPr lang="en-US"/>
+          </a:p>
+        </p:txBody>
       </p:sp>
       <p:sp>
         <p:nvSpPr>
@@ -13607,11 +13665,11 @@
           </a:bodyPr>
           <a:lstStyle/>
           <a:p>
-            <a:pPr algn="l" indent="0" marL="0">
-              <a:buNone/>
-            </a:pPr>
-            <a:r>
-              <a:rPr lang="en-US" sz="1200" spc="168" kern="0" dirty="0">
+            <a:pPr marL="0" indent="0" algn="l">
+              <a:buNone/>
+            </a:pPr>
+            <a:r>
+              <a:rPr lang="en-US" sz="1200" kern="0" spc="168" dirty="0">
                 <a:solidFill>
                   <a:srgbClr val="36CDFF"/>
                 </a:solidFill>
@@ -13648,7 +13706,7 @@
           </a:bodyPr>
           <a:lstStyle/>
           <a:p>
-            <a:pPr algn="l" indent="0" marL="0">
+            <a:pPr marL="0" indent="0" algn="l">
               <a:lnSpc>
                 <a:spcPct val="80000"/>
               </a:lnSpc>
@@ -13692,7 +13750,7 @@
           </a:bodyPr>
           <a:lstStyle/>
           <a:p>
-            <a:pPr algn="l" indent="0" marL="0">
+            <a:pPr marL="0" indent="0" algn="l">
               <a:lnSpc>
                 <a:spcPct val="126545"/>
               </a:lnSpc>
@@ -13734,6 +13792,13 @@
           </a:solidFill>
           <a:ln/>
         </p:spPr>
+        <p:txBody>
+          <a:bodyPr/>
+          <a:lstStyle/>
+          <a:p>
+            <a:endParaRPr lang="en-US"/>
+          </a:p>
+        </p:txBody>
       </p:sp>
       <p:sp>
         <p:nvSpPr>
@@ -13754,6 +13819,13 @@
           </a:solidFill>
           <a:ln/>
         </p:spPr>
+        <p:txBody>
+          <a:bodyPr/>
+          <a:lstStyle/>
+          <a:p>
+            <a:endParaRPr lang="en-US"/>
+          </a:p>
+        </p:txBody>
       </p:sp>
       <p:sp>
         <p:nvSpPr>
@@ -13776,6 +13848,13 @@
           </a:solidFill>
           <a:ln/>
         </p:spPr>
+        <p:txBody>
+          <a:bodyPr/>
+          <a:lstStyle/>
+          <a:p>
+            <a:endParaRPr lang="en-US"/>
+          </a:p>
+        </p:txBody>
       </p:sp>
       <p:sp>
         <p:nvSpPr>
@@ -13798,6 +13877,13 @@
           </a:solidFill>
           <a:ln/>
         </p:spPr>
+        <p:txBody>
+          <a:bodyPr/>
+          <a:lstStyle/>
+          <a:p>
+            <a:endParaRPr lang="en-US"/>
+          </a:p>
+        </p:txBody>
       </p:sp>
       <p:sp>
         <p:nvSpPr>
@@ -13822,11 +13908,11 @@
           </a:bodyPr>
           <a:lstStyle/>
           <a:p>
-            <a:pPr algn="l" indent="0" marL="0">
-              <a:buNone/>
-            </a:pPr>
-            <a:r>
-              <a:rPr lang="en-US" sz="1200" spc="168" kern="0" dirty="0">
+            <a:pPr marL="0" indent="0" algn="l">
+              <a:buNone/>
+            </a:pPr>
+            <a:r>
+              <a:rPr lang="en-US" sz="1200" kern="0" spc="168" dirty="0">
                 <a:solidFill>
                   <a:srgbClr val="FD7EF5"/>
                 </a:solidFill>
@@ -13863,7 +13949,7 @@
           </a:bodyPr>
           <a:lstStyle/>
           <a:p>
-            <a:pPr algn="l" indent="0" marL="0">
+            <a:pPr marL="0" indent="0" algn="l">
               <a:lnSpc>
                 <a:spcPct val="80000"/>
               </a:lnSpc>
@@ -13907,7 +13993,7 @@
           </a:bodyPr>
           <a:lstStyle/>
           <a:p>
-            <a:pPr algn="l" indent="0" marL="0">
+            <a:pPr marL="0" indent="0" algn="l">
               <a:lnSpc>
                 <a:spcPct val="126545"/>
               </a:lnSpc>
@@ -13924,12 +14010,6 @@
               </a:rPr>
               <a:t>A poisoned </a:t>
             </a:r>
-            <a:pPr algn="l" indent="0" marL="0">
-              <a:lnSpc>
-                <a:spcPct val="126545"/>
-              </a:lnSpc>
-              <a:buNone/>
-            </a:pPr>
             <a:r>
               <a:rPr lang="en-US" sz="1800" b="1" dirty="0">
                 <a:solidFill>
@@ -13941,12 +14021,6 @@
               </a:rPr>
               <a:t>tool description </a:t>
             </a:r>
-            <a:pPr algn="l" indent="0" marL="0">
-              <a:lnSpc>
-                <a:spcPct val="126545"/>
-              </a:lnSpc>
-              <a:buNone/>
-            </a:pPr>
             <a:r>
               <a:rPr lang="en-US" sz="1800" dirty="0">
                 <a:solidFill>
@@ -13983,6 +14057,13 @@
           </a:solidFill>
           <a:ln/>
         </p:spPr>
+        <p:txBody>
+          <a:bodyPr/>
+          <a:lstStyle/>
+          <a:p>
+            <a:endParaRPr lang="en-US"/>
+          </a:p>
+        </p:txBody>
       </p:sp>
       <p:sp>
         <p:nvSpPr>
@@ -14003,6 +14084,13 @@
           </a:solidFill>
           <a:ln/>
         </p:spPr>
+        <p:txBody>
+          <a:bodyPr/>
+          <a:lstStyle/>
+          <a:p>
+            <a:endParaRPr lang="en-US"/>
+          </a:p>
+        </p:txBody>
       </p:sp>
       <p:sp>
         <p:nvSpPr>
@@ -14025,6 +14113,13 @@
           </a:solidFill>
           <a:ln/>
         </p:spPr>
+        <p:txBody>
+          <a:bodyPr/>
+          <a:lstStyle/>
+          <a:p>
+            <a:endParaRPr lang="en-US"/>
+          </a:p>
+        </p:txBody>
       </p:sp>
       <p:sp>
         <p:nvSpPr>
@@ -14047,6 +14142,13 @@
           </a:solidFill>
           <a:ln/>
         </p:spPr>
+        <p:txBody>
+          <a:bodyPr/>
+          <a:lstStyle/>
+          <a:p>
+            <a:endParaRPr lang="en-US"/>
+          </a:p>
+        </p:txBody>
       </p:sp>
       <p:sp>
         <p:nvSpPr>
@@ -14071,11 +14173,11 @@
           </a:bodyPr>
           <a:lstStyle/>
           <a:p>
-            <a:pPr algn="l" indent="0" marL="0">
-              <a:buNone/>
-            </a:pPr>
-            <a:r>
-              <a:rPr lang="en-US" sz="1200" spc="168" kern="0" dirty="0">
+            <a:pPr marL="0" indent="0" algn="l">
+              <a:buNone/>
+            </a:pPr>
+            <a:r>
+              <a:rPr lang="en-US" sz="1200" kern="0" spc="168" dirty="0">
                 <a:solidFill>
                   <a:srgbClr val="FD7EF5"/>
                 </a:solidFill>
@@ -14112,7 +14214,7 @@
           </a:bodyPr>
           <a:lstStyle/>
           <a:p>
-            <a:pPr algn="l" indent="0" marL="0">
+            <a:pPr marL="0" indent="0" algn="l">
               <a:lnSpc>
                 <a:spcPct val="80000"/>
               </a:lnSpc>
@@ -14156,7 +14258,7 @@
           </a:bodyPr>
           <a:lstStyle/>
           <a:p>
-            <a:pPr algn="l" indent="0" marL="0">
+            <a:pPr marL="0" indent="0" algn="l">
               <a:lnSpc>
                 <a:spcPct val="126545"/>
               </a:lnSpc>
@@ -14173,12 +14275,6 @@
               </a:rPr>
               <a:t>An injected </a:t>
             </a:r>
-            <a:pPr algn="l" indent="0" marL="0">
-              <a:lnSpc>
-                <a:spcPct val="126545"/>
-              </a:lnSpc>
-              <a:buNone/>
-            </a:pPr>
             <a:r>
               <a:rPr lang="en-US" sz="1800" b="1" dirty="0">
                 <a:solidFill>
@@ -14190,12 +14286,6 @@
               </a:rPr>
               <a:t>dispute text </a:t>
             </a:r>
-            <a:pPr algn="l" indent="0" marL="0">
-              <a:lnSpc>
-                <a:spcPct val="126545"/>
-              </a:lnSpc>
-              <a:buNone/>
-            </a:pPr>
             <a:r>
               <a:rPr lang="en-US" sz="1800" dirty="0">
                 <a:solidFill>
@@ -14234,7 +14324,7 @@
           </a:bodyPr>
           <a:lstStyle/>
           <a:p>
-            <a:pPr algn="l" indent="0" marL="0">
+            <a:pPr marL="0" indent="0" algn="l">
               <a:buNone/>
             </a:pPr>
             <a:r>
@@ -14254,14 +14344,14 @@
       </p:sp>
       <p:pic>
         <p:nvPicPr>
-          <p:cNvPr id="27" name="Image 0" descr="preencoded.png">    </p:cNvPr>
+          <p:cNvPr id="27" name="Image 0" descr="preencoded.png"/>
           <p:cNvPicPr>
             <a:picLocks noChangeAspect="1"/>
           </p:cNvPicPr>
           <p:nvPr/>
         </p:nvPicPr>
         <p:blipFill>
-          <a:blip r:embed="rId1"/>
+          <a:blip r:embed="rId3"/>
           <a:stretch>
             <a:fillRect/>
           </a:stretch>
@@ -14299,11 +14389,11 @@
           </a:bodyPr>
           <a:lstStyle/>
           <a:p>
-            <a:pPr algn="l" indent="0" marL="0">
-              <a:buNone/>
-            </a:pPr>
-            <a:r>
-              <a:rPr lang="en-US" sz="1200" spc="264" kern="0" dirty="0">
+            <a:pPr marL="0" indent="0" algn="l">
+              <a:buNone/>
+            </a:pPr>
+            <a:r>
+              <a:rPr lang="en-US" sz="1200" kern="0" spc="264" dirty="0">
                 <a:solidFill>
                   <a:srgbClr val="969696"/>
                 </a:solidFill>
@@ -14333,6 +14423,7 @@
         <a:solidFill>
           <a:srgbClr val="000000"/>
         </a:solidFill>
+        <a:effectLst/>
       </p:bgPr>
     </p:bg>
     <p:spTree>
@@ -14372,11 +14463,11 @@
           </a:bodyPr>
           <a:lstStyle/>
           <a:p>
-            <a:pPr algn="l" indent="0" marL="0">
-              <a:buNone/>
-            </a:pPr>
-            <a:r>
-              <a:rPr lang="en-US" sz="1500" spc="450" kern="0" dirty="0">
+            <a:pPr marL="0" indent="0" algn="l">
+              <a:buNone/>
+            </a:pPr>
+            <a:r>
+              <a:rPr lang="en-US" sz="1500" kern="0" spc="450" dirty="0">
                 <a:solidFill>
                   <a:srgbClr val="36CDFF"/>
                 </a:solidFill>
@@ -14413,7 +14504,7 @@
           </a:bodyPr>
           <a:lstStyle/>
           <a:p>
-            <a:pPr algn="l" indent="0" marL="0">
+            <a:pPr marL="0" indent="0" algn="l">
               <a:lnSpc>
                 <a:spcPct val="78072"/>
               </a:lnSpc>
@@ -14455,6 +14546,13 @@
           </a:solidFill>
           <a:ln/>
         </p:spPr>
+        <p:txBody>
+          <a:bodyPr/>
+          <a:lstStyle/>
+          <a:p>
+            <a:endParaRPr lang="en-US"/>
+          </a:p>
+        </p:txBody>
       </p:sp>
       <p:sp>
         <p:nvSpPr>
@@ -14479,11 +14577,11 @@
           </a:bodyPr>
           <a:lstStyle/>
           <a:p>
-            <a:pPr algn="l" indent="0" marL="0">
-              <a:buNone/>
-            </a:pPr>
-            <a:r>
-              <a:rPr lang="en-US" sz="1350" spc="135" kern="0" dirty="0">
+            <a:pPr marL="0" indent="0" algn="l">
+              <a:buNone/>
+            </a:pPr>
+            <a:r>
+              <a:rPr lang="en-US" sz="1350" kern="0" spc="135" dirty="0">
                 <a:solidFill>
                   <a:srgbClr val="36CDFF"/>
                 </a:solidFill>
@@ -14520,11 +14618,11 @@
           </a:bodyPr>
           <a:lstStyle/>
           <a:p>
-            <a:pPr algn="l" indent="0" marL="0">
-              <a:buNone/>
-            </a:pPr>
-            <a:r>
-              <a:rPr lang="en-US" sz="1350" spc="135" kern="0" dirty="0">
+            <a:pPr marL="0" indent="0" algn="l">
+              <a:buNone/>
+            </a:pPr>
+            <a:r>
+              <a:rPr lang="en-US" sz="1350" kern="0" spc="135" dirty="0">
                 <a:solidFill>
                   <a:srgbClr val="969696"/>
                 </a:solidFill>
@@ -14561,11 +14659,11 @@
           </a:bodyPr>
           <a:lstStyle/>
           <a:p>
-            <a:pPr algn="l" indent="0" marL="0">
-              <a:buNone/>
-            </a:pPr>
-            <a:r>
-              <a:rPr lang="en-US" sz="1350" spc="135" kern="0" dirty="0">
+            <a:pPr marL="0" indent="0" algn="l">
+              <a:buNone/>
+            </a:pPr>
+            <a:r>
+              <a:rPr lang="en-US" sz="1350" kern="0" spc="135" dirty="0">
                 <a:solidFill>
                   <a:srgbClr val="FD7EF5"/>
                 </a:solidFill>
@@ -14600,6 +14698,13 @@
           </a:solidFill>
           <a:ln/>
         </p:spPr>
+        <p:txBody>
+          <a:bodyPr/>
+          <a:lstStyle/>
+          <a:p>
+            <a:endParaRPr lang="en-US"/>
+          </a:p>
+        </p:txBody>
       </p:sp>
       <p:sp>
         <p:nvSpPr>
@@ -14624,7 +14729,7 @@
           </a:bodyPr>
           <a:lstStyle/>
           <a:p>
-            <a:pPr algn="l" indent="0" marL="0">
+            <a:pPr marL="0" indent="0" algn="l">
               <a:lnSpc>
                 <a:spcPct val="115000"/>
               </a:lnSpc>
@@ -14666,6 +14771,13 @@
           </a:solidFill>
           <a:ln/>
         </p:spPr>
+        <p:txBody>
+          <a:bodyPr/>
+          <a:lstStyle/>
+          <a:p>
+            <a:endParaRPr lang="en-US"/>
+          </a:p>
+        </p:txBody>
       </p:sp>
       <p:sp>
         <p:nvSpPr>
@@ -14690,7 +14802,7 @@
           </a:bodyPr>
           <a:lstStyle/>
           <a:p>
-            <a:pPr algn="l" indent="0" marL="0">
+            <a:pPr marL="0" indent="0" algn="l">
               <a:lnSpc>
                 <a:spcPct val="115000"/>
               </a:lnSpc>
@@ -14732,6 +14844,13 @@
           </a:solidFill>
           <a:ln/>
         </p:spPr>
+        <p:txBody>
+          <a:bodyPr/>
+          <a:lstStyle/>
+          <a:p>
+            <a:endParaRPr lang="en-US"/>
+          </a:p>
+        </p:txBody>
       </p:sp>
       <p:sp>
         <p:nvSpPr>
@@ -14756,7 +14875,7 @@
           </a:bodyPr>
           <a:lstStyle/>
           <a:p>
-            <a:pPr algn="l" indent="0" marL="0">
+            <a:pPr marL="0" indent="0" algn="l">
               <a:lnSpc>
                 <a:spcPct val="115000"/>
               </a:lnSpc>
@@ -14771,7 +14890,7 @@
                 <a:ea typeface="Arial" pitchFamily="34" charset="-122"/>
                 <a:cs typeface="Arial" pitchFamily="34" charset="-120"/>
               </a:rPr>
-              <a:t>Tag context by origin; never let attacker-controllable text act as instructions</a:t>
+              <a:t>Tag context by origin; inhibit attacker-controllable text acting as instructions</a:t>
             </a:r>
             <a:endParaRPr lang="en-US" sz="1725" dirty="0"/>
           </a:p>
@@ -14798,6 +14917,13 @@
           </a:solidFill>
           <a:ln/>
         </p:spPr>
+        <p:txBody>
+          <a:bodyPr/>
+          <a:lstStyle/>
+          <a:p>
+            <a:endParaRPr lang="en-US"/>
+          </a:p>
+        </p:txBody>
       </p:sp>
       <p:sp>
         <p:nvSpPr>
@@ -14822,7 +14948,7 @@
           </a:bodyPr>
           <a:lstStyle/>
           <a:p>
-            <a:pPr algn="l" indent="0" marL="0">
+            <a:pPr marL="0" indent="0" algn="l">
               <a:lnSpc>
                 <a:spcPct val="115000"/>
               </a:lnSpc>
@@ -14864,6 +14990,13 @@
           </a:solidFill>
           <a:ln/>
         </p:spPr>
+        <p:txBody>
+          <a:bodyPr/>
+          <a:lstStyle/>
+          <a:p>
+            <a:endParaRPr lang="en-US"/>
+          </a:p>
+        </p:txBody>
       </p:sp>
       <p:sp>
         <p:nvSpPr>
@@ -14888,7 +15021,7 @@
           </a:bodyPr>
           <a:lstStyle/>
           <a:p>
-            <a:pPr algn="l" indent="0" marL="0">
+            <a:pPr marL="0" indent="0" algn="l">
               <a:lnSpc>
                 <a:spcPct val="115000"/>
               </a:lnSpc>
@@ -14930,6 +15063,13 @@
           </a:solidFill>
           <a:ln/>
         </p:spPr>
+        <p:txBody>
+          <a:bodyPr/>
+          <a:lstStyle/>
+          <a:p>
+            <a:endParaRPr lang="en-US"/>
+          </a:p>
+        </p:txBody>
       </p:sp>
       <p:sp>
         <p:nvSpPr>
@@ -14954,7 +15094,7 @@
           </a:bodyPr>
           <a:lstStyle/>
           <a:p>
-            <a:pPr algn="l" indent="0" marL="0">
+            <a:pPr marL="0" indent="0" algn="l">
               <a:lnSpc>
                 <a:spcPct val="115000"/>
               </a:lnSpc>
@@ -14996,6 +15136,13 @@
           </a:solidFill>
           <a:ln/>
         </p:spPr>
+        <p:txBody>
+          <a:bodyPr/>
+          <a:lstStyle/>
+          <a:p>
+            <a:endParaRPr lang="en-US"/>
+          </a:p>
+        </p:txBody>
       </p:sp>
       <p:sp>
         <p:nvSpPr>
@@ -15020,7 +15167,7 @@
           </a:bodyPr>
           <a:lstStyle/>
           <a:p>
-            <a:pPr algn="l" indent="0" marL="0">
+            <a:pPr marL="0" indent="0" algn="l">
               <a:lnSpc>
                 <a:spcPct val="115000"/>
               </a:lnSpc>
@@ -15062,6 +15209,13 @@
           </a:solidFill>
           <a:ln/>
         </p:spPr>
+        <p:txBody>
+          <a:bodyPr/>
+          <a:lstStyle/>
+          <a:p>
+            <a:endParaRPr lang="en-US"/>
+          </a:p>
+        </p:txBody>
       </p:sp>
       <p:sp>
         <p:nvSpPr>
@@ -15086,7 +15240,7 @@
           </a:bodyPr>
           <a:lstStyle/>
           <a:p>
-            <a:pPr algn="l" indent="0" marL="0">
+            <a:pPr marL="0" indent="0" algn="l">
               <a:lnSpc>
                 <a:spcPct val="115000"/>
               </a:lnSpc>
@@ -15128,6 +15282,13 @@
           </a:solidFill>
           <a:ln/>
         </p:spPr>
+        <p:txBody>
+          <a:bodyPr/>
+          <a:lstStyle/>
+          <a:p>
+            <a:endParaRPr lang="en-US"/>
+          </a:p>
+        </p:txBody>
       </p:sp>
       <p:sp>
         <p:nvSpPr>
@@ -15152,7 +15313,7 @@
           </a:bodyPr>
           <a:lstStyle/>
           <a:p>
-            <a:pPr algn="l" indent="0" marL="0">
+            <a:pPr marL="0" indent="0" algn="l">
               <a:lnSpc>
                 <a:spcPct val="115000"/>
               </a:lnSpc>
@@ -15169,12 +15330,6 @@
               </a:rPr>
               <a:t>The deputy checks </a:t>
             </a:r>
-            <a:pPr algn="l" indent="0" marL="0">
-              <a:lnSpc>
-                <a:spcPct val="115000"/>
-              </a:lnSpc>
-              <a:buNone/>
-            </a:pPr>
             <a:r>
               <a:rPr lang="en-US" sz="1725" b="1" dirty="0">
                 <a:solidFill>
@@ -15186,12 +15341,6 @@
               </a:rPr>
               <a:t>ownership </a:t>
             </a:r>
-            <a:pPr algn="l" indent="0" marL="0">
-              <a:lnSpc>
-                <a:spcPct val="115000"/>
-              </a:lnSpc>
-              <a:buNone/>
-            </a:pPr>
             <a:r>
               <a:rPr lang="en-US" sz="1725" dirty="0">
                 <a:solidFill>
@@ -15228,6 +15377,13 @@
           </a:solidFill>
           <a:ln/>
         </p:spPr>
+        <p:txBody>
+          <a:bodyPr/>
+          <a:lstStyle/>
+          <a:p>
+            <a:endParaRPr lang="en-US"/>
+          </a:p>
+        </p:txBody>
       </p:sp>
       <p:sp>
         <p:nvSpPr>
@@ -15252,7 +15408,7 @@
           </a:bodyPr>
           <a:lstStyle/>
           <a:p>
-            <a:pPr algn="l" indent="0" marL="0">
+            <a:pPr marL="0" indent="0" algn="l">
               <a:lnSpc>
                 <a:spcPct val="115000"/>
               </a:lnSpc>
@@ -15294,6 +15450,13 @@
           </a:solidFill>
           <a:ln/>
         </p:spPr>
+        <p:txBody>
+          <a:bodyPr/>
+          <a:lstStyle/>
+          <a:p>
+            <a:endParaRPr lang="en-US"/>
+          </a:p>
+        </p:txBody>
       </p:sp>
       <p:sp>
         <p:nvSpPr>
@@ -15318,7 +15481,7 @@
           </a:bodyPr>
           <a:lstStyle/>
           <a:p>
-            <a:pPr algn="l" indent="0" marL="0">
+            <a:pPr marL="0" indent="0" algn="l">
               <a:lnSpc>
                 <a:spcPct val="115000"/>
               </a:lnSpc>
@@ -15360,6 +15523,13 @@
           </a:solidFill>
           <a:ln/>
         </p:spPr>
+        <p:txBody>
+          <a:bodyPr/>
+          <a:lstStyle/>
+          <a:p>
+            <a:endParaRPr lang="en-US"/>
+          </a:p>
+        </p:txBody>
       </p:sp>
       <p:sp>
         <p:nvSpPr>
@@ -15384,7 +15554,7 @@
           </a:bodyPr>
           <a:lstStyle/>
           <a:p>
-            <a:pPr algn="l" indent="0" marL="0">
+            <a:pPr marL="0" indent="0" algn="l">
               <a:lnSpc>
                 <a:spcPct val="115000"/>
               </a:lnSpc>
@@ -15426,6 +15596,13 @@
           </a:solidFill>
           <a:ln/>
         </p:spPr>
+        <p:txBody>
+          <a:bodyPr/>
+          <a:lstStyle/>
+          <a:p>
+            <a:endParaRPr lang="en-US"/>
+          </a:p>
+        </p:txBody>
       </p:sp>
       <p:sp>
         <p:nvSpPr>
@@ -15450,7 +15627,7 @@
           </a:bodyPr>
           <a:lstStyle/>
           <a:p>
-            <a:pPr algn="l" indent="0" marL="0">
+            <a:pPr marL="0" indent="0" algn="l">
               <a:lnSpc>
                 <a:spcPct val="115000"/>
               </a:lnSpc>
@@ -15492,6 +15669,13 @@
           </a:solidFill>
           <a:ln/>
         </p:spPr>
+        <p:txBody>
+          <a:bodyPr/>
+          <a:lstStyle/>
+          <a:p>
+            <a:endParaRPr lang="en-US"/>
+          </a:p>
+        </p:txBody>
       </p:sp>
       <p:sp>
         <p:nvSpPr>
@@ -15516,7 +15700,7 @@
           </a:bodyPr>
           <a:lstStyle/>
           <a:p>
-            <a:pPr algn="l" indent="0" marL="0">
+            <a:pPr marL="0" indent="0" algn="l">
               <a:lnSpc>
                 <a:spcPct val="115000"/>
               </a:lnSpc>
@@ -15558,6 +15742,13 @@
           </a:solidFill>
           <a:ln/>
         </p:spPr>
+        <p:txBody>
+          <a:bodyPr/>
+          <a:lstStyle/>
+          <a:p>
+            <a:endParaRPr lang="en-US"/>
+          </a:p>
+        </p:txBody>
       </p:sp>
       <p:sp>
         <p:nvSpPr>
@@ -15582,7 +15773,7 @@
           </a:bodyPr>
           <a:lstStyle/>
           <a:p>
-            <a:pPr algn="l" indent="0" marL="0">
+            <a:pPr marL="0" indent="0" algn="l">
               <a:lnSpc>
                 <a:spcPct val="115000"/>
               </a:lnSpc>
@@ -15624,6 +15815,13 @@
           </a:solidFill>
           <a:ln/>
         </p:spPr>
+        <p:txBody>
+          <a:bodyPr/>
+          <a:lstStyle/>
+          <a:p>
+            <a:endParaRPr lang="en-US"/>
+          </a:p>
+        </p:txBody>
       </p:sp>
       <p:sp>
         <p:nvSpPr>
@@ -15648,7 +15846,7 @@
           </a:bodyPr>
           <a:lstStyle/>
           <a:p>
-            <a:pPr algn="l" indent="0" marL="0">
+            <a:pPr marL="0" indent="0" algn="l">
               <a:lnSpc>
                 <a:spcPct val="115000"/>
               </a:lnSpc>
@@ -15690,6 +15888,13 @@
           </a:solidFill>
           <a:ln/>
         </p:spPr>
+        <p:txBody>
+          <a:bodyPr/>
+          <a:lstStyle/>
+          <a:p>
+            <a:endParaRPr lang="en-US"/>
+          </a:p>
+        </p:txBody>
       </p:sp>
       <p:sp>
         <p:nvSpPr>
@@ -15714,7 +15919,7 @@
           </a:bodyPr>
           <a:lstStyle/>
           <a:p>
-            <a:pPr algn="l" indent="0" marL="0">
+            <a:pPr marL="0" indent="0" algn="l">
               <a:lnSpc>
                 <a:spcPct val="115000"/>
               </a:lnSpc>
@@ -15756,6 +15961,13 @@
           </a:solidFill>
           <a:ln/>
         </p:spPr>
+        <p:txBody>
+          <a:bodyPr/>
+          <a:lstStyle/>
+          <a:p>
+            <a:endParaRPr lang="en-US"/>
+          </a:p>
+        </p:txBody>
       </p:sp>
       <p:sp>
         <p:nvSpPr>
@@ -15780,7 +15992,7 @@
           </a:bodyPr>
           <a:lstStyle/>
           <a:p>
-            <a:pPr algn="l" indent="0" marL="0">
+            <a:pPr marL="0" indent="0" algn="l">
               <a:lnSpc>
                 <a:spcPct val="115000"/>
               </a:lnSpc>
@@ -15797,12 +16009,6 @@
               </a:rPr>
               <a:t>Normalize obfuscation </a:t>
             </a:r>
-            <a:pPr algn="l" indent="0" marL="0">
-              <a:lnSpc>
-                <a:spcPct val="115000"/>
-              </a:lnSpc>
-              <a:buNone/>
-            </a:pPr>
             <a:r>
               <a:rPr lang="en-US" sz="1725" b="1" dirty="0">
                 <a:solidFill>
@@ -15814,12 +16020,6 @@
               </a:rPr>
               <a:t>before </a:t>
             </a:r>
-            <a:pPr algn="l" indent="0" marL="0">
-              <a:lnSpc>
-                <a:spcPct val="115000"/>
-              </a:lnSpc>
-              <a:buNone/>
-            </a:pPr>
             <a:r>
               <a:rPr lang="en-US" sz="1725" dirty="0">
                 <a:solidFill>
@@ -15837,14 +16037,14 @@
       </p:sp>
       <p:pic>
         <p:nvPicPr>
-          <p:cNvPr id="44" name="Image 0" descr="preencoded.png">    </p:cNvPr>
+          <p:cNvPr id="44" name="Image 0" descr="preencoded.png"/>
           <p:cNvPicPr>
             <a:picLocks noChangeAspect="1"/>
           </p:cNvPicPr>
           <p:nvPr/>
         </p:nvPicPr>
         <p:blipFill>
-          <a:blip r:embed="rId1"/>
+          <a:blip r:embed="rId3"/>
           <a:stretch>
             <a:fillRect/>
           </a:stretch>
@@ -15882,11 +16082,11 @@
           </a:bodyPr>
           <a:lstStyle/>
           <a:p>
-            <a:pPr algn="l" indent="0" marL="0">
-              <a:buNone/>
-            </a:pPr>
-            <a:r>
-              <a:rPr lang="en-US" sz="1200" spc="264" kern="0" dirty="0">
+            <a:pPr marL="0" indent="0" algn="l">
+              <a:buNone/>
+            </a:pPr>
+            <a:r>
+              <a:rPr lang="en-US" sz="1200" kern="0" spc="264" dirty="0">
                 <a:solidFill>
                   <a:srgbClr val="969696"/>
                 </a:solidFill>
@@ -15916,6 +16116,7 @@
         <a:solidFill>
           <a:srgbClr val="000000"/>
         </a:solidFill>
+        <a:effectLst/>
       </p:bgPr>
     </p:bg>
     <p:spTree>
@@ -15955,11 +16156,11 @@
           </a:bodyPr>
           <a:lstStyle/>
           <a:p>
-            <a:pPr algn="l" indent="0" marL="0">
-              <a:buNone/>
-            </a:pPr>
-            <a:r>
-              <a:rPr lang="en-US" sz="1500" spc="450" kern="0" dirty="0">
+            <a:pPr marL="0" indent="0" algn="l">
+              <a:buNone/>
+            </a:pPr>
+            <a:r>
+              <a:rPr lang="en-US" sz="1500" kern="0" spc="450" dirty="0">
                 <a:solidFill>
                   <a:srgbClr val="36CDFF"/>
                 </a:solidFill>
@@ -15996,7 +16197,7 @@
           </a:bodyPr>
           <a:lstStyle/>
           <a:p>
-            <a:pPr algn="l" indent="0" marL="0">
+            <a:pPr marL="0" indent="0" algn="l">
               <a:lnSpc>
                 <a:spcPct val="78182"/>
               </a:lnSpc>
@@ -16040,7 +16241,7 @@
           </a:bodyPr>
           <a:lstStyle/>
           <a:p>
-            <a:pPr algn="l" indent="0" marL="0">
+            <a:pPr marL="0" indent="0" algn="l">
               <a:lnSpc>
                 <a:spcPct val="132000"/>
               </a:lnSpc>
@@ -16084,7 +16285,7 @@
           </a:bodyPr>
           <a:lstStyle/>
           <a:p>
-            <a:pPr algn="l" indent="0" marL="0">
+            <a:pPr marL="0" indent="0" algn="l">
               <a:lnSpc>
                 <a:spcPct val="121194"/>
               </a:lnSpc>
@@ -16101,13 +16302,161 @@
               </a:rPr>
               <a:t>M2 shipped </a:t>
             </a:r>
-            <a:pPr algn="l" indent="0" marL="0">
+            <a:r>
+              <a:rPr lang="en-US" sz="2175" b="1" dirty="0">
+                <a:solidFill>
+                  <a:srgbClr val="FFFFFF"/>
+                </a:solidFill>
+                <a:latin typeface="Arial" pitchFamily="34" charset="0"/>
+                <a:ea typeface="Arial" pitchFamily="34" charset="-122"/>
+                <a:cs typeface="Arial" pitchFamily="34" charset="-120"/>
+              </a:rPr>
+              <a:t>two </a:t>
+            </a:r>
+            <a:r>
+              <a:rPr lang="en-US" sz="2175" dirty="0">
+                <a:solidFill>
+                  <a:srgbClr val="FFFFFF"/>
+                </a:solidFill>
+                <a:latin typeface="Arial" pitchFamily="34" charset="0"/>
+                <a:ea typeface="Arial" pitchFamily="34" charset="-122"/>
+                <a:cs typeface="Arial" pitchFamily="34" charset="-120"/>
+              </a:rPr>
+              <a:t>independent guards (escape </a:t>
+            </a:r>
+            <a:r>
+              <a:rPr lang="en-US" sz="2175" b="1" dirty="0">
+                <a:solidFill>
+                  <a:srgbClr val="FFFFFF"/>
+                </a:solidFill>
+                <a:latin typeface="Arial" pitchFamily="34" charset="0"/>
+                <a:ea typeface="Arial" pitchFamily="34" charset="-122"/>
+                <a:cs typeface="Arial" pitchFamily="34" charset="-120"/>
+              </a:rPr>
+              <a:t>and </a:t>
+            </a:r>
+            <a:r>
+              <a:rPr lang="en-US" sz="2175" dirty="0">
+                <a:solidFill>
+                  <a:srgbClr val="FFFFFF"/>
+                </a:solidFill>
+                <a:latin typeface="Arial" pitchFamily="34" charset="0"/>
+                <a:ea typeface="Arial" pitchFamily="34" charset="-122"/>
+                <a:cs typeface="Arial" pitchFamily="34" charset="-120"/>
+              </a:rPr>
+              <a:t>CSP) — either alone stops the XSS. That is </a:t>
+            </a:r>
+            <a:r>
+              <a:rPr lang="en-US" sz="2175" b="1" dirty="0">
+                <a:solidFill>
+                  <a:srgbClr val="FFFFFF"/>
+                </a:solidFill>
+                <a:latin typeface="Arial" pitchFamily="34" charset="0"/>
+                <a:ea typeface="Arial" pitchFamily="34" charset="-122"/>
+                <a:cs typeface="Arial" pitchFamily="34" charset="-120"/>
+              </a:rPr>
+              <a:t>defense in depth</a:t>
+            </a:r>
+            <a:r>
+              <a:rPr lang="en-US" sz="2175" dirty="0">
+                <a:solidFill>
+                  <a:srgbClr val="FFFFFF"/>
+                </a:solidFill>
+                <a:latin typeface="Arial" pitchFamily="34" charset="0"/>
+                <a:ea typeface="Arial" pitchFamily="34" charset="-122"/>
+                <a:cs typeface="Arial" pitchFamily="34" charset="-120"/>
+              </a:rPr>
+              <a:t>, on purpose.</a:t>
+            </a:r>
+            <a:endParaRPr lang="en-US" sz="2175" dirty="0"/>
+          </a:p>
+        </p:txBody>
+      </p:sp>
+      <p:sp>
+        <p:nvSpPr>
+          <p:cNvPr id="6" name="Text 4"/>
+          <p:cNvSpPr/>
+          <p:nvPr/>
+        </p:nvSpPr>
+        <p:spPr>
+          <a:xfrm>
+            <a:off x="990600" y="5782642"/>
+            <a:ext cx="202406" cy="352425"/>
+          </a:xfrm>
+          <a:prstGeom prst="rect">
+            <a:avLst/>
+          </a:prstGeom>
+          <a:noFill/>
+          <a:ln/>
+        </p:spPr>
+        <p:txBody>
+          <a:bodyPr wrap="square" lIns="25400" tIns="25400" rIns="25400" bIns="25400" rtlCol="0" anchor="t">
+            <a:normAutofit/>
+          </a:bodyPr>
+          <a:lstStyle/>
+          <a:p>
+            <a:pPr marL="0" indent="0" algn="l">
+              <a:lnSpc>
+                <a:spcPct val="132000"/>
+              </a:lnSpc>
+              <a:buNone/>
+            </a:pPr>
+            <a:r>
+              <a:rPr lang="en-US" sz="1650" dirty="0">
+                <a:solidFill>
+                  <a:srgbClr val="FD7EF5"/>
+                </a:solidFill>
+                <a:latin typeface="Courier New" pitchFamily="34" charset="0"/>
+                <a:ea typeface="Courier New" pitchFamily="34" charset="-122"/>
+                <a:cs typeface="Courier New" pitchFamily="34" charset="-120"/>
+              </a:rPr>
+              <a:t>▸</a:t>
+            </a:r>
+            <a:endParaRPr lang="en-US" sz="1650" dirty="0"/>
+          </a:p>
+        </p:txBody>
+      </p:sp>
+      <p:sp>
+        <p:nvSpPr>
+          <p:cNvPr id="7" name="Text 5"/>
+          <p:cNvSpPr/>
+          <p:nvPr/>
+        </p:nvSpPr>
+        <p:spPr>
+          <a:xfrm>
+            <a:off x="1307306" y="5782642"/>
+            <a:ext cx="15668528" cy="429518"/>
+          </a:xfrm>
+          <a:prstGeom prst="rect">
+            <a:avLst/>
+          </a:prstGeom>
+          <a:noFill/>
+          <a:ln/>
+        </p:spPr>
+        <p:txBody>
+          <a:bodyPr wrap="square" lIns="25400" tIns="25400" rIns="25400" bIns="25400" rtlCol="0" anchor="t">
+            <a:normAutofit/>
+          </a:bodyPr>
+          <a:lstStyle/>
+          <a:p>
+            <a:pPr marL="0" indent="0" algn="l">
               <a:lnSpc>
                 <a:spcPct val="121194"/>
               </a:lnSpc>
               <a:buNone/>
             </a:pPr>
             <a:r>
+              <a:rPr lang="en-US" sz="2175" dirty="0">
+                <a:solidFill>
+                  <a:srgbClr val="FFFFFF"/>
+                </a:solidFill>
+                <a:latin typeface="Arial" pitchFamily="34" charset="0"/>
+                <a:ea typeface="Arial" pitchFamily="34" charset="-122"/>
+                <a:cs typeface="Arial" pitchFamily="34" charset="-120"/>
+              </a:rPr>
+              <a:t>M8’s guardrail </a:t>
+            </a:r>
+            <a:r>
               <a:rPr lang="en-US" sz="2175" b="1" dirty="0">
                 <a:solidFill>
                   <a:srgbClr val="FFFFFF"/>
@@ -16116,9 +16465,91 @@
                 <a:ea typeface="Arial" pitchFamily="34" charset="-122"/>
                 <a:cs typeface="Arial" pitchFamily="34" charset="-120"/>
               </a:rPr>
-              <a:t>two </a:t>
-            </a:r>
-            <a:pPr algn="l" indent="0" marL="0">
+              <a:t>deliberately </a:t>
+            </a:r>
+            <a:r>
+              <a:rPr lang="en-US" sz="2175" dirty="0">
+                <a:solidFill>
+                  <a:srgbClr val="FFFFFF"/>
+                </a:solidFill>
+                <a:latin typeface="Arial" pitchFamily="34" charset="0"/>
+                <a:ea typeface="Arial" pitchFamily="34" charset="-122"/>
+                <a:cs typeface="Arial" pitchFamily="34" charset="-120"/>
+              </a:rPr>
+              <a:t>misses homoglyphs. A blocklist matches the literal string; the model understands meaning.</a:t>
+            </a:r>
+            <a:endParaRPr lang="en-US" sz="2175" dirty="0"/>
+          </a:p>
+        </p:txBody>
+      </p:sp>
+      <p:sp>
+        <p:nvSpPr>
+          <p:cNvPr id="8" name="Text 6"/>
+          <p:cNvSpPr/>
+          <p:nvPr/>
+        </p:nvSpPr>
+        <p:spPr>
+          <a:xfrm>
+            <a:off x="990600" y="6440760"/>
+            <a:ext cx="202406" cy="352425"/>
+          </a:xfrm>
+          <a:prstGeom prst="rect">
+            <a:avLst/>
+          </a:prstGeom>
+          <a:noFill/>
+          <a:ln/>
+        </p:spPr>
+        <p:txBody>
+          <a:bodyPr wrap="square" lIns="25400" tIns="25400" rIns="25400" bIns="25400" rtlCol="0" anchor="t">
+            <a:normAutofit/>
+          </a:bodyPr>
+          <a:lstStyle/>
+          <a:p>
+            <a:pPr marL="0" indent="0" algn="l">
+              <a:lnSpc>
+                <a:spcPct val="132000"/>
+              </a:lnSpc>
+              <a:buNone/>
+            </a:pPr>
+            <a:r>
+              <a:rPr lang="en-US" sz="1650" dirty="0">
+                <a:solidFill>
+                  <a:srgbClr val="FD7EF5"/>
+                </a:solidFill>
+                <a:latin typeface="Courier New" pitchFamily="34" charset="0"/>
+                <a:ea typeface="Courier New" pitchFamily="34" charset="-122"/>
+                <a:cs typeface="Courier New" pitchFamily="34" charset="-120"/>
+              </a:rPr>
+              <a:t>▸</a:t>
+            </a:r>
+            <a:endParaRPr lang="en-US" sz="1650" dirty="0"/>
+          </a:p>
+        </p:txBody>
+      </p:sp>
+      <p:sp>
+        <p:nvSpPr>
+          <p:cNvPr id="9" name="Text 7"/>
+          <p:cNvSpPr/>
+          <p:nvPr/>
+        </p:nvSpPr>
+        <p:spPr>
+          <a:xfrm>
+            <a:off x="1307306" y="6440760"/>
+            <a:ext cx="11609397" cy="429518"/>
+          </a:xfrm>
+          <a:prstGeom prst="rect">
+            <a:avLst/>
+          </a:prstGeom>
+          <a:noFill/>
+          <a:ln/>
+        </p:spPr>
+        <p:txBody>
+          <a:bodyPr wrap="square" lIns="25400" tIns="25400" rIns="25400" bIns="25400" rtlCol="0" anchor="t">
+            <a:normAutofit/>
+          </a:bodyPr>
+          <a:lstStyle/>
+          <a:p>
+            <a:pPr marL="0" indent="0" algn="l">
               <a:lnSpc>
                 <a:spcPct val="121194"/>
               </a:lnSpc>
@@ -16133,153 +16564,19 @@
                 <a:ea typeface="Arial" pitchFamily="34" charset="-122"/>
                 <a:cs typeface="Arial" pitchFamily="34" charset="-120"/>
               </a:rPr>
-              <a:t>independent guards (escape </a:t>
-            </a:r>
-            <a:pPr algn="l" indent="0" marL="0">
-              <a:lnSpc>
-                <a:spcPct val="121194"/>
-              </a:lnSpc>
-              <a:buNone/>
-            </a:pPr>
-            <a:r>
-              <a:rPr lang="en-US" sz="2175" b="1" dirty="0">
-                <a:solidFill>
-                  <a:srgbClr val="FFFFFF"/>
-                </a:solidFill>
-                <a:latin typeface="Arial" pitchFamily="34" charset="0"/>
-                <a:ea typeface="Arial" pitchFamily="34" charset="-122"/>
-                <a:cs typeface="Arial" pitchFamily="34" charset="-120"/>
-              </a:rPr>
-              <a:t>and </a:t>
-            </a:r>
-            <a:pPr algn="l" indent="0" marL="0">
-              <a:lnSpc>
-                <a:spcPct val="121194"/>
-              </a:lnSpc>
-              <a:buNone/>
-            </a:pPr>
-            <a:r>
-              <a:rPr lang="en-US" sz="2175" dirty="0">
-                <a:solidFill>
-                  <a:srgbClr val="FFFFFF"/>
-                </a:solidFill>
-                <a:latin typeface="Arial" pitchFamily="34" charset="0"/>
-                <a:ea typeface="Arial" pitchFamily="34" charset="-122"/>
-                <a:cs typeface="Arial" pitchFamily="34" charset="-120"/>
-              </a:rPr>
-              <a:t>CSP) — either alone stops the XSS. That is </a:t>
-            </a:r>
-            <a:pPr algn="l" indent="0" marL="0">
-              <a:lnSpc>
-                <a:spcPct val="121194"/>
-              </a:lnSpc>
-              <a:buNone/>
-            </a:pPr>
-            <a:r>
-              <a:rPr lang="en-US" sz="2175" b="1" dirty="0">
-                <a:solidFill>
-                  <a:srgbClr val="FFFFFF"/>
-                </a:solidFill>
-                <a:latin typeface="Arial" pitchFamily="34" charset="0"/>
-                <a:ea typeface="Arial" pitchFamily="34" charset="-122"/>
-                <a:cs typeface="Arial" pitchFamily="34" charset="-120"/>
-              </a:rPr>
-              <a:t>defense in depth</a:t>
-            </a:r>
-            <a:pPr algn="l" indent="0" marL="0">
-              <a:lnSpc>
-                <a:spcPct val="121194"/>
-              </a:lnSpc>
-              <a:buNone/>
-            </a:pPr>
-            <a:r>
-              <a:rPr lang="en-US" sz="2175" dirty="0">
-                <a:solidFill>
-                  <a:srgbClr val="FFFFFF"/>
-                </a:solidFill>
-                <a:latin typeface="Arial" pitchFamily="34" charset="0"/>
-                <a:ea typeface="Arial" pitchFamily="34" charset="-122"/>
-                <a:cs typeface="Arial" pitchFamily="34" charset="-120"/>
-              </a:rPr>
-              <a:t>, on purpose.</a:t>
-            </a:r>
-            <a:endParaRPr lang="en-US" sz="2175" dirty="0"/>
-          </a:p>
-        </p:txBody>
-      </p:sp>
-      <p:sp>
-        <p:nvSpPr>
-          <p:cNvPr id="6" name="Text 4"/>
-          <p:cNvSpPr/>
-          <p:nvPr/>
-        </p:nvSpPr>
-        <p:spPr>
-          <a:xfrm>
-            <a:off x="990600" y="5782642"/>
-            <a:ext cx="202406" cy="352425"/>
-          </a:xfrm>
-          <a:prstGeom prst="rect">
-            <a:avLst/>
-          </a:prstGeom>
-          <a:noFill/>
-          <a:ln/>
-        </p:spPr>
-        <p:txBody>
-          <a:bodyPr wrap="square" lIns="25400" tIns="25400" rIns="25400" bIns="25400" rtlCol="0" anchor="t">
-            <a:normAutofit/>
-          </a:bodyPr>
-          <a:lstStyle/>
-          <a:p>
-            <a:pPr algn="l" indent="0" marL="0">
-              <a:lnSpc>
-                <a:spcPct val="132000"/>
-              </a:lnSpc>
-              <a:buNone/>
-            </a:pPr>
-            <a:r>
-              <a:rPr lang="en-US" sz="1650" dirty="0">
-                <a:solidFill>
-                  <a:srgbClr val="FD7EF5"/>
+              <a:t>Flipping every flag to </a:t>
+            </a:r>
+            <a:r>
+              <a:rPr lang="en-US" sz="1950" dirty="0">
+                <a:solidFill>
+                  <a:srgbClr val="36CDFF"/>
                 </a:solidFill>
                 <a:latin typeface="Courier New" pitchFamily="34" charset="0"/>
                 <a:ea typeface="Courier New" pitchFamily="34" charset="-122"/>
                 <a:cs typeface="Courier New" pitchFamily="34" charset="-120"/>
               </a:rPr>
-              <a:t>▸</a:t>
-            </a:r>
-            <a:endParaRPr lang="en-US" sz="1650" dirty="0"/>
-          </a:p>
-        </p:txBody>
-      </p:sp>
-      <p:sp>
-        <p:nvSpPr>
-          <p:cNvPr id="7" name="Text 5"/>
-          <p:cNvSpPr/>
-          <p:nvPr/>
-        </p:nvSpPr>
-        <p:spPr>
-          <a:xfrm>
-            <a:off x="1307306" y="5782642"/>
-            <a:ext cx="15668528" cy="429518"/>
-          </a:xfrm>
-          <a:prstGeom prst="rect">
-            <a:avLst/>
-          </a:prstGeom>
-          <a:noFill/>
-          <a:ln/>
-        </p:spPr>
-        <p:txBody>
-          <a:bodyPr wrap="square" lIns="25400" tIns="25400" rIns="25400" bIns="25400" rtlCol="0" anchor="t">
-            <a:normAutofit/>
-          </a:bodyPr>
-          <a:lstStyle/>
-          <a:p>
-            <a:pPr algn="l" indent="0" marL="0">
-              <a:lnSpc>
-                <a:spcPct val="121194"/>
-              </a:lnSpc>
-              <a:buNone/>
-            </a:pPr>
+              <a:t>secure </a:t>
+            </a:r>
             <a:r>
               <a:rPr lang="en-US" sz="2175" dirty="0">
                 <a:solidFill>
@@ -16289,14 +16586,8 @@
                 <a:ea typeface="Arial" pitchFamily="34" charset="-122"/>
                 <a:cs typeface="Arial" pitchFamily="34" charset="-120"/>
               </a:rPr>
-              <a:t>M8’s guardrail </a:t>
-            </a:r>
-            <a:pPr algn="l" indent="0" marL="0">
-              <a:lnSpc>
-                <a:spcPct val="121194"/>
-              </a:lnSpc>
-              <a:buNone/>
-            </a:pPr>
+              <a:t>blocks </a:t>
+            </a:r>
             <a:r>
               <a:rPr lang="en-US" sz="2175" b="1" dirty="0">
                 <a:solidFill>
@@ -16306,14 +16597,8 @@
                 <a:ea typeface="Arial" pitchFamily="34" charset="-122"/>
                 <a:cs typeface="Arial" pitchFamily="34" charset="-120"/>
               </a:rPr>
-              <a:t>deliberately </a:t>
-            </a:r>
-            <a:pPr algn="l" indent="0" marL="0">
-              <a:lnSpc>
-                <a:spcPct val="121194"/>
-              </a:lnSpc>
-              <a:buNone/>
-            </a:pPr>
+              <a:t>your </a:t>
+            </a:r>
             <a:r>
               <a:rPr lang="en-US" sz="2175" dirty="0">
                 <a:solidFill>
@@ -16323,87 +16608,10 @@
                 <a:ea typeface="Arial" pitchFamily="34" charset="-122"/>
                 <a:cs typeface="Arial" pitchFamily="34" charset="-120"/>
               </a:rPr>
-              <a:t>misses homoglyphs. A blocklist matches the literal string; the model understands meaning.</a:t>
-            </a:r>
-            <a:endParaRPr lang="en-US" sz="2175" dirty="0"/>
-          </a:p>
-        </p:txBody>
-      </p:sp>
-      <p:sp>
-        <p:nvSpPr>
-          <p:cNvPr id="8" name="Text 6"/>
-          <p:cNvSpPr/>
-          <p:nvPr/>
-        </p:nvSpPr>
-        <p:spPr>
-          <a:xfrm>
-            <a:off x="990600" y="6440760"/>
-            <a:ext cx="202406" cy="352425"/>
-          </a:xfrm>
-          <a:prstGeom prst="rect">
-            <a:avLst/>
-          </a:prstGeom>
-          <a:noFill/>
-          <a:ln/>
-        </p:spPr>
-        <p:txBody>
-          <a:bodyPr wrap="square" lIns="25400" tIns="25400" rIns="25400" bIns="25400" rtlCol="0" anchor="t">
-            <a:normAutofit/>
-          </a:bodyPr>
-          <a:lstStyle/>
-          <a:p>
-            <a:pPr algn="l" indent="0" marL="0">
-              <a:lnSpc>
-                <a:spcPct val="132000"/>
-              </a:lnSpc>
-              <a:buNone/>
-            </a:pPr>
-            <a:r>
-              <a:rPr lang="en-US" sz="1650" dirty="0">
-                <a:solidFill>
-                  <a:srgbClr val="FD7EF5"/>
-                </a:solidFill>
-                <a:latin typeface="Courier New" pitchFamily="34" charset="0"/>
-                <a:ea typeface="Courier New" pitchFamily="34" charset="-122"/>
-                <a:cs typeface="Courier New" pitchFamily="34" charset="-120"/>
-              </a:rPr>
-              <a:t>▸</a:t>
-            </a:r>
-            <a:endParaRPr lang="en-US" sz="1650" dirty="0"/>
-          </a:p>
-        </p:txBody>
-      </p:sp>
-      <p:sp>
-        <p:nvSpPr>
-          <p:cNvPr id="9" name="Text 7"/>
-          <p:cNvSpPr/>
-          <p:nvPr/>
-        </p:nvSpPr>
-        <p:spPr>
-          <a:xfrm>
-            <a:off x="1307306" y="6440760"/>
-            <a:ext cx="11609397" cy="429518"/>
-          </a:xfrm>
-          <a:prstGeom prst="rect">
-            <a:avLst/>
-          </a:prstGeom>
-          <a:noFill/>
-          <a:ln/>
-        </p:spPr>
-        <p:txBody>
-          <a:bodyPr wrap="square" lIns="25400" tIns="25400" rIns="25400" bIns="25400" rtlCol="0" anchor="t">
-            <a:normAutofit/>
-          </a:bodyPr>
-          <a:lstStyle/>
-          <a:p>
-            <a:pPr algn="l" indent="0" marL="0">
-              <a:lnSpc>
-                <a:spcPct val="121194"/>
-              </a:lnSpc>
-              <a:buNone/>
-            </a:pPr>
-            <a:r>
-              <a:rPr lang="en-US" sz="2175" dirty="0">
+              <a:t>exploits — it does </a:t>
+            </a:r>
+            <a:r>
+              <a:rPr lang="en-US" sz="2175" b="1" dirty="0">
                 <a:solidFill>
                   <a:srgbClr val="FFFFFF"/>
                 </a:solidFill>
@@ -16411,99 +16619,8 @@
                 <a:ea typeface="Arial" pitchFamily="34" charset="-122"/>
                 <a:cs typeface="Arial" pitchFamily="34" charset="-120"/>
               </a:rPr>
-              <a:t>Flipping every flag to </a:t>
-            </a:r>
-            <a:pPr algn="l" indent="0" marL="0">
-              <a:lnSpc>
-                <a:spcPct val="121194"/>
-              </a:lnSpc>
-              <a:buNone/>
-            </a:pPr>
-            <a:r>
-              <a:rPr lang="en-US" sz="1950" dirty="0">
-                <a:solidFill>
-                  <a:srgbClr val="36CDFF"/>
-                </a:solidFill>
-                <a:latin typeface="Courier New" pitchFamily="34" charset="0"/>
-                <a:ea typeface="Courier New" pitchFamily="34" charset="-122"/>
-                <a:cs typeface="Courier New" pitchFamily="34" charset="-120"/>
-              </a:rPr>
-              <a:t>secure </a:t>
-            </a:r>
-            <a:pPr algn="l" indent="0" marL="0">
-              <a:lnSpc>
-                <a:spcPct val="121194"/>
-              </a:lnSpc>
-              <a:buNone/>
-            </a:pPr>
-            <a:r>
-              <a:rPr lang="en-US" sz="2175" dirty="0">
-                <a:solidFill>
-                  <a:srgbClr val="FFFFFF"/>
-                </a:solidFill>
-                <a:latin typeface="Arial" pitchFamily="34" charset="0"/>
-                <a:ea typeface="Arial" pitchFamily="34" charset="-122"/>
-                <a:cs typeface="Arial" pitchFamily="34" charset="-120"/>
-              </a:rPr>
-              <a:t>blocks </a:t>
-            </a:r>
-            <a:pPr algn="l" indent="0" marL="0">
-              <a:lnSpc>
-                <a:spcPct val="121194"/>
-              </a:lnSpc>
-              <a:buNone/>
-            </a:pPr>
-            <a:r>
-              <a:rPr lang="en-US" sz="2175" b="1" dirty="0">
-                <a:solidFill>
-                  <a:srgbClr val="FFFFFF"/>
-                </a:solidFill>
-                <a:latin typeface="Arial" pitchFamily="34" charset="0"/>
-                <a:ea typeface="Arial" pitchFamily="34" charset="-122"/>
-                <a:cs typeface="Arial" pitchFamily="34" charset="-120"/>
-              </a:rPr>
-              <a:t>your </a:t>
-            </a:r>
-            <a:pPr algn="l" indent="0" marL="0">
-              <a:lnSpc>
-                <a:spcPct val="121194"/>
-              </a:lnSpc>
-              <a:buNone/>
-            </a:pPr>
-            <a:r>
-              <a:rPr lang="en-US" sz="2175" dirty="0">
-                <a:solidFill>
-                  <a:srgbClr val="FFFFFF"/>
-                </a:solidFill>
-                <a:latin typeface="Arial" pitchFamily="34" charset="0"/>
-                <a:ea typeface="Arial" pitchFamily="34" charset="-122"/>
-                <a:cs typeface="Arial" pitchFamily="34" charset="-120"/>
-              </a:rPr>
-              <a:t>exploits — it does </a:t>
-            </a:r>
-            <a:pPr algn="l" indent="0" marL="0">
-              <a:lnSpc>
-                <a:spcPct val="121194"/>
-              </a:lnSpc>
-              <a:buNone/>
-            </a:pPr>
-            <a:r>
-              <a:rPr lang="en-US" sz="2175" b="1" dirty="0">
-                <a:solidFill>
-                  <a:srgbClr val="FFFFFF"/>
-                </a:solidFill>
-                <a:latin typeface="Arial" pitchFamily="34" charset="0"/>
-                <a:ea typeface="Arial" pitchFamily="34" charset="-122"/>
-                <a:cs typeface="Arial" pitchFamily="34" charset="-120"/>
-              </a:rPr>
               <a:t>not </a:t>
             </a:r>
-            <a:pPr algn="l" indent="0" marL="0">
-              <a:lnSpc>
-                <a:spcPct val="121194"/>
-              </a:lnSpc>
-              <a:buNone/>
-            </a:pPr>
             <a:r>
               <a:rPr lang="en-US" sz="2175" dirty="0">
                 <a:solidFill>
@@ -16521,14 +16638,14 @@
       </p:sp>
       <p:pic>
         <p:nvPicPr>
-          <p:cNvPr id="10" name="Image 0" descr="preencoded.png">    </p:cNvPr>
+          <p:cNvPr id="10" name="Image 0" descr="preencoded.png"/>
           <p:cNvPicPr>
             <a:picLocks noChangeAspect="1"/>
           </p:cNvPicPr>
           <p:nvPr/>
         </p:nvPicPr>
         <p:blipFill>
-          <a:blip r:embed="rId1"/>
+          <a:blip r:embed="rId3"/>
           <a:stretch>
             <a:fillRect/>
           </a:stretch>
@@ -16566,11 +16683,11 @@
           </a:bodyPr>
           <a:lstStyle/>
           <a:p>
-            <a:pPr algn="l" indent="0" marL="0">
-              <a:buNone/>
-            </a:pPr>
-            <a:r>
-              <a:rPr lang="en-US" sz="1200" spc="264" kern="0" dirty="0">
+            <a:pPr marL="0" indent="0" algn="l">
+              <a:buNone/>
+            </a:pPr>
+            <a:r>
+              <a:rPr lang="en-US" sz="1200" kern="0" spc="264" dirty="0">
                 <a:solidFill>
                   <a:srgbClr val="969696"/>
                 </a:solidFill>
@@ -16885,4 +17002,319 @@
     </a:ext>
   </a:extLst>
 </a:theme>
+</file>
+
+<file path=ppt/theme/theme2.xml><?xml version="1.0" encoding="utf-8"?>
+<a:theme xmlns:a="http://schemas.openxmlformats.org/drawingml/2006/main" name="Office Theme">
+  <a:themeElements>
+    <a:clrScheme name="Office">
+      <a:dk1>
+        <a:sysClr val="windowText" lastClr="000000"/>
+      </a:dk1>
+      <a:lt1>
+        <a:sysClr val="window" lastClr="FFFFFF"/>
+      </a:lt1>
+      <a:dk2>
+        <a:srgbClr val="0E2841"/>
+      </a:dk2>
+      <a:lt2>
+        <a:srgbClr val="E8E8E8"/>
+      </a:lt2>
+      <a:accent1>
+        <a:srgbClr val="156082"/>
+      </a:accent1>
+      <a:accent2>
+        <a:srgbClr val="E97132"/>
+      </a:accent2>
+      <a:accent3>
+        <a:srgbClr val="196B24"/>
+      </a:accent3>
+      <a:accent4>
+        <a:srgbClr val="0F9ED5"/>
+      </a:accent4>
+      <a:accent5>
+        <a:srgbClr val="A02B93"/>
+      </a:accent5>
+      <a:accent6>
+        <a:srgbClr val="4EA72E"/>
+      </a:accent6>
+      <a:hlink>
+        <a:srgbClr val="467886"/>
+      </a:hlink>
+      <a:folHlink>
+        <a:srgbClr val="96607D"/>
+      </a:folHlink>
+    </a:clrScheme>
+    <a:fontScheme name="Office">
+      <a:majorFont>
+        <a:latin typeface="Aptos Display" panose="02110004020202020204"/>
+        <a:ea typeface=""/>
+        <a:cs typeface=""/>
+        <a:font script="Jpan" typeface="游ゴシック Light"/>
+        <a:font script="Hang" typeface="맑은 고딕"/>
+        <a:font script="Hans" typeface="等线 Light"/>
+        <a:font script="Hant" typeface="新細明體"/>
+        <a:font script="Arab" typeface="Times New Roman"/>
+        <a:font script="Hebr" typeface="Times New Roman"/>
+        <a:font script="Thai" typeface="Angsana New"/>
+        <a:font script="Ethi" typeface="Nyala"/>
+        <a:font script="Beng" typeface="Vrinda"/>
+        <a:font script="Gujr" typeface="Shruti"/>
+        <a:font script="Khmr" typeface="MoolBoran"/>
+        <a:font script="Knda" typeface="Tunga"/>
+        <a:font script="Guru" typeface="Raavi"/>
+        <a:font script="Cans" typeface="Euphemia"/>
+        <a:font script="Cher" typeface="Plantagenet Cherokee"/>
+        <a:font script="Yiii" typeface="Microsoft Yi Baiti"/>
+        <a:font script="Tibt" typeface="Microsoft Himalaya"/>
+        <a:font script="Thaa" typeface="MV Boli"/>
+        <a:font script="Deva" typeface="Mangal"/>
+        <a:font script="Telu" typeface="Gautami"/>
+        <a:font script="Taml" typeface="Latha"/>
+        <a:font script="Syrc" typeface="Estrangelo Edessa"/>
+        <a:font script="Orya" typeface="Kalinga"/>
+        <a:font script="Mlym" typeface="Kartika"/>
+        <a:font script="Laoo" typeface="DokChampa"/>
+        <a:font script="Sinh" typeface="Iskoola Pota"/>
+        <a:font script="Mong" typeface="Mongolian Baiti"/>
+        <a:font script="Viet" typeface="Times New Roman"/>
+        <a:font script="Uigh" typeface="Microsoft Uighur"/>
+        <a:font script="Geor" typeface="Sylfaen"/>
+        <a:font script="Armn" typeface="Arial"/>
+        <a:font script="Bugi" typeface="Leelawadee UI"/>
+        <a:font script="Bopo" typeface="Microsoft JhengHei"/>
+        <a:font script="Java" typeface="Javanese Text"/>
+        <a:font script="Lisu" typeface="Segoe UI"/>
+        <a:font script="Mymr" typeface="Myanmar Text"/>
+        <a:font script="Nkoo" typeface="Ebrima"/>
+        <a:font script="Olck" typeface="Nirmala UI"/>
+        <a:font script="Osma" typeface="Ebrima"/>
+        <a:font script="Phag" typeface="Phagspa"/>
+        <a:font script="Syrn" typeface="Estrangelo Edessa"/>
+        <a:font script="Syrj" typeface="Estrangelo Edessa"/>
+        <a:font script="Syre" typeface="Estrangelo Edessa"/>
+        <a:font script="Sora" typeface="Nirmala UI"/>
+        <a:font script="Tale" typeface="Microsoft Tai Le"/>
+        <a:font script="Talu" typeface="Microsoft New Tai Lue"/>
+        <a:font script="Tfng" typeface="Ebrima"/>
+      </a:majorFont>
+      <a:minorFont>
+        <a:latin typeface="Aptos" panose="02110004020202020204"/>
+        <a:ea typeface=""/>
+        <a:cs typeface=""/>
+        <a:font script="Jpan" typeface="游ゴシック"/>
+        <a:font script="Hang" typeface="맑은 고딕"/>
+        <a:font script="Hans" typeface="等线"/>
+        <a:font script="Hant" typeface="新細明體"/>
+        <a:font script="Arab" typeface="Arial"/>
+        <a:font script="Hebr" typeface="Arial"/>
+        <a:font script="Thai" typeface="Cordia New"/>
+        <a:font script="Ethi" typeface="Nyala"/>
+        <a:font script="Beng" typeface="Vrinda"/>
+        <a:font script="Gujr" typeface="Shruti"/>
+        <a:font script="Khmr" typeface="DaunPenh"/>
+        <a:font script="Knda" typeface="Tunga"/>
+        <a:font script="Guru" typeface="Raavi"/>
+        <a:font script="Cans" typeface="Euphemia"/>
+        <a:font script="Cher" typeface="Plantagenet Cherokee"/>
+        <a:font script="Yiii" typeface="Microsoft Yi Baiti"/>
+        <a:font script="Tibt" typeface="Microsoft Himalaya"/>
+        <a:font script="Thaa" typeface="MV Boli"/>
+        <a:font script="Deva" typeface="Mangal"/>
+        <a:font script="Telu" typeface="Gautami"/>
+        <a:font script="Taml" typeface="Latha"/>
+        <a:font script="Syrc" typeface="Estrangelo Edessa"/>
+        <a:font script="Orya" typeface="Kalinga"/>
+        <a:font script="Mlym" typeface="Kartika"/>
+        <a:font script="Laoo" typeface="DokChampa"/>
+        <a:font script="Sinh" typeface="Iskoola Pota"/>
+        <a:font script="Mong" typeface="Mongolian Baiti"/>
+        <a:font script="Viet" typeface="Arial"/>
+        <a:font script="Uigh" typeface="Microsoft Uighur"/>
+        <a:font script="Geor" typeface="Sylfaen"/>
+        <a:font script="Armn" typeface="Arial"/>
+        <a:font script="Bugi" typeface="Leelawadee UI"/>
+        <a:font script="Bopo" typeface="Microsoft JhengHei"/>
+        <a:font script="Java" typeface="Javanese Text"/>
+        <a:font script="Lisu" typeface="Segoe UI"/>
+        <a:font script="Mymr" typeface="Myanmar Text"/>
+        <a:font script="Nkoo" typeface="Ebrima"/>
+        <a:font script="Olck" typeface="Nirmala UI"/>
+        <a:font script="Osma" typeface="Ebrima"/>
+        <a:font script="Phag" typeface="Phagspa"/>
+        <a:font script="Syrn" typeface="Estrangelo Edessa"/>
+        <a:font script="Syrj" typeface="Estrangelo Edessa"/>
+        <a:font script="Syre" typeface="Estrangelo Edessa"/>
+        <a:font script="Sora" typeface="Nirmala UI"/>
+        <a:font script="Tale" typeface="Microsoft Tai Le"/>
+        <a:font script="Talu" typeface="Microsoft New Tai Lue"/>
+        <a:font script="Tfng" typeface="Ebrima"/>
+      </a:minorFont>
+    </a:fontScheme>
+    <a:fmtScheme name="Office">
+      <a:fillStyleLst>
+        <a:solidFill>
+          <a:schemeClr val="phClr"/>
+        </a:solidFill>
+        <a:gradFill rotWithShape="1">
+          <a:gsLst>
+            <a:gs pos="0">
+              <a:schemeClr val="phClr">
+                <a:lumMod val="110000"/>
+                <a:satMod val="105000"/>
+                <a:tint val="67000"/>
+              </a:schemeClr>
+            </a:gs>
+            <a:gs pos="50000">
+              <a:schemeClr val="phClr">
+                <a:lumMod val="105000"/>
+                <a:satMod val="103000"/>
+                <a:tint val="73000"/>
+              </a:schemeClr>
+            </a:gs>
+            <a:gs pos="100000">
+              <a:schemeClr val="phClr">
+                <a:lumMod val="105000"/>
+                <a:satMod val="109000"/>
+                <a:tint val="81000"/>
+              </a:schemeClr>
+            </a:gs>
+          </a:gsLst>
+          <a:lin ang="5400000" scaled="0"/>
+        </a:gradFill>
+        <a:gradFill rotWithShape="1">
+          <a:gsLst>
+            <a:gs pos="0">
+              <a:schemeClr val="phClr">
+                <a:satMod val="103000"/>
+                <a:lumMod val="102000"/>
+                <a:tint val="94000"/>
+              </a:schemeClr>
+            </a:gs>
+            <a:gs pos="50000">
+              <a:schemeClr val="phClr">
+                <a:satMod val="110000"/>
+                <a:lumMod val="100000"/>
+                <a:shade val="100000"/>
+              </a:schemeClr>
+            </a:gs>
+            <a:gs pos="100000">
+              <a:schemeClr val="phClr">
+                <a:lumMod val="99000"/>
+                <a:satMod val="120000"/>
+                <a:shade val="78000"/>
+              </a:schemeClr>
+            </a:gs>
+          </a:gsLst>
+          <a:lin ang="5400000" scaled="0"/>
+        </a:gradFill>
+      </a:fillStyleLst>
+      <a:lnStyleLst>
+        <a:ln w="12700" cap="flat" cmpd="sng" algn="ctr">
+          <a:solidFill>
+            <a:schemeClr val="phClr"/>
+          </a:solidFill>
+          <a:prstDash val="solid"/>
+          <a:miter lim="800000"/>
+        </a:ln>
+        <a:ln w="19050" cap="flat" cmpd="sng" algn="ctr">
+          <a:solidFill>
+            <a:schemeClr val="phClr"/>
+          </a:solidFill>
+          <a:prstDash val="solid"/>
+          <a:miter lim="800000"/>
+        </a:ln>
+        <a:ln w="25400" cap="flat" cmpd="sng" algn="ctr">
+          <a:solidFill>
+            <a:schemeClr val="phClr"/>
+          </a:solidFill>
+          <a:prstDash val="solid"/>
+          <a:miter lim="800000"/>
+        </a:ln>
+      </a:lnStyleLst>
+      <a:effectStyleLst>
+        <a:effectStyle>
+          <a:effectLst/>
+        </a:effectStyle>
+        <a:effectStyle>
+          <a:effectLst/>
+        </a:effectStyle>
+        <a:effectStyle>
+          <a:effectLst>
+            <a:outerShdw blurRad="57150" dist="19050" dir="5400000" algn="ctr" rotWithShape="0">
+              <a:srgbClr val="000000">
+                <a:alpha val="63000"/>
+              </a:srgbClr>
+            </a:outerShdw>
+          </a:effectLst>
+        </a:effectStyle>
+      </a:effectStyleLst>
+      <a:bgFillStyleLst>
+        <a:solidFill>
+          <a:schemeClr val="phClr"/>
+        </a:solidFill>
+        <a:solidFill>
+          <a:schemeClr val="phClr">
+            <a:tint val="95000"/>
+            <a:satMod val="170000"/>
+          </a:schemeClr>
+        </a:solidFill>
+        <a:gradFill rotWithShape="1">
+          <a:gsLst>
+            <a:gs pos="0">
+              <a:schemeClr val="phClr">
+                <a:tint val="93000"/>
+                <a:satMod val="150000"/>
+                <a:shade val="98000"/>
+                <a:lumMod val="102000"/>
+              </a:schemeClr>
+            </a:gs>
+            <a:gs pos="50000">
+              <a:schemeClr val="phClr">
+                <a:tint val="98000"/>
+                <a:satMod val="130000"/>
+                <a:shade val="90000"/>
+                <a:lumMod val="103000"/>
+              </a:schemeClr>
+            </a:gs>
+            <a:gs pos="100000">
+              <a:schemeClr val="phClr">
+                <a:shade val="63000"/>
+                <a:satMod val="120000"/>
+              </a:schemeClr>
+            </a:gs>
+          </a:gsLst>
+          <a:lin ang="5400000" scaled="0"/>
+        </a:gradFill>
+      </a:bgFillStyleLst>
+    </a:fmtScheme>
+  </a:themeElements>
+  <a:objectDefaults>
+    <a:lnDef>
+      <a:spPr/>
+      <a:bodyPr/>
+      <a:lstStyle/>
+      <a:style>
+        <a:lnRef idx="2">
+          <a:schemeClr val="accent1"/>
+        </a:lnRef>
+        <a:fillRef idx="0">
+          <a:schemeClr val="accent1"/>
+        </a:fillRef>
+        <a:effectRef idx="1">
+          <a:schemeClr val="accent1"/>
+        </a:effectRef>
+        <a:fontRef idx="minor">
+          <a:schemeClr val="tx1"/>
+        </a:fontRef>
+      </a:style>
+    </a:lnDef>
+  </a:objectDefaults>
+  <a:extraClrSchemeLst/>
+  <a:extLst>
+    <a:ext uri="{05A4C25C-085E-4340-85A3-A5531E510DB2}">
+      <thm15:themeFamily xmlns:thm15="http://schemas.microsoft.com/office/thememl/2012/main" name="Office Theme" id="{2E142A2C-CD16-42D6-873A-C26D2A0506FA}" vid="{1BDDFF52-6CD6-40A5-AB3C-68EB2F1E4D0A}"/>
+    </a:ext>
+  </a:extLst>
+</a:theme>
 </file>